--- a/slides/modules/m08-app-security-testing.pptx
+++ b/slides/modules/m08-app-security-testing.pptx
@@ -4494,11 +4494,11 @@
         <p:spPr>
           <a:xfrm>
             <a:off x="841248" y="2395728"/>
-            <a:ext cx="5715000" cy="438912"/>
+            <a:ext cx="5138928" cy="786384"/>
           </a:xfrm>
           <a:prstGeom prst="roundRect">
             <a:avLst>
-              <a:gd name="adj" fmla="val 6000"/>
+              <a:gd name="adj" fmla="val 7000"/>
             </a:avLst>
           </a:prstGeom>
           <a:solidFill>
@@ -4533,9 +4533,55 @@
           </a:p>
         </p:txBody>
       </p:sp>
+      <p:sp>
+        <p:nvSpPr>
+          <p:cNvPr id="7" name="Rounded Rectangle 6"/>
+          <p:cNvSpPr/>
+          <p:nvPr/>
+        </p:nvSpPr>
+        <p:spPr>
+          <a:xfrm>
+            <a:off x="987552" y="2532888"/>
+            <a:ext cx="512064" cy="512064"/>
+          </a:xfrm>
+          <a:prstGeom prst="roundRect">
+            <a:avLst>
+              <a:gd name="adj" fmla="val 26000"/>
+            </a:avLst>
+          </a:prstGeom>
+          <a:solidFill>
+            <a:srgbClr val="EE0000"/>
+          </a:solidFill>
+          <a:ln>
+            <a:noFill/>
+          </a:ln>
+          <a:effectLst/>
+        </p:spPr>
+        <p:style>
+          <a:lnRef idx="1">
+            <a:schemeClr val="accent1"/>
+          </a:lnRef>
+          <a:fillRef idx="3">
+            <a:schemeClr val="accent1"/>
+          </a:fillRef>
+          <a:effectRef idx="2">
+            <a:schemeClr val="accent1"/>
+          </a:effectRef>
+          <a:fontRef idx="minor">
+            <a:schemeClr val="lt1"/>
+          </a:fontRef>
+        </p:style>
+        <p:txBody>
+          <a:bodyPr rtlCol="0" anchor="ctr"/>
+          <a:lstStyle/>
+          <a:p>
+            <a:pPr algn="ctr"/>
+          </a:p>
+        </p:txBody>
+      </p:sp>
       <p:pic>
         <p:nvPicPr>
-          <p:cNvPr id="7" name="Picture 6" descr="check_steel.png"/>
+          <p:cNvPr id="8" name="Picture 7" descr="check_white.png"/>
           <p:cNvPicPr>
             <a:picLocks noChangeAspect="1"/>
           </p:cNvPicPr>
@@ -4549,8 +4595,8 @@
         </p:blipFill>
         <p:spPr>
           <a:xfrm>
-            <a:off x="987552" y="2496312"/>
-            <a:ext cx="237744" cy="237744"/>
+            <a:off x="1110447" y="2655783"/>
+            <a:ext cx="266273" cy="266273"/>
           </a:xfrm>
           <a:prstGeom prst="rect">
             <a:avLst/>
@@ -4559,14 +4605,14 @@
       </p:pic>
       <p:sp>
         <p:nvSpPr>
-          <p:cNvPr id="8" name="TextBox 7"/>
+          <p:cNvPr id="9" name="TextBox 8"/>
           <p:cNvSpPr txBox="1"/>
           <p:nvPr/>
         </p:nvSpPr>
         <p:spPr>
           <a:xfrm>
-            <a:off x="1353312" y="2395728"/>
-            <a:ext cx="5029200" cy="438912"/>
+            <a:off x="1627632" y="2395728"/>
+            <a:ext cx="4206240" cy="786384"/>
           </a:xfrm>
           <a:prstGeom prst="rect">
             <a:avLst/>
@@ -4591,7 +4637,7 @@
               </a:spcAft>
             </a:pPr>
             <a:r>
-              <a:rPr sz="1200" b="0">
+              <a:rPr sz="1150" b="0">
                 <a:solidFill>
                   <a:srgbClr val="1A1A1A"/>
                 </a:solidFill>
@@ -4604,18 +4650,18 @@
       </p:sp>
       <p:sp>
         <p:nvSpPr>
-          <p:cNvPr id="9" name="Rounded Rectangle 8"/>
+          <p:cNvPr id="10" name="Rounded Rectangle 9"/>
           <p:cNvSpPr/>
           <p:nvPr/>
         </p:nvSpPr>
         <p:spPr>
           <a:xfrm>
-            <a:off x="841248" y="2907792"/>
-            <a:ext cx="5715000" cy="438912"/>
+            <a:off x="6254496" y="2395728"/>
+            <a:ext cx="5138928" cy="786384"/>
           </a:xfrm>
           <a:prstGeom prst="roundRect">
             <a:avLst>
-              <a:gd name="adj" fmla="val 6000"/>
+              <a:gd name="adj" fmla="val 7000"/>
             </a:avLst>
           </a:prstGeom>
           <a:solidFill>
@@ -4650,9 +4696,55 @@
           </a:p>
         </p:txBody>
       </p:sp>
+      <p:sp>
+        <p:nvSpPr>
+          <p:cNvPr id="11" name="Rounded Rectangle 10"/>
+          <p:cNvSpPr/>
+          <p:nvPr/>
+        </p:nvSpPr>
+        <p:spPr>
+          <a:xfrm>
+            <a:off x="6400800" y="2532888"/>
+            <a:ext cx="512064" cy="512064"/>
+          </a:xfrm>
+          <a:prstGeom prst="roundRect">
+            <a:avLst>
+              <a:gd name="adj" fmla="val 26000"/>
+            </a:avLst>
+          </a:prstGeom>
+          <a:solidFill>
+            <a:srgbClr val="EE0000"/>
+          </a:solidFill>
+          <a:ln>
+            <a:noFill/>
+          </a:ln>
+          <a:effectLst/>
+        </p:spPr>
+        <p:style>
+          <a:lnRef idx="1">
+            <a:schemeClr val="accent1"/>
+          </a:lnRef>
+          <a:fillRef idx="3">
+            <a:schemeClr val="accent1"/>
+          </a:fillRef>
+          <a:effectRef idx="2">
+            <a:schemeClr val="accent1"/>
+          </a:effectRef>
+          <a:fontRef idx="minor">
+            <a:schemeClr val="lt1"/>
+          </a:fontRef>
+        </p:style>
+        <p:txBody>
+          <a:bodyPr rtlCol="0" anchor="ctr"/>
+          <a:lstStyle/>
+          <a:p>
+            <a:pPr algn="ctr"/>
+          </a:p>
+        </p:txBody>
+      </p:sp>
       <p:pic>
         <p:nvPicPr>
-          <p:cNvPr id="10" name="Picture 9" descr="check_steel.png"/>
+          <p:cNvPr id="12" name="Picture 11" descr="check_white.png"/>
           <p:cNvPicPr>
             <a:picLocks noChangeAspect="1"/>
           </p:cNvPicPr>
@@ -4666,8 +4758,8 @@
         </p:blipFill>
         <p:spPr>
           <a:xfrm>
-            <a:off x="987552" y="3008376"/>
-            <a:ext cx="237744" cy="237744"/>
+            <a:off x="6523695" y="2655783"/>
+            <a:ext cx="266273" cy="266273"/>
           </a:xfrm>
           <a:prstGeom prst="rect">
             <a:avLst/>
@@ -4676,14 +4768,14 @@
       </p:pic>
       <p:sp>
         <p:nvSpPr>
-          <p:cNvPr id="11" name="TextBox 10"/>
+          <p:cNvPr id="13" name="TextBox 12"/>
           <p:cNvSpPr txBox="1"/>
           <p:nvPr/>
         </p:nvSpPr>
         <p:spPr>
           <a:xfrm>
-            <a:off x="1353312" y="2907792"/>
-            <a:ext cx="5029200" cy="438912"/>
+            <a:off x="7040880" y="2395728"/>
+            <a:ext cx="4206240" cy="786384"/>
           </a:xfrm>
           <a:prstGeom prst="rect">
             <a:avLst/>
@@ -4708,7 +4800,7 @@
               </a:spcAft>
             </a:pPr>
             <a:r>
-              <a:rPr sz="1200" b="0">
+              <a:rPr sz="1150" b="0">
                 <a:solidFill>
                   <a:srgbClr val="1A1A1A"/>
                 </a:solidFill>
@@ -4721,18 +4813,18 @@
       </p:sp>
       <p:sp>
         <p:nvSpPr>
-          <p:cNvPr id="12" name="Rounded Rectangle 11"/>
+          <p:cNvPr id="14" name="Rounded Rectangle 13"/>
           <p:cNvSpPr/>
           <p:nvPr/>
         </p:nvSpPr>
         <p:spPr>
           <a:xfrm>
-            <a:off x="841248" y="3419856"/>
-            <a:ext cx="5715000" cy="438912"/>
+            <a:off x="841248" y="3328416"/>
+            <a:ext cx="5138928" cy="786384"/>
           </a:xfrm>
           <a:prstGeom prst="roundRect">
             <a:avLst>
-              <a:gd name="adj" fmla="val 6000"/>
+              <a:gd name="adj" fmla="val 7000"/>
             </a:avLst>
           </a:prstGeom>
           <a:solidFill>
@@ -4767,9 +4859,55 @@
           </a:p>
         </p:txBody>
       </p:sp>
+      <p:sp>
+        <p:nvSpPr>
+          <p:cNvPr id="15" name="Rounded Rectangle 14"/>
+          <p:cNvSpPr/>
+          <p:nvPr/>
+        </p:nvSpPr>
+        <p:spPr>
+          <a:xfrm>
+            <a:off x="987552" y="3465576"/>
+            <a:ext cx="512064" cy="512064"/>
+          </a:xfrm>
+          <a:prstGeom prst="roundRect">
+            <a:avLst>
+              <a:gd name="adj" fmla="val 26000"/>
+            </a:avLst>
+          </a:prstGeom>
+          <a:solidFill>
+            <a:srgbClr val="EE0000"/>
+          </a:solidFill>
+          <a:ln>
+            <a:noFill/>
+          </a:ln>
+          <a:effectLst/>
+        </p:spPr>
+        <p:style>
+          <a:lnRef idx="1">
+            <a:schemeClr val="accent1"/>
+          </a:lnRef>
+          <a:fillRef idx="3">
+            <a:schemeClr val="accent1"/>
+          </a:fillRef>
+          <a:effectRef idx="2">
+            <a:schemeClr val="accent1"/>
+          </a:effectRef>
+          <a:fontRef idx="minor">
+            <a:schemeClr val="lt1"/>
+          </a:fontRef>
+        </p:style>
+        <p:txBody>
+          <a:bodyPr rtlCol="0" anchor="ctr"/>
+          <a:lstStyle/>
+          <a:p>
+            <a:pPr algn="ctr"/>
+          </a:p>
+        </p:txBody>
+      </p:sp>
       <p:pic>
         <p:nvPicPr>
-          <p:cNvPr id="13" name="Picture 12" descr="check_steel.png"/>
+          <p:cNvPr id="16" name="Picture 15" descr="check_white.png"/>
           <p:cNvPicPr>
             <a:picLocks noChangeAspect="1"/>
           </p:cNvPicPr>
@@ -4783,8 +4921,8 @@
         </p:blipFill>
         <p:spPr>
           <a:xfrm>
-            <a:off x="987552" y="3520440"/>
-            <a:ext cx="237744" cy="237744"/>
+            <a:off x="1110447" y="3588471"/>
+            <a:ext cx="266273" cy="266273"/>
           </a:xfrm>
           <a:prstGeom prst="rect">
             <a:avLst/>
@@ -4793,14 +4931,14 @@
       </p:pic>
       <p:sp>
         <p:nvSpPr>
-          <p:cNvPr id="14" name="TextBox 13"/>
+          <p:cNvPr id="17" name="TextBox 16"/>
           <p:cNvSpPr txBox="1"/>
           <p:nvPr/>
         </p:nvSpPr>
         <p:spPr>
           <a:xfrm>
-            <a:off x="1353312" y="3419856"/>
-            <a:ext cx="5029200" cy="438912"/>
+            <a:off x="1627632" y="3328416"/>
+            <a:ext cx="4206240" cy="786384"/>
           </a:xfrm>
           <a:prstGeom prst="rect">
             <a:avLst/>
@@ -4825,7 +4963,7 @@
               </a:spcAft>
             </a:pPr>
             <a:r>
-              <a:rPr sz="1200" b="0">
+              <a:rPr sz="1150" b="0">
                 <a:solidFill>
                   <a:srgbClr val="1A1A1A"/>
                 </a:solidFill>
@@ -4838,18 +4976,18 @@
       </p:sp>
       <p:sp>
         <p:nvSpPr>
-          <p:cNvPr id="15" name="Rounded Rectangle 14"/>
+          <p:cNvPr id="18" name="Rounded Rectangle 17"/>
           <p:cNvSpPr/>
           <p:nvPr/>
         </p:nvSpPr>
         <p:spPr>
           <a:xfrm>
-            <a:off x="841248" y="3931920"/>
-            <a:ext cx="5715000" cy="438912"/>
+            <a:off x="6254496" y="3328416"/>
+            <a:ext cx="5138928" cy="786384"/>
           </a:xfrm>
           <a:prstGeom prst="roundRect">
             <a:avLst>
-              <a:gd name="adj" fmla="val 6000"/>
+              <a:gd name="adj" fmla="val 7000"/>
             </a:avLst>
           </a:prstGeom>
           <a:solidFill>
@@ -4884,9 +5022,55 @@
           </a:p>
         </p:txBody>
       </p:sp>
+      <p:sp>
+        <p:nvSpPr>
+          <p:cNvPr id="19" name="Rounded Rectangle 18"/>
+          <p:cNvSpPr/>
+          <p:nvPr/>
+        </p:nvSpPr>
+        <p:spPr>
+          <a:xfrm>
+            <a:off x="6400800" y="3465576"/>
+            <a:ext cx="512064" cy="512064"/>
+          </a:xfrm>
+          <a:prstGeom prst="roundRect">
+            <a:avLst>
+              <a:gd name="adj" fmla="val 26000"/>
+            </a:avLst>
+          </a:prstGeom>
+          <a:solidFill>
+            <a:srgbClr val="EE0000"/>
+          </a:solidFill>
+          <a:ln>
+            <a:noFill/>
+          </a:ln>
+          <a:effectLst/>
+        </p:spPr>
+        <p:style>
+          <a:lnRef idx="1">
+            <a:schemeClr val="accent1"/>
+          </a:lnRef>
+          <a:fillRef idx="3">
+            <a:schemeClr val="accent1"/>
+          </a:fillRef>
+          <a:effectRef idx="2">
+            <a:schemeClr val="accent1"/>
+          </a:effectRef>
+          <a:fontRef idx="minor">
+            <a:schemeClr val="lt1"/>
+          </a:fontRef>
+        </p:style>
+        <p:txBody>
+          <a:bodyPr rtlCol="0" anchor="ctr"/>
+          <a:lstStyle/>
+          <a:p>
+            <a:pPr algn="ctr"/>
+          </a:p>
+        </p:txBody>
+      </p:sp>
       <p:pic>
         <p:nvPicPr>
-          <p:cNvPr id="16" name="Picture 15" descr="check_steel.png"/>
+          <p:cNvPr id="20" name="Picture 19" descr="check_white.png"/>
           <p:cNvPicPr>
             <a:picLocks noChangeAspect="1"/>
           </p:cNvPicPr>
@@ -4900,8 +5084,8 @@
         </p:blipFill>
         <p:spPr>
           <a:xfrm>
-            <a:off x="987552" y="4032504"/>
-            <a:ext cx="237744" cy="237744"/>
+            <a:off x="6523695" y="3588471"/>
+            <a:ext cx="266273" cy="266273"/>
           </a:xfrm>
           <a:prstGeom prst="rect">
             <a:avLst/>
@@ -4910,14 +5094,14 @@
       </p:pic>
       <p:sp>
         <p:nvSpPr>
-          <p:cNvPr id="17" name="TextBox 16"/>
+          <p:cNvPr id="21" name="TextBox 20"/>
           <p:cNvSpPr txBox="1"/>
           <p:nvPr/>
         </p:nvSpPr>
         <p:spPr>
           <a:xfrm>
-            <a:off x="1353312" y="3931920"/>
-            <a:ext cx="5029200" cy="438912"/>
+            <a:off x="7040880" y="3328416"/>
+            <a:ext cx="4206240" cy="786384"/>
           </a:xfrm>
           <a:prstGeom prst="rect">
             <a:avLst/>
@@ -4942,7 +5126,7 @@
               </a:spcAft>
             </a:pPr>
             <a:r>
-              <a:rPr sz="1200" b="0">
+              <a:rPr sz="1150" b="0">
                 <a:solidFill>
                   <a:srgbClr val="1A1A1A"/>
                 </a:solidFill>
@@ -4955,18 +5139,18 @@
       </p:sp>
       <p:sp>
         <p:nvSpPr>
-          <p:cNvPr id="18" name="Rounded Rectangle 17"/>
+          <p:cNvPr id="22" name="Rounded Rectangle 21"/>
           <p:cNvSpPr/>
           <p:nvPr/>
         </p:nvSpPr>
         <p:spPr>
           <a:xfrm>
-            <a:off x="841248" y="4443984"/>
-            <a:ext cx="5715000" cy="438912"/>
+            <a:off x="841248" y="4261104"/>
+            <a:ext cx="5138928" cy="786384"/>
           </a:xfrm>
           <a:prstGeom prst="roundRect">
             <a:avLst>
-              <a:gd name="adj" fmla="val 6000"/>
+              <a:gd name="adj" fmla="val 7000"/>
             </a:avLst>
           </a:prstGeom>
           <a:solidFill>
@@ -5001,9 +5185,55 @@
           </a:p>
         </p:txBody>
       </p:sp>
+      <p:sp>
+        <p:nvSpPr>
+          <p:cNvPr id="23" name="Rounded Rectangle 22"/>
+          <p:cNvSpPr/>
+          <p:nvPr/>
+        </p:nvSpPr>
+        <p:spPr>
+          <a:xfrm>
+            <a:off x="987552" y="4398264"/>
+            <a:ext cx="512064" cy="512064"/>
+          </a:xfrm>
+          <a:prstGeom prst="roundRect">
+            <a:avLst>
+              <a:gd name="adj" fmla="val 26000"/>
+            </a:avLst>
+          </a:prstGeom>
+          <a:solidFill>
+            <a:srgbClr val="EE0000"/>
+          </a:solidFill>
+          <a:ln>
+            <a:noFill/>
+          </a:ln>
+          <a:effectLst/>
+        </p:spPr>
+        <p:style>
+          <a:lnRef idx="1">
+            <a:schemeClr val="accent1"/>
+          </a:lnRef>
+          <a:fillRef idx="3">
+            <a:schemeClr val="accent1"/>
+          </a:fillRef>
+          <a:effectRef idx="2">
+            <a:schemeClr val="accent1"/>
+          </a:effectRef>
+          <a:fontRef idx="minor">
+            <a:schemeClr val="lt1"/>
+          </a:fontRef>
+        </p:style>
+        <p:txBody>
+          <a:bodyPr rtlCol="0" anchor="ctr"/>
+          <a:lstStyle/>
+          <a:p>
+            <a:pPr algn="ctr"/>
+          </a:p>
+        </p:txBody>
+      </p:sp>
       <p:pic>
         <p:nvPicPr>
-          <p:cNvPr id="19" name="Picture 18" descr="check_steel.png"/>
+          <p:cNvPr id="24" name="Picture 23" descr="check_white.png"/>
           <p:cNvPicPr>
             <a:picLocks noChangeAspect="1"/>
           </p:cNvPicPr>
@@ -5017,8 +5247,8 @@
         </p:blipFill>
         <p:spPr>
           <a:xfrm>
-            <a:off x="987552" y="4544568"/>
-            <a:ext cx="237744" cy="237744"/>
+            <a:off x="1110447" y="4521159"/>
+            <a:ext cx="266273" cy="266273"/>
           </a:xfrm>
           <a:prstGeom prst="rect">
             <a:avLst/>
@@ -5027,14 +5257,14 @@
       </p:pic>
       <p:sp>
         <p:nvSpPr>
-          <p:cNvPr id="20" name="TextBox 19"/>
+          <p:cNvPr id="25" name="TextBox 24"/>
           <p:cNvSpPr txBox="1"/>
           <p:nvPr/>
         </p:nvSpPr>
         <p:spPr>
           <a:xfrm>
-            <a:off x="1353312" y="4443984"/>
-            <a:ext cx="5029200" cy="438912"/>
+            <a:off x="1627632" y="4261104"/>
+            <a:ext cx="4206240" cy="786384"/>
           </a:xfrm>
           <a:prstGeom prst="rect">
             <a:avLst/>
@@ -5059,7 +5289,7 @@
               </a:spcAft>
             </a:pPr>
             <a:r>
-              <a:rPr sz="1200" b="0">
+              <a:rPr sz="1150" b="0">
                 <a:solidFill>
                   <a:srgbClr val="1A1A1A"/>
                 </a:solidFill>
@@ -5072,18 +5302,18 @@
       </p:sp>
       <p:sp>
         <p:nvSpPr>
-          <p:cNvPr id="21" name="Rounded Rectangle 20"/>
+          <p:cNvPr id="26" name="Rounded Rectangle 25"/>
           <p:cNvSpPr/>
           <p:nvPr/>
         </p:nvSpPr>
         <p:spPr>
           <a:xfrm>
-            <a:off x="841248" y="4956048"/>
-            <a:ext cx="5715000" cy="438912"/>
+            <a:off x="6254496" y="4261104"/>
+            <a:ext cx="5138928" cy="786384"/>
           </a:xfrm>
           <a:prstGeom prst="roundRect">
             <a:avLst>
-              <a:gd name="adj" fmla="val 6000"/>
+              <a:gd name="adj" fmla="val 7000"/>
             </a:avLst>
           </a:prstGeom>
           <a:solidFill>
@@ -5118,9 +5348,55 @@
           </a:p>
         </p:txBody>
       </p:sp>
+      <p:sp>
+        <p:nvSpPr>
+          <p:cNvPr id="27" name="Rounded Rectangle 26"/>
+          <p:cNvSpPr/>
+          <p:nvPr/>
+        </p:nvSpPr>
+        <p:spPr>
+          <a:xfrm>
+            <a:off x="6400800" y="4398264"/>
+            <a:ext cx="512064" cy="512064"/>
+          </a:xfrm>
+          <a:prstGeom prst="roundRect">
+            <a:avLst>
+              <a:gd name="adj" fmla="val 26000"/>
+            </a:avLst>
+          </a:prstGeom>
+          <a:solidFill>
+            <a:srgbClr val="EE0000"/>
+          </a:solidFill>
+          <a:ln>
+            <a:noFill/>
+          </a:ln>
+          <a:effectLst/>
+        </p:spPr>
+        <p:style>
+          <a:lnRef idx="1">
+            <a:schemeClr val="accent1"/>
+          </a:lnRef>
+          <a:fillRef idx="3">
+            <a:schemeClr val="accent1"/>
+          </a:fillRef>
+          <a:effectRef idx="2">
+            <a:schemeClr val="accent1"/>
+          </a:effectRef>
+          <a:fontRef idx="minor">
+            <a:schemeClr val="lt1"/>
+          </a:fontRef>
+        </p:style>
+        <p:txBody>
+          <a:bodyPr rtlCol="0" anchor="ctr"/>
+          <a:lstStyle/>
+          <a:p>
+            <a:pPr algn="ctr"/>
+          </a:p>
+        </p:txBody>
+      </p:sp>
       <p:pic>
         <p:nvPicPr>
-          <p:cNvPr id="22" name="Picture 21" descr="check_steel.png"/>
+          <p:cNvPr id="28" name="Picture 27" descr="check_white.png"/>
           <p:cNvPicPr>
             <a:picLocks noChangeAspect="1"/>
           </p:cNvPicPr>
@@ -5134,8 +5410,8 @@
         </p:blipFill>
         <p:spPr>
           <a:xfrm>
-            <a:off x="987552" y="5056632"/>
-            <a:ext cx="237744" cy="237744"/>
+            <a:off x="6523695" y="4521159"/>
+            <a:ext cx="266273" cy="266273"/>
           </a:xfrm>
           <a:prstGeom prst="rect">
             <a:avLst/>
@@ -5144,14 +5420,14 @@
       </p:pic>
       <p:sp>
         <p:nvSpPr>
-          <p:cNvPr id="23" name="TextBox 22"/>
+          <p:cNvPr id="29" name="TextBox 28"/>
           <p:cNvSpPr txBox="1"/>
           <p:nvPr/>
         </p:nvSpPr>
         <p:spPr>
           <a:xfrm>
-            <a:off x="1353312" y="4956048"/>
-            <a:ext cx="5029200" cy="438912"/>
+            <a:off x="7040880" y="4261104"/>
+            <a:ext cx="4206240" cy="786384"/>
           </a:xfrm>
           <a:prstGeom prst="rect">
             <a:avLst/>
@@ -5176,7 +5452,7 @@
               </a:spcAft>
             </a:pPr>
             <a:r>
-              <a:rPr sz="1200" b="0">
+              <a:rPr sz="1150" b="0">
                 <a:solidFill>
                   <a:srgbClr val="1A1A1A"/>
                 </a:solidFill>
@@ -5187,217 +5463,9 @@
           </a:p>
         </p:txBody>
       </p:sp>
-      <p:sp>
-        <p:nvSpPr>
-          <p:cNvPr id="24" name="Rounded Rectangle 23"/>
-          <p:cNvSpPr/>
-          <p:nvPr/>
-        </p:nvSpPr>
-        <p:spPr>
-          <a:xfrm>
-            <a:off x="6812280" y="2395728"/>
-            <a:ext cx="4538167" cy="2999232"/>
-          </a:xfrm>
-          <a:prstGeom prst="roundRect">
-            <a:avLst>
-              <a:gd name="adj" fmla="val 4000"/>
-            </a:avLst>
-          </a:prstGeom>
-          <a:solidFill>
-            <a:srgbClr val="FFFFFF"/>
-          </a:solidFill>
-          <a:ln w="15240">
-            <a:solidFill>
-              <a:srgbClr val="DDE1E6"/>
-            </a:solidFill>
-          </a:ln>
-          <a:effectLst/>
-        </p:spPr>
-        <p:style>
-          <a:lnRef idx="1">
-            <a:schemeClr val="accent1"/>
-          </a:lnRef>
-          <a:fillRef idx="3">
-            <a:schemeClr val="accent1"/>
-          </a:fillRef>
-          <a:effectRef idx="2">
-            <a:schemeClr val="accent1"/>
-          </a:effectRef>
-          <a:fontRef idx="minor">
-            <a:schemeClr val="lt1"/>
-          </a:fontRef>
-        </p:style>
-        <p:txBody>
-          <a:bodyPr rtlCol="0" anchor="ctr"/>
-          <a:lstStyle/>
-          <a:p>
-            <a:pPr algn="ctr"/>
-          </a:p>
-        </p:txBody>
-      </p:sp>
-      <p:sp>
-        <p:nvSpPr>
-          <p:cNvPr id="25" name="Rounded Rectangle 24"/>
-          <p:cNvSpPr/>
-          <p:nvPr/>
-        </p:nvSpPr>
-        <p:spPr>
-          <a:xfrm>
-            <a:off x="7013448" y="2596896"/>
-            <a:ext cx="1298448" cy="310896"/>
-          </a:xfrm>
-          <a:prstGeom prst="roundRect">
-            <a:avLst>
-              <a:gd name="adj" fmla="val 50000"/>
-            </a:avLst>
-          </a:prstGeom>
-          <a:solidFill>
-            <a:srgbClr val="FCECEC"/>
-          </a:solidFill>
-          <a:ln>
-            <a:noFill/>
-          </a:ln>
-          <a:effectLst/>
-        </p:spPr>
-        <p:style>
-          <a:lnRef idx="1">
-            <a:schemeClr val="accent1"/>
-          </a:lnRef>
-          <a:fillRef idx="3">
-            <a:schemeClr val="accent1"/>
-          </a:fillRef>
-          <a:effectRef idx="2">
-            <a:schemeClr val="accent1"/>
-          </a:effectRef>
-          <a:fontRef idx="minor">
-            <a:schemeClr val="lt1"/>
-          </a:fontRef>
-        </p:style>
-        <p:txBody>
-          <a:bodyPr rtlCol="0" anchor="ctr"/>
-          <a:lstStyle/>
-          <a:p>
-            <a:pPr algn="ctr"/>
-          </a:p>
-        </p:txBody>
-      </p:sp>
-      <p:sp>
-        <p:nvSpPr>
-          <p:cNvPr id="26" name="TextBox 25"/>
-          <p:cNvSpPr txBox="1"/>
-          <p:nvPr/>
-        </p:nvSpPr>
-        <p:spPr>
-          <a:xfrm>
-            <a:off x="7013448" y="2596896"/>
-            <a:ext cx="1298448" cy="310896"/>
-          </a:xfrm>
-          <a:prstGeom prst="rect">
-            <a:avLst/>
-          </a:prstGeom>
-          <a:noFill/>
-        </p:spPr>
-        <p:txBody>
-          <a:bodyPr wrap="none" anchor="ctr" lIns="0" rIns="0" tIns="0" bIns="0">
-            <a:spAutoFit/>
-          </a:bodyPr>
-          <a:lstStyle/>
-          <a:p>
-            <a:pPr algn="ctr">
-              <a:lnSpc>
-                <a:spcPct val="106000"/>
-              </a:lnSpc>
-              <a:spcBef>
-                <a:spcPts val="0"/>
-              </a:spcBef>
-              <a:spcAft>
-                <a:spcPts val="0"/>
-              </a:spcAft>
-            </a:pPr>
-            <a:r>
-              <a:rPr sz="850" b="1">
-                <a:solidFill>
-                  <a:srgbClr val="B80000"/>
-                </a:solidFill>
-                <a:latin typeface="Red Hat Display"/>
-              </a:rPr>
-              <a:t>MEDIA PASS</a:t>
-            </a:r>
-          </a:p>
-        </p:txBody>
-      </p:sp>
-      <p:pic>
-        <p:nvPicPr>
-          <p:cNvPr id="27" name="Picture 26" descr="eye_slate.png"/>
-          <p:cNvPicPr>
-            <a:picLocks noChangeAspect="1"/>
-          </p:cNvPicPr>
-          <p:nvPr/>
-        </p:nvPicPr>
-        <p:blipFill>
-          <a:blip r:embed="rId4"/>
-          <a:stretch>
-            <a:fillRect/>
-          </a:stretch>
-        </p:blipFill>
-        <p:spPr>
-          <a:xfrm>
-            <a:off x="8843619" y="3108960"/>
-            <a:ext cx="475488" cy="475488"/>
-          </a:xfrm>
-          <a:prstGeom prst="rect">
-            <a:avLst/>
-          </a:prstGeom>
-        </p:spPr>
-      </p:pic>
-      <p:sp>
-        <p:nvSpPr>
-          <p:cNvPr id="28" name="TextBox 27"/>
-          <p:cNvSpPr txBox="1"/>
-          <p:nvPr/>
-        </p:nvSpPr>
-        <p:spPr>
-          <a:xfrm>
-            <a:off x="7050024" y="3721608"/>
-            <a:ext cx="4062679" cy="1536192"/>
-          </a:xfrm>
-          <a:prstGeom prst="rect">
-            <a:avLst/>
-          </a:prstGeom>
-          <a:noFill/>
-        </p:spPr>
-        <p:txBody>
-          <a:bodyPr wrap="square" anchor="t" lIns="0" rIns="0" tIns="0" bIns="0">
-            <a:spAutoFit/>
-          </a:bodyPr>
-          <a:lstStyle/>
-          <a:p>
-            <a:pPr algn="l">
-              <a:lnSpc>
-                <a:spcPct val="120000"/>
-              </a:lnSpc>
-              <a:spcBef>
-                <a:spcPts val="0"/>
-              </a:spcBef>
-              <a:spcAft>
-                <a:spcPts val="0"/>
-              </a:spcAft>
-            </a:pPr>
-            <a:r>
-              <a:rPr sz="950" b="0">
-                <a:solidFill>
-                  <a:srgbClr val="8A9099"/>
-                </a:solidFill>
-                <a:latin typeface="Red Hat Text"/>
-              </a:rPr>
-              <a:t>A two-column "what you adopt" card. LEFT "[OCP] — included" with the OpenShift Pipelines and RHACS marks. RIGHT "third-party open source" listing SonarQube Community Build, Trivy, and ZAP. Footer ribbon: "the technique is the skill; the scanners are swappable." No version numbers on the card (course standard).</a:t>
-            </a:r>
-          </a:p>
-        </p:txBody>
-      </p:sp>
       <p:cxnSp>
         <p:nvCxnSpPr>
-          <p:cNvPr id="29" name="Connector 28"/>
+          <p:cNvPr id="30" name="Connector 29"/>
           <p:cNvCxnSpPr/>
           <p:nvPr/>
         </p:nvCxnSpPr>
@@ -5433,7 +5501,7 @@
       </p:cxnSp>
       <p:sp>
         <p:nvSpPr>
-          <p:cNvPr id="30" name="TextBox 29"/>
+          <p:cNvPr id="31" name="TextBox 30"/>
           <p:cNvSpPr txBox="1"/>
           <p:nvPr/>
         </p:nvSpPr>
@@ -5478,7 +5546,7 @@
       </p:sp>
       <p:sp>
         <p:nvSpPr>
-          <p:cNvPr id="31" name="TextBox 30"/>
+          <p:cNvPr id="32" name="TextBox 31"/>
           <p:cNvSpPr txBox="1"/>
           <p:nvPr/>
         </p:nvSpPr>
@@ -5698,11 +5766,11 @@
         <p:spPr>
           <a:xfrm>
             <a:off x="841248" y="2395728"/>
-            <a:ext cx="5715000" cy="438912"/>
+            <a:ext cx="5138928" cy="786384"/>
           </a:xfrm>
           <a:prstGeom prst="roundRect">
             <a:avLst>
-              <a:gd name="adj" fmla="val 6000"/>
+              <a:gd name="adj" fmla="val 7000"/>
             </a:avLst>
           </a:prstGeom>
           <a:solidFill>
@@ -5737,9 +5805,55 @@
           </a:p>
         </p:txBody>
       </p:sp>
+      <p:sp>
+        <p:nvSpPr>
+          <p:cNvPr id="7" name="Rounded Rectangle 6"/>
+          <p:cNvSpPr/>
+          <p:nvPr/>
+        </p:nvSpPr>
+        <p:spPr>
+          <a:xfrm>
+            <a:off x="987552" y="2532888"/>
+            <a:ext cx="512064" cy="512064"/>
+          </a:xfrm>
+          <a:prstGeom prst="roundRect">
+            <a:avLst>
+              <a:gd name="adj" fmla="val 26000"/>
+            </a:avLst>
+          </a:prstGeom>
+          <a:solidFill>
+            <a:srgbClr val="EE0000"/>
+          </a:solidFill>
+          <a:ln>
+            <a:noFill/>
+          </a:ln>
+          <a:effectLst/>
+        </p:spPr>
+        <p:style>
+          <a:lnRef idx="1">
+            <a:schemeClr val="accent1"/>
+          </a:lnRef>
+          <a:fillRef idx="3">
+            <a:schemeClr val="accent1"/>
+          </a:fillRef>
+          <a:effectRef idx="2">
+            <a:schemeClr val="accent1"/>
+          </a:effectRef>
+          <a:fontRef idx="minor">
+            <a:schemeClr val="lt1"/>
+          </a:fontRef>
+        </p:style>
+        <p:txBody>
+          <a:bodyPr rtlCol="0" anchor="ctr"/>
+          <a:lstStyle/>
+          <a:p>
+            <a:pPr algn="ctr"/>
+          </a:p>
+        </p:txBody>
+      </p:sp>
       <p:pic>
         <p:nvPicPr>
-          <p:cNvPr id="7" name="Picture 6" descr="check_steel.png"/>
+          <p:cNvPr id="8" name="Picture 7" descr="check_white.png"/>
           <p:cNvPicPr>
             <a:picLocks noChangeAspect="1"/>
           </p:cNvPicPr>
@@ -5753,8 +5867,8 @@
         </p:blipFill>
         <p:spPr>
           <a:xfrm>
-            <a:off x="987552" y="2496312"/>
-            <a:ext cx="237744" cy="237744"/>
+            <a:off x="1110447" y="2655783"/>
+            <a:ext cx="266273" cy="266273"/>
           </a:xfrm>
           <a:prstGeom prst="rect">
             <a:avLst/>
@@ -5763,14 +5877,14 @@
       </p:pic>
       <p:sp>
         <p:nvSpPr>
-          <p:cNvPr id="8" name="TextBox 7"/>
+          <p:cNvPr id="9" name="TextBox 8"/>
           <p:cNvSpPr txBox="1"/>
           <p:nvPr/>
         </p:nvSpPr>
         <p:spPr>
           <a:xfrm>
-            <a:off x="1353312" y="2395728"/>
-            <a:ext cx="5029200" cy="438912"/>
+            <a:off x="1627632" y="2395728"/>
+            <a:ext cx="4206240" cy="786384"/>
           </a:xfrm>
           <a:prstGeom prst="rect">
             <a:avLst/>
@@ -5795,7 +5909,7 @@
               </a:spcAft>
             </a:pPr>
             <a:r>
-              <a:rPr sz="1200" b="0">
+              <a:rPr sz="1150" b="0">
                 <a:solidFill>
                   <a:srgbClr val="1A1A1A"/>
                 </a:solidFill>
@@ -5808,18 +5922,18 @@
       </p:sp>
       <p:sp>
         <p:nvSpPr>
-          <p:cNvPr id="9" name="Rounded Rectangle 8"/>
+          <p:cNvPr id="10" name="Rounded Rectangle 9"/>
           <p:cNvSpPr/>
           <p:nvPr/>
         </p:nvSpPr>
         <p:spPr>
           <a:xfrm>
-            <a:off x="841248" y="2907792"/>
-            <a:ext cx="5715000" cy="438912"/>
+            <a:off x="6254496" y="2395728"/>
+            <a:ext cx="5138928" cy="786384"/>
           </a:xfrm>
           <a:prstGeom prst="roundRect">
             <a:avLst>
-              <a:gd name="adj" fmla="val 6000"/>
+              <a:gd name="adj" fmla="val 7000"/>
             </a:avLst>
           </a:prstGeom>
           <a:solidFill>
@@ -5854,9 +5968,55 @@
           </a:p>
         </p:txBody>
       </p:sp>
+      <p:sp>
+        <p:nvSpPr>
+          <p:cNvPr id="11" name="Rounded Rectangle 10"/>
+          <p:cNvSpPr/>
+          <p:nvPr/>
+        </p:nvSpPr>
+        <p:spPr>
+          <a:xfrm>
+            <a:off x="6400800" y="2532888"/>
+            <a:ext cx="512064" cy="512064"/>
+          </a:xfrm>
+          <a:prstGeom prst="roundRect">
+            <a:avLst>
+              <a:gd name="adj" fmla="val 26000"/>
+            </a:avLst>
+          </a:prstGeom>
+          <a:solidFill>
+            <a:srgbClr val="EE0000"/>
+          </a:solidFill>
+          <a:ln>
+            <a:noFill/>
+          </a:ln>
+          <a:effectLst/>
+        </p:spPr>
+        <p:style>
+          <a:lnRef idx="1">
+            <a:schemeClr val="accent1"/>
+          </a:lnRef>
+          <a:fillRef idx="3">
+            <a:schemeClr val="accent1"/>
+          </a:fillRef>
+          <a:effectRef idx="2">
+            <a:schemeClr val="accent1"/>
+          </a:effectRef>
+          <a:fontRef idx="minor">
+            <a:schemeClr val="lt1"/>
+          </a:fontRef>
+        </p:style>
+        <p:txBody>
+          <a:bodyPr rtlCol="0" anchor="ctr"/>
+          <a:lstStyle/>
+          <a:p>
+            <a:pPr algn="ctr"/>
+          </a:p>
+        </p:txBody>
+      </p:sp>
       <p:pic>
         <p:nvPicPr>
-          <p:cNvPr id="10" name="Picture 9" descr="check_steel.png"/>
+          <p:cNvPr id="12" name="Picture 11" descr="check_white.png"/>
           <p:cNvPicPr>
             <a:picLocks noChangeAspect="1"/>
           </p:cNvPicPr>
@@ -5870,8 +6030,8 @@
         </p:blipFill>
         <p:spPr>
           <a:xfrm>
-            <a:off x="987552" y="3008376"/>
-            <a:ext cx="237744" cy="237744"/>
+            <a:off x="6523695" y="2655783"/>
+            <a:ext cx="266273" cy="266273"/>
           </a:xfrm>
           <a:prstGeom prst="rect">
             <a:avLst/>
@@ -5880,14 +6040,14 @@
       </p:pic>
       <p:sp>
         <p:nvSpPr>
-          <p:cNvPr id="11" name="TextBox 10"/>
+          <p:cNvPr id="13" name="TextBox 12"/>
           <p:cNvSpPr txBox="1"/>
           <p:nvPr/>
         </p:nvSpPr>
         <p:spPr>
           <a:xfrm>
-            <a:off x="1353312" y="2907792"/>
-            <a:ext cx="5029200" cy="438912"/>
+            <a:off x="7040880" y="2395728"/>
+            <a:ext cx="4206240" cy="786384"/>
           </a:xfrm>
           <a:prstGeom prst="rect">
             <a:avLst/>
@@ -5912,7 +6072,7 @@
               </a:spcAft>
             </a:pPr>
             <a:r>
-              <a:rPr sz="1200" b="0">
+              <a:rPr sz="1150" b="0">
                 <a:solidFill>
                   <a:srgbClr val="1A1A1A"/>
                 </a:solidFill>
@@ -5925,18 +6085,18 @@
       </p:sp>
       <p:sp>
         <p:nvSpPr>
-          <p:cNvPr id="12" name="Rounded Rectangle 11"/>
+          <p:cNvPr id="14" name="Rounded Rectangle 13"/>
           <p:cNvSpPr/>
           <p:nvPr/>
         </p:nvSpPr>
         <p:spPr>
           <a:xfrm>
-            <a:off x="841248" y="3419856"/>
-            <a:ext cx="5715000" cy="438912"/>
+            <a:off x="841248" y="3328416"/>
+            <a:ext cx="5138928" cy="786384"/>
           </a:xfrm>
           <a:prstGeom prst="roundRect">
             <a:avLst>
-              <a:gd name="adj" fmla="val 6000"/>
+              <a:gd name="adj" fmla="val 7000"/>
             </a:avLst>
           </a:prstGeom>
           <a:solidFill>
@@ -5971,9 +6131,55 @@
           </a:p>
         </p:txBody>
       </p:sp>
+      <p:sp>
+        <p:nvSpPr>
+          <p:cNvPr id="15" name="Rounded Rectangle 14"/>
+          <p:cNvSpPr/>
+          <p:nvPr/>
+        </p:nvSpPr>
+        <p:spPr>
+          <a:xfrm>
+            <a:off x="987552" y="3465576"/>
+            <a:ext cx="512064" cy="512064"/>
+          </a:xfrm>
+          <a:prstGeom prst="roundRect">
+            <a:avLst>
+              <a:gd name="adj" fmla="val 26000"/>
+            </a:avLst>
+          </a:prstGeom>
+          <a:solidFill>
+            <a:srgbClr val="EE0000"/>
+          </a:solidFill>
+          <a:ln>
+            <a:noFill/>
+          </a:ln>
+          <a:effectLst/>
+        </p:spPr>
+        <p:style>
+          <a:lnRef idx="1">
+            <a:schemeClr val="accent1"/>
+          </a:lnRef>
+          <a:fillRef idx="3">
+            <a:schemeClr val="accent1"/>
+          </a:fillRef>
+          <a:effectRef idx="2">
+            <a:schemeClr val="accent1"/>
+          </a:effectRef>
+          <a:fontRef idx="minor">
+            <a:schemeClr val="lt1"/>
+          </a:fontRef>
+        </p:style>
+        <p:txBody>
+          <a:bodyPr rtlCol="0" anchor="ctr"/>
+          <a:lstStyle/>
+          <a:p>
+            <a:pPr algn="ctr"/>
+          </a:p>
+        </p:txBody>
+      </p:sp>
       <p:pic>
         <p:nvPicPr>
-          <p:cNvPr id="13" name="Picture 12" descr="check_steel.png"/>
+          <p:cNvPr id="16" name="Picture 15" descr="check_white.png"/>
           <p:cNvPicPr>
             <a:picLocks noChangeAspect="1"/>
           </p:cNvPicPr>
@@ -5987,8 +6193,8 @@
         </p:blipFill>
         <p:spPr>
           <a:xfrm>
-            <a:off x="987552" y="3520440"/>
-            <a:ext cx="237744" cy="237744"/>
+            <a:off x="1110447" y="3588471"/>
+            <a:ext cx="266273" cy="266273"/>
           </a:xfrm>
           <a:prstGeom prst="rect">
             <a:avLst/>
@@ -5997,14 +6203,14 @@
       </p:pic>
       <p:sp>
         <p:nvSpPr>
-          <p:cNvPr id="14" name="TextBox 13"/>
+          <p:cNvPr id="17" name="TextBox 16"/>
           <p:cNvSpPr txBox="1"/>
           <p:nvPr/>
         </p:nvSpPr>
         <p:spPr>
           <a:xfrm>
-            <a:off x="1353312" y="3419856"/>
-            <a:ext cx="5029200" cy="438912"/>
+            <a:off x="1627632" y="3328416"/>
+            <a:ext cx="4206240" cy="786384"/>
           </a:xfrm>
           <a:prstGeom prst="rect">
             <a:avLst/>
@@ -6029,7 +6235,7 @@
               </a:spcAft>
             </a:pPr>
             <a:r>
-              <a:rPr sz="1200" b="0">
+              <a:rPr sz="1150" b="0">
                 <a:solidFill>
                   <a:srgbClr val="1A1A1A"/>
                 </a:solidFill>
@@ -6042,18 +6248,18 @@
       </p:sp>
       <p:sp>
         <p:nvSpPr>
-          <p:cNvPr id="15" name="Rounded Rectangle 14"/>
+          <p:cNvPr id="18" name="Rounded Rectangle 17"/>
           <p:cNvSpPr/>
           <p:nvPr/>
         </p:nvSpPr>
         <p:spPr>
           <a:xfrm>
-            <a:off x="841248" y="3931920"/>
-            <a:ext cx="5715000" cy="438912"/>
+            <a:off x="6254496" y="3328416"/>
+            <a:ext cx="5138928" cy="786384"/>
           </a:xfrm>
           <a:prstGeom prst="roundRect">
             <a:avLst>
-              <a:gd name="adj" fmla="val 6000"/>
+              <a:gd name="adj" fmla="val 7000"/>
             </a:avLst>
           </a:prstGeom>
           <a:solidFill>
@@ -6088,9 +6294,55 @@
           </a:p>
         </p:txBody>
       </p:sp>
+      <p:sp>
+        <p:nvSpPr>
+          <p:cNvPr id="19" name="Rounded Rectangle 18"/>
+          <p:cNvSpPr/>
+          <p:nvPr/>
+        </p:nvSpPr>
+        <p:spPr>
+          <a:xfrm>
+            <a:off x="6400800" y="3465576"/>
+            <a:ext cx="512064" cy="512064"/>
+          </a:xfrm>
+          <a:prstGeom prst="roundRect">
+            <a:avLst>
+              <a:gd name="adj" fmla="val 26000"/>
+            </a:avLst>
+          </a:prstGeom>
+          <a:solidFill>
+            <a:srgbClr val="EE0000"/>
+          </a:solidFill>
+          <a:ln>
+            <a:noFill/>
+          </a:ln>
+          <a:effectLst/>
+        </p:spPr>
+        <p:style>
+          <a:lnRef idx="1">
+            <a:schemeClr val="accent1"/>
+          </a:lnRef>
+          <a:fillRef idx="3">
+            <a:schemeClr val="accent1"/>
+          </a:fillRef>
+          <a:effectRef idx="2">
+            <a:schemeClr val="accent1"/>
+          </a:effectRef>
+          <a:fontRef idx="minor">
+            <a:schemeClr val="lt1"/>
+          </a:fontRef>
+        </p:style>
+        <p:txBody>
+          <a:bodyPr rtlCol="0" anchor="ctr"/>
+          <a:lstStyle/>
+          <a:p>
+            <a:pPr algn="ctr"/>
+          </a:p>
+        </p:txBody>
+      </p:sp>
       <p:pic>
         <p:nvPicPr>
-          <p:cNvPr id="16" name="Picture 15" descr="check_steel.png"/>
+          <p:cNvPr id="20" name="Picture 19" descr="check_white.png"/>
           <p:cNvPicPr>
             <a:picLocks noChangeAspect="1"/>
           </p:cNvPicPr>
@@ -6104,8 +6356,8 @@
         </p:blipFill>
         <p:spPr>
           <a:xfrm>
-            <a:off x="987552" y="4032504"/>
-            <a:ext cx="237744" cy="237744"/>
+            <a:off x="6523695" y="3588471"/>
+            <a:ext cx="266273" cy="266273"/>
           </a:xfrm>
           <a:prstGeom prst="rect">
             <a:avLst/>
@@ -6114,14 +6366,14 @@
       </p:pic>
       <p:sp>
         <p:nvSpPr>
-          <p:cNvPr id="17" name="TextBox 16"/>
+          <p:cNvPr id="21" name="TextBox 20"/>
           <p:cNvSpPr txBox="1"/>
           <p:nvPr/>
         </p:nvSpPr>
         <p:spPr>
           <a:xfrm>
-            <a:off x="1353312" y="3931920"/>
-            <a:ext cx="5029200" cy="438912"/>
+            <a:off x="7040880" y="3328416"/>
+            <a:ext cx="4206240" cy="786384"/>
           </a:xfrm>
           <a:prstGeom prst="rect">
             <a:avLst/>
@@ -6146,7 +6398,7 @@
               </a:spcAft>
             </a:pPr>
             <a:r>
-              <a:rPr sz="1200" b="0">
+              <a:rPr sz="1150" b="0">
                 <a:solidFill>
                   <a:srgbClr val="1A1A1A"/>
                 </a:solidFill>
@@ -6159,18 +6411,18 @@
       </p:sp>
       <p:sp>
         <p:nvSpPr>
-          <p:cNvPr id="18" name="Rounded Rectangle 17"/>
+          <p:cNvPr id="22" name="Rounded Rectangle 21"/>
           <p:cNvSpPr/>
           <p:nvPr/>
         </p:nvSpPr>
         <p:spPr>
           <a:xfrm>
-            <a:off x="841248" y="4443984"/>
-            <a:ext cx="5715000" cy="438912"/>
+            <a:off x="841248" y="4261104"/>
+            <a:ext cx="5138928" cy="786384"/>
           </a:xfrm>
           <a:prstGeom prst="roundRect">
             <a:avLst>
-              <a:gd name="adj" fmla="val 6000"/>
+              <a:gd name="adj" fmla="val 7000"/>
             </a:avLst>
           </a:prstGeom>
           <a:solidFill>
@@ -6205,9 +6457,55 @@
           </a:p>
         </p:txBody>
       </p:sp>
+      <p:sp>
+        <p:nvSpPr>
+          <p:cNvPr id="23" name="Rounded Rectangle 22"/>
+          <p:cNvSpPr/>
+          <p:nvPr/>
+        </p:nvSpPr>
+        <p:spPr>
+          <a:xfrm>
+            <a:off x="987552" y="4398264"/>
+            <a:ext cx="512064" cy="512064"/>
+          </a:xfrm>
+          <a:prstGeom prst="roundRect">
+            <a:avLst>
+              <a:gd name="adj" fmla="val 26000"/>
+            </a:avLst>
+          </a:prstGeom>
+          <a:solidFill>
+            <a:srgbClr val="EE0000"/>
+          </a:solidFill>
+          <a:ln>
+            <a:noFill/>
+          </a:ln>
+          <a:effectLst/>
+        </p:spPr>
+        <p:style>
+          <a:lnRef idx="1">
+            <a:schemeClr val="accent1"/>
+          </a:lnRef>
+          <a:fillRef idx="3">
+            <a:schemeClr val="accent1"/>
+          </a:fillRef>
+          <a:effectRef idx="2">
+            <a:schemeClr val="accent1"/>
+          </a:effectRef>
+          <a:fontRef idx="minor">
+            <a:schemeClr val="lt1"/>
+          </a:fontRef>
+        </p:style>
+        <p:txBody>
+          <a:bodyPr rtlCol="0" anchor="ctr"/>
+          <a:lstStyle/>
+          <a:p>
+            <a:pPr algn="ctr"/>
+          </a:p>
+        </p:txBody>
+      </p:sp>
       <p:pic>
         <p:nvPicPr>
-          <p:cNvPr id="19" name="Picture 18" descr="check_steel.png"/>
+          <p:cNvPr id="24" name="Picture 23" descr="check_white.png"/>
           <p:cNvPicPr>
             <a:picLocks noChangeAspect="1"/>
           </p:cNvPicPr>
@@ -6221,8 +6519,8 @@
         </p:blipFill>
         <p:spPr>
           <a:xfrm>
-            <a:off x="987552" y="4544568"/>
-            <a:ext cx="237744" cy="237744"/>
+            <a:off x="1110447" y="4521159"/>
+            <a:ext cx="266273" cy="266273"/>
           </a:xfrm>
           <a:prstGeom prst="rect">
             <a:avLst/>
@@ -6231,14 +6529,14 @@
       </p:pic>
       <p:sp>
         <p:nvSpPr>
-          <p:cNvPr id="20" name="TextBox 19"/>
+          <p:cNvPr id="25" name="TextBox 24"/>
           <p:cNvSpPr txBox="1"/>
           <p:nvPr/>
         </p:nvSpPr>
         <p:spPr>
           <a:xfrm>
-            <a:off x="1353312" y="4443984"/>
-            <a:ext cx="5029200" cy="438912"/>
+            <a:off x="1627632" y="4261104"/>
+            <a:ext cx="4206240" cy="786384"/>
           </a:xfrm>
           <a:prstGeom prst="rect">
             <a:avLst/>
@@ -6263,7 +6561,7 @@
               </a:spcAft>
             </a:pPr>
             <a:r>
-              <a:rPr sz="1200" b="0">
+              <a:rPr sz="1150" b="0">
                 <a:solidFill>
                   <a:srgbClr val="1A1A1A"/>
                 </a:solidFill>
@@ -6276,18 +6574,18 @@
       </p:sp>
       <p:sp>
         <p:nvSpPr>
-          <p:cNvPr id="21" name="Rounded Rectangle 20"/>
+          <p:cNvPr id="26" name="Rounded Rectangle 25"/>
           <p:cNvSpPr/>
           <p:nvPr/>
         </p:nvSpPr>
         <p:spPr>
           <a:xfrm>
-            <a:off x="841248" y="4956048"/>
-            <a:ext cx="5715000" cy="438912"/>
+            <a:off x="6254496" y="4261104"/>
+            <a:ext cx="5138928" cy="786384"/>
           </a:xfrm>
           <a:prstGeom prst="roundRect">
             <a:avLst>
-              <a:gd name="adj" fmla="val 6000"/>
+              <a:gd name="adj" fmla="val 7000"/>
             </a:avLst>
           </a:prstGeom>
           <a:solidFill>
@@ -6322,9 +6620,55 @@
           </a:p>
         </p:txBody>
       </p:sp>
+      <p:sp>
+        <p:nvSpPr>
+          <p:cNvPr id="27" name="Rounded Rectangle 26"/>
+          <p:cNvSpPr/>
+          <p:nvPr/>
+        </p:nvSpPr>
+        <p:spPr>
+          <a:xfrm>
+            <a:off x="6400800" y="4398264"/>
+            <a:ext cx="512064" cy="512064"/>
+          </a:xfrm>
+          <a:prstGeom prst="roundRect">
+            <a:avLst>
+              <a:gd name="adj" fmla="val 26000"/>
+            </a:avLst>
+          </a:prstGeom>
+          <a:solidFill>
+            <a:srgbClr val="EE0000"/>
+          </a:solidFill>
+          <a:ln>
+            <a:noFill/>
+          </a:ln>
+          <a:effectLst/>
+        </p:spPr>
+        <p:style>
+          <a:lnRef idx="1">
+            <a:schemeClr val="accent1"/>
+          </a:lnRef>
+          <a:fillRef idx="3">
+            <a:schemeClr val="accent1"/>
+          </a:fillRef>
+          <a:effectRef idx="2">
+            <a:schemeClr val="accent1"/>
+          </a:effectRef>
+          <a:fontRef idx="minor">
+            <a:schemeClr val="lt1"/>
+          </a:fontRef>
+        </p:style>
+        <p:txBody>
+          <a:bodyPr rtlCol="0" anchor="ctr"/>
+          <a:lstStyle/>
+          <a:p>
+            <a:pPr algn="ctr"/>
+          </a:p>
+        </p:txBody>
+      </p:sp>
       <p:pic>
         <p:nvPicPr>
-          <p:cNvPr id="22" name="Picture 21" descr="check_steel.png"/>
+          <p:cNvPr id="28" name="Picture 27" descr="check_white.png"/>
           <p:cNvPicPr>
             <a:picLocks noChangeAspect="1"/>
           </p:cNvPicPr>
@@ -6338,8 +6682,8 @@
         </p:blipFill>
         <p:spPr>
           <a:xfrm>
-            <a:off x="987552" y="5056632"/>
-            <a:ext cx="237744" cy="237744"/>
+            <a:off x="6523695" y="4521159"/>
+            <a:ext cx="266273" cy="266273"/>
           </a:xfrm>
           <a:prstGeom prst="rect">
             <a:avLst/>
@@ -6348,14 +6692,14 @@
       </p:pic>
       <p:sp>
         <p:nvSpPr>
-          <p:cNvPr id="23" name="TextBox 22"/>
+          <p:cNvPr id="29" name="TextBox 28"/>
           <p:cNvSpPr txBox="1"/>
           <p:nvPr/>
         </p:nvSpPr>
         <p:spPr>
           <a:xfrm>
-            <a:off x="1353312" y="4956048"/>
-            <a:ext cx="5029200" cy="438912"/>
+            <a:off x="7040880" y="4261104"/>
+            <a:ext cx="4206240" cy="786384"/>
           </a:xfrm>
           <a:prstGeom prst="rect">
             <a:avLst/>
@@ -6380,7 +6724,7 @@
               </a:spcAft>
             </a:pPr>
             <a:r>
-              <a:rPr sz="1200" b="0">
+              <a:rPr sz="1150" b="0">
                 <a:solidFill>
                   <a:srgbClr val="1A1A1A"/>
                 </a:solidFill>
@@ -6391,217 +6735,9 @@
           </a:p>
         </p:txBody>
       </p:sp>
-      <p:sp>
-        <p:nvSpPr>
-          <p:cNvPr id="24" name="Rounded Rectangle 23"/>
-          <p:cNvSpPr/>
-          <p:nvPr/>
-        </p:nvSpPr>
-        <p:spPr>
-          <a:xfrm>
-            <a:off x="6812280" y="2395728"/>
-            <a:ext cx="4538167" cy="2999232"/>
-          </a:xfrm>
-          <a:prstGeom prst="roundRect">
-            <a:avLst>
-              <a:gd name="adj" fmla="val 4000"/>
-            </a:avLst>
-          </a:prstGeom>
-          <a:solidFill>
-            <a:srgbClr val="FFFFFF"/>
-          </a:solidFill>
-          <a:ln w="15240">
-            <a:solidFill>
-              <a:srgbClr val="DDE1E6"/>
-            </a:solidFill>
-          </a:ln>
-          <a:effectLst/>
-        </p:spPr>
-        <p:style>
-          <a:lnRef idx="1">
-            <a:schemeClr val="accent1"/>
-          </a:lnRef>
-          <a:fillRef idx="3">
-            <a:schemeClr val="accent1"/>
-          </a:fillRef>
-          <a:effectRef idx="2">
-            <a:schemeClr val="accent1"/>
-          </a:effectRef>
-          <a:fontRef idx="minor">
-            <a:schemeClr val="lt1"/>
-          </a:fontRef>
-        </p:style>
-        <p:txBody>
-          <a:bodyPr rtlCol="0" anchor="ctr"/>
-          <a:lstStyle/>
-          <a:p>
-            <a:pPr algn="ctr"/>
-          </a:p>
-        </p:txBody>
-      </p:sp>
-      <p:sp>
-        <p:nvSpPr>
-          <p:cNvPr id="25" name="Rounded Rectangle 24"/>
-          <p:cNvSpPr/>
-          <p:nvPr/>
-        </p:nvSpPr>
-        <p:spPr>
-          <a:xfrm>
-            <a:off x="7013448" y="2596896"/>
-            <a:ext cx="1298448" cy="310896"/>
-          </a:xfrm>
-          <a:prstGeom prst="roundRect">
-            <a:avLst>
-              <a:gd name="adj" fmla="val 50000"/>
-            </a:avLst>
-          </a:prstGeom>
-          <a:solidFill>
-            <a:srgbClr val="FCECEC"/>
-          </a:solidFill>
-          <a:ln>
-            <a:noFill/>
-          </a:ln>
-          <a:effectLst/>
-        </p:spPr>
-        <p:style>
-          <a:lnRef idx="1">
-            <a:schemeClr val="accent1"/>
-          </a:lnRef>
-          <a:fillRef idx="3">
-            <a:schemeClr val="accent1"/>
-          </a:fillRef>
-          <a:effectRef idx="2">
-            <a:schemeClr val="accent1"/>
-          </a:effectRef>
-          <a:fontRef idx="minor">
-            <a:schemeClr val="lt1"/>
-          </a:fontRef>
-        </p:style>
-        <p:txBody>
-          <a:bodyPr rtlCol="0" anchor="ctr"/>
-          <a:lstStyle/>
-          <a:p>
-            <a:pPr algn="ctr"/>
-          </a:p>
-        </p:txBody>
-      </p:sp>
-      <p:sp>
-        <p:nvSpPr>
-          <p:cNvPr id="26" name="TextBox 25"/>
-          <p:cNvSpPr txBox="1"/>
-          <p:nvPr/>
-        </p:nvSpPr>
-        <p:spPr>
-          <a:xfrm>
-            <a:off x="7013448" y="2596896"/>
-            <a:ext cx="1298448" cy="310896"/>
-          </a:xfrm>
-          <a:prstGeom prst="rect">
-            <a:avLst/>
-          </a:prstGeom>
-          <a:noFill/>
-        </p:spPr>
-        <p:txBody>
-          <a:bodyPr wrap="none" anchor="ctr" lIns="0" rIns="0" tIns="0" bIns="0">
-            <a:spAutoFit/>
-          </a:bodyPr>
-          <a:lstStyle/>
-          <a:p>
-            <a:pPr algn="ctr">
-              <a:lnSpc>
-                <a:spcPct val="106000"/>
-              </a:lnSpc>
-              <a:spcBef>
-                <a:spcPts val="0"/>
-              </a:spcBef>
-              <a:spcAft>
-                <a:spcPts val="0"/>
-              </a:spcAft>
-            </a:pPr>
-            <a:r>
-              <a:rPr sz="850" b="1">
-                <a:solidFill>
-                  <a:srgbClr val="B80000"/>
-                </a:solidFill>
-                <a:latin typeface="Red Hat Display"/>
-              </a:rPr>
-              <a:t>MEDIA PASS</a:t>
-            </a:r>
-          </a:p>
-        </p:txBody>
-      </p:sp>
-      <p:pic>
-        <p:nvPicPr>
-          <p:cNvPr id="27" name="Picture 26" descr="eye_slate.png"/>
-          <p:cNvPicPr>
-            <a:picLocks noChangeAspect="1"/>
-          </p:cNvPicPr>
-          <p:nvPr/>
-        </p:nvPicPr>
-        <p:blipFill>
-          <a:blip r:embed="rId4"/>
-          <a:stretch>
-            <a:fillRect/>
-          </a:stretch>
-        </p:blipFill>
-        <p:spPr>
-          <a:xfrm>
-            <a:off x="8843619" y="3108960"/>
-            <a:ext cx="475488" cy="475488"/>
-          </a:xfrm>
-          <a:prstGeom prst="rect">
-            <a:avLst/>
-          </a:prstGeom>
-        </p:spPr>
-      </p:pic>
-      <p:sp>
-        <p:nvSpPr>
-          <p:cNvPr id="28" name="TextBox 27"/>
-          <p:cNvSpPr txBox="1"/>
-          <p:nvPr/>
-        </p:nvSpPr>
-        <p:spPr>
-          <a:xfrm>
-            <a:off x="7050024" y="3721608"/>
-            <a:ext cx="4062679" cy="1536192"/>
-          </a:xfrm>
-          <a:prstGeom prst="rect">
-            <a:avLst/>
-          </a:prstGeom>
-          <a:noFill/>
-        </p:spPr>
-        <p:txBody>
-          <a:bodyPr wrap="square" anchor="t" lIns="0" rIns="0" tIns="0" bIns="0">
-            <a:spAutoFit/>
-          </a:bodyPr>
-          <a:lstStyle/>
-          <a:p>
-            <a:pPr algn="l">
-              <a:lnSpc>
-                <a:spcPct val="120000"/>
-              </a:lnSpc>
-              <a:spcBef>
-                <a:spcPts val="0"/>
-              </a:spcBef>
-              <a:spcAft>
-                <a:spcPts val="0"/>
-              </a:spcAft>
-            </a:pPr>
-            <a:r>
-              <a:rPr sz="950" b="0">
-                <a:solidFill>
-                  <a:srgbClr val="8A9099"/>
-                </a:solidFill>
-                <a:latin typeface="Red Hat Text"/>
-              </a:rPr>
-              <a:t>A single green CI check labelled "build ✓ · tests ✓" — and behind it, four peeled-back layers exposing the hidden flaws: a hard-coded password string, a cracked dependency jar tagged "RCE", a privileged root container, and a browser reading a header-less response. Caption strip: "green says nothing about safe."</a:t>
-            </a:r>
-          </a:p>
-        </p:txBody>
-      </p:sp>
       <p:cxnSp>
         <p:nvCxnSpPr>
-          <p:cNvPr id="29" name="Connector 28"/>
+          <p:cNvPr id="30" name="Connector 29"/>
           <p:cNvCxnSpPr/>
           <p:nvPr/>
         </p:nvCxnSpPr>
@@ -6637,7 +6773,7 @@
       </p:cxnSp>
       <p:sp>
         <p:nvSpPr>
-          <p:cNvPr id="30" name="TextBox 29"/>
+          <p:cNvPr id="31" name="TextBox 30"/>
           <p:cNvSpPr txBox="1"/>
           <p:nvPr/>
         </p:nvSpPr>
@@ -6682,7 +6818,7 @@
       </p:sp>
       <p:sp>
         <p:nvSpPr>
-          <p:cNvPr id="31" name="TextBox 30"/>
+          <p:cNvPr id="32" name="TextBox 31"/>
           <p:cNvSpPr txBox="1"/>
           <p:nvPr/>
         </p:nvSpPr>
@@ -6902,7 +7038,7 @@
         <p:spPr>
           <a:xfrm>
             <a:off x="841248" y="2395728"/>
-            <a:ext cx="5715000" cy="438912"/>
+            <a:ext cx="4160520" cy="402336"/>
           </a:xfrm>
           <a:prstGeom prst="roundRect">
             <a:avLst>
@@ -6957,8 +7093,8 @@
         </p:blipFill>
         <p:spPr>
           <a:xfrm>
-            <a:off x="987552" y="2496312"/>
-            <a:ext cx="237744" cy="237744"/>
+            <a:off x="969264" y="2496312"/>
+            <a:ext cx="201168" cy="201168"/>
           </a:xfrm>
           <a:prstGeom prst="rect">
             <a:avLst/>
@@ -6973,8 +7109,8 @@
         </p:nvSpPr>
         <p:spPr>
           <a:xfrm>
-            <a:off x="1353312" y="2395728"/>
-            <a:ext cx="5029200" cy="438912"/>
+            <a:off x="1280160" y="2395728"/>
+            <a:ext cx="3593591" cy="402336"/>
           </a:xfrm>
           <a:prstGeom prst="rect">
             <a:avLst/>
@@ -6999,7 +7135,7 @@
               </a:spcAft>
             </a:pPr>
             <a:r>
-              <a:rPr sz="1200" b="0">
+              <a:rPr sz="1050" b="0">
                 <a:solidFill>
                   <a:srgbClr val="1A1A1A"/>
                 </a:solidFill>
@@ -7018,8 +7154,8 @@
         </p:nvSpPr>
         <p:spPr>
           <a:xfrm>
-            <a:off x="841248" y="2907792"/>
-            <a:ext cx="5715000" cy="438912"/>
+            <a:off x="841248" y="2871216"/>
+            <a:ext cx="4160520" cy="402336"/>
           </a:xfrm>
           <a:prstGeom prst="roundRect">
             <a:avLst>
@@ -7074,8 +7210,8 @@
         </p:blipFill>
         <p:spPr>
           <a:xfrm>
-            <a:off x="987552" y="3008376"/>
-            <a:ext cx="237744" cy="237744"/>
+            <a:off x="969264" y="2971800"/>
+            <a:ext cx="201168" cy="201168"/>
           </a:xfrm>
           <a:prstGeom prst="rect">
             <a:avLst/>
@@ -7090,8 +7226,8 @@
         </p:nvSpPr>
         <p:spPr>
           <a:xfrm>
-            <a:off x="1353312" y="2907792"/>
-            <a:ext cx="5029200" cy="438912"/>
+            <a:off x="1280160" y="2871216"/>
+            <a:ext cx="3593591" cy="402336"/>
           </a:xfrm>
           <a:prstGeom prst="rect">
             <a:avLst/>
@@ -7116,7 +7252,7 @@
               </a:spcAft>
             </a:pPr>
             <a:r>
-              <a:rPr sz="1200" b="0">
+              <a:rPr sz="1050" b="0">
                 <a:solidFill>
                   <a:srgbClr val="1A1A1A"/>
                 </a:solidFill>
@@ -7135,8 +7271,8 @@
         </p:nvSpPr>
         <p:spPr>
           <a:xfrm>
-            <a:off x="841248" y="3419856"/>
-            <a:ext cx="5715000" cy="438912"/>
+            <a:off x="841248" y="3346704"/>
+            <a:ext cx="4160520" cy="402336"/>
           </a:xfrm>
           <a:prstGeom prst="roundRect">
             <a:avLst>
@@ -7191,8 +7327,8 @@
         </p:blipFill>
         <p:spPr>
           <a:xfrm>
-            <a:off x="987552" y="3520440"/>
-            <a:ext cx="237744" cy="237744"/>
+            <a:off x="969264" y="3447288"/>
+            <a:ext cx="201168" cy="201168"/>
           </a:xfrm>
           <a:prstGeom prst="rect">
             <a:avLst/>
@@ -7207,8 +7343,8 @@
         </p:nvSpPr>
         <p:spPr>
           <a:xfrm>
-            <a:off x="1353312" y="3419856"/>
-            <a:ext cx="5029200" cy="438912"/>
+            <a:off x="1280160" y="3346704"/>
+            <a:ext cx="3593591" cy="402336"/>
           </a:xfrm>
           <a:prstGeom prst="rect">
             <a:avLst/>
@@ -7233,7 +7369,7 @@
               </a:spcAft>
             </a:pPr>
             <a:r>
-              <a:rPr sz="1200" b="0">
+              <a:rPr sz="1050" b="0">
                 <a:solidFill>
                   <a:srgbClr val="1A1A1A"/>
                 </a:solidFill>
@@ -7252,8 +7388,8 @@
         </p:nvSpPr>
         <p:spPr>
           <a:xfrm>
-            <a:off x="841248" y="3931920"/>
-            <a:ext cx="5715000" cy="438912"/>
+            <a:off x="841248" y="3822191"/>
+            <a:ext cx="4160520" cy="402336"/>
           </a:xfrm>
           <a:prstGeom prst="roundRect">
             <a:avLst>
@@ -7308,8 +7444,8 @@
         </p:blipFill>
         <p:spPr>
           <a:xfrm>
-            <a:off x="987552" y="4032504"/>
-            <a:ext cx="237744" cy="237744"/>
+            <a:off x="969264" y="3922775"/>
+            <a:ext cx="201168" cy="201168"/>
           </a:xfrm>
           <a:prstGeom prst="rect">
             <a:avLst/>
@@ -7324,8 +7460,8 @@
         </p:nvSpPr>
         <p:spPr>
           <a:xfrm>
-            <a:off x="1353312" y="3931920"/>
-            <a:ext cx="5029200" cy="438912"/>
+            <a:off x="1280160" y="3822191"/>
+            <a:ext cx="3593591" cy="402336"/>
           </a:xfrm>
           <a:prstGeom prst="rect">
             <a:avLst/>
@@ -7350,7 +7486,7 @@
               </a:spcAft>
             </a:pPr>
             <a:r>
-              <a:rPr sz="1200" b="0">
+              <a:rPr sz="1050" b="0">
                 <a:solidFill>
                   <a:srgbClr val="1A1A1A"/>
                 </a:solidFill>
@@ -7369,8 +7505,8 @@
         </p:nvSpPr>
         <p:spPr>
           <a:xfrm>
-            <a:off x="841248" y="4443984"/>
-            <a:ext cx="5715000" cy="438912"/>
+            <a:off x="841248" y="4297679"/>
+            <a:ext cx="4160520" cy="402336"/>
           </a:xfrm>
           <a:prstGeom prst="roundRect">
             <a:avLst>
@@ -7425,8 +7561,8 @@
         </p:blipFill>
         <p:spPr>
           <a:xfrm>
-            <a:off x="987552" y="4544568"/>
-            <a:ext cx="237744" cy="237744"/>
+            <a:off x="969264" y="4398263"/>
+            <a:ext cx="201168" cy="201168"/>
           </a:xfrm>
           <a:prstGeom prst="rect">
             <a:avLst/>
@@ -7441,8 +7577,8 @@
         </p:nvSpPr>
         <p:spPr>
           <a:xfrm>
-            <a:off x="1353312" y="4443984"/>
-            <a:ext cx="5029200" cy="438912"/>
+            <a:off x="1280160" y="4297679"/>
+            <a:ext cx="3593591" cy="402336"/>
           </a:xfrm>
           <a:prstGeom prst="rect">
             <a:avLst/>
@@ -7467,7 +7603,7 @@
               </a:spcAft>
             </a:pPr>
             <a:r>
-              <a:rPr sz="1200" b="0">
+              <a:rPr sz="1050" b="0">
                 <a:solidFill>
                   <a:srgbClr val="1A1A1A"/>
                 </a:solidFill>
@@ -7486,8 +7622,8 @@
         </p:nvSpPr>
         <p:spPr>
           <a:xfrm>
-            <a:off x="841248" y="4956048"/>
-            <a:ext cx="5715000" cy="438912"/>
+            <a:off x="841248" y="4773167"/>
+            <a:ext cx="4160520" cy="402336"/>
           </a:xfrm>
           <a:prstGeom prst="roundRect">
             <a:avLst>
@@ -7542,8 +7678,8 @@
         </p:blipFill>
         <p:spPr>
           <a:xfrm>
-            <a:off x="987552" y="5056632"/>
-            <a:ext cx="237744" cy="237744"/>
+            <a:off x="969264" y="4873751"/>
+            <a:ext cx="201168" cy="201168"/>
           </a:xfrm>
           <a:prstGeom prst="rect">
             <a:avLst/>
@@ -7558,8 +7694,8 @@
         </p:nvSpPr>
         <p:spPr>
           <a:xfrm>
-            <a:off x="1353312" y="4956048"/>
-            <a:ext cx="5029200" cy="438912"/>
+            <a:off x="1280160" y="4773167"/>
+            <a:ext cx="3593591" cy="402336"/>
           </a:xfrm>
           <a:prstGeom prst="rect">
             <a:avLst/>
@@ -7584,7 +7720,7 @@
               </a:spcAft>
             </a:pPr>
             <a:r>
-              <a:rPr sz="1200" b="0">
+              <a:rPr sz="1050" b="0">
                 <a:solidFill>
                   <a:srgbClr val="1A1A1A"/>
                 </a:solidFill>
@@ -7603,8 +7739,8 @@
         </p:nvSpPr>
         <p:spPr>
           <a:xfrm>
-            <a:off x="6812280" y="2395728"/>
-            <a:ext cx="4538167" cy="2999232"/>
+            <a:off x="5385816" y="3030695"/>
+            <a:ext cx="5964631" cy="1582993"/>
           </a:xfrm>
           <a:prstGeom prst="roundRect">
             <a:avLst>
@@ -7643,100 +7779,9 @@
           </a:p>
         </p:txBody>
       </p:sp>
-      <p:sp>
-        <p:nvSpPr>
-          <p:cNvPr id="25" name="Rounded Rectangle 24"/>
-          <p:cNvSpPr/>
-          <p:nvPr/>
-        </p:nvSpPr>
-        <p:spPr>
-          <a:xfrm>
-            <a:off x="7013448" y="2596896"/>
-            <a:ext cx="1298448" cy="310896"/>
-          </a:xfrm>
-          <a:prstGeom prst="roundRect">
-            <a:avLst>
-              <a:gd name="adj" fmla="val 50000"/>
-            </a:avLst>
-          </a:prstGeom>
-          <a:solidFill>
-            <a:srgbClr val="FCECEC"/>
-          </a:solidFill>
-          <a:ln>
-            <a:noFill/>
-          </a:ln>
-          <a:effectLst/>
-        </p:spPr>
-        <p:style>
-          <a:lnRef idx="1">
-            <a:schemeClr val="accent1"/>
-          </a:lnRef>
-          <a:fillRef idx="3">
-            <a:schemeClr val="accent1"/>
-          </a:fillRef>
-          <a:effectRef idx="2">
-            <a:schemeClr val="accent1"/>
-          </a:effectRef>
-          <a:fontRef idx="minor">
-            <a:schemeClr val="lt1"/>
-          </a:fontRef>
-        </p:style>
-        <p:txBody>
-          <a:bodyPr rtlCol="0" anchor="ctr"/>
-          <a:lstStyle/>
-          <a:p>
-            <a:pPr algn="ctr"/>
-          </a:p>
-        </p:txBody>
-      </p:sp>
-      <p:sp>
-        <p:nvSpPr>
-          <p:cNvPr id="26" name="TextBox 25"/>
-          <p:cNvSpPr txBox="1"/>
-          <p:nvPr/>
-        </p:nvSpPr>
-        <p:spPr>
-          <a:xfrm>
-            <a:off x="7013448" y="2596896"/>
-            <a:ext cx="1298448" cy="310896"/>
-          </a:xfrm>
-          <a:prstGeom prst="rect">
-            <a:avLst/>
-          </a:prstGeom>
-          <a:noFill/>
-        </p:spPr>
-        <p:txBody>
-          <a:bodyPr wrap="none" anchor="ctr" lIns="0" rIns="0" tIns="0" bIns="0">
-            <a:spAutoFit/>
-          </a:bodyPr>
-          <a:lstStyle/>
-          <a:p>
-            <a:pPr algn="ctr">
-              <a:lnSpc>
-                <a:spcPct val="106000"/>
-              </a:lnSpc>
-              <a:spcBef>
-                <a:spcPts val="0"/>
-              </a:spcBef>
-              <a:spcAft>
-                <a:spcPts val="0"/>
-              </a:spcAft>
-            </a:pPr>
-            <a:r>
-              <a:rPr sz="850" b="1">
-                <a:solidFill>
-                  <a:srgbClr val="B80000"/>
-                </a:solidFill>
-                <a:latin typeface="Red Hat Display"/>
-              </a:rPr>
-              <a:t>MEDIA PASS</a:t>
-            </a:r>
-          </a:p>
-        </p:txBody>
-      </p:sp>
       <p:pic>
         <p:nvPicPr>
-          <p:cNvPr id="27" name="Picture 26" descr="eye_slate.png"/>
+          <p:cNvPr id="25" name="Picture 24" descr="01-five-pillars.png"/>
           <p:cNvPicPr>
             <a:picLocks noChangeAspect="1"/>
           </p:cNvPicPr>
@@ -7750,62 +7795,17 @@
         </p:blipFill>
         <p:spPr>
           <a:xfrm>
-            <a:off x="8843619" y="3108960"/>
-            <a:ext cx="475488" cy="475488"/>
+            <a:off x="5532120" y="3176999"/>
+            <a:ext cx="5672023" cy="1290385"/>
           </a:xfrm>
           <a:prstGeom prst="rect">
             <a:avLst/>
           </a:prstGeom>
         </p:spPr>
       </p:pic>
-      <p:sp>
-        <p:nvSpPr>
-          <p:cNvPr id="28" name="TextBox 27"/>
-          <p:cNvSpPr txBox="1"/>
-          <p:nvPr/>
-        </p:nvSpPr>
-        <p:spPr>
-          <a:xfrm>
-            <a:off x="7050024" y="3721608"/>
-            <a:ext cx="4062679" cy="1536192"/>
-          </a:xfrm>
-          <a:prstGeom prst="rect">
-            <a:avLst/>
-          </a:prstGeom>
-          <a:noFill/>
-        </p:spPr>
-        <p:txBody>
-          <a:bodyPr wrap="square" anchor="t" lIns="0" rIns="0" tIns="0" bIns="0">
-            <a:spAutoFit/>
-          </a:bodyPr>
-          <a:lstStyle/>
-          <a:p>
-            <a:pPr algn="l">
-              <a:lnSpc>
-                <a:spcPct val="120000"/>
-              </a:lnSpc>
-              <a:spcBef>
-                <a:spcPts val="0"/>
-              </a:spcBef>
-              <a:spcAft>
-                <a:spcPts val="0"/>
-              </a:spcAft>
-            </a:pPr>
-            <a:r>
-              <a:rPr sz="950" b="0">
-                <a:solidFill>
-                  <a:srgbClr val="8A9099"/>
-                </a:solidFill>
-                <a:latin typeface="Red Hat Text"/>
-              </a:rPr>
-              <a:t>The concept diagram app-security-testing-01-five-pillars.svg — source → SAST → SCA → build → image scan → config check → deploy → DAST, with the five gates coloured by family (shift-left blue, shift-right amber) and the plain build/deploy steps in grey. Reused on concept slide 3.</a:t>
-            </a:r>
-          </a:p>
-        </p:txBody>
-      </p:sp>
       <p:cxnSp>
         <p:nvCxnSpPr>
-          <p:cNvPr id="29" name="Connector 28"/>
+          <p:cNvPr id="26" name="Connector 25"/>
           <p:cNvCxnSpPr/>
           <p:nvPr/>
         </p:nvCxnSpPr>
@@ -7841,7 +7841,7 @@
       </p:cxnSp>
       <p:sp>
         <p:nvSpPr>
-          <p:cNvPr id="30" name="TextBox 29"/>
+          <p:cNvPr id="27" name="TextBox 26"/>
           <p:cNvSpPr txBox="1"/>
           <p:nvPr/>
         </p:nvSpPr>
@@ -7886,7 +7886,7 @@
       </p:sp>
       <p:sp>
         <p:nvSpPr>
-          <p:cNvPr id="31" name="TextBox 30"/>
+          <p:cNvPr id="28" name="TextBox 27"/>
           <p:cNvSpPr txBox="1"/>
           <p:nvPr/>
         </p:nvSpPr>
@@ -8151,7 +8151,7 @@
         <p:spPr>
           <a:xfrm>
             <a:off x="841248" y="2670048"/>
-            <a:ext cx="5715000" cy="438912"/>
+            <a:ext cx="4160520" cy="402336"/>
           </a:xfrm>
           <a:prstGeom prst="roundRect">
             <a:avLst>
@@ -8206,8 +8206,8 @@
         </p:blipFill>
         <p:spPr>
           <a:xfrm>
-            <a:off x="987552" y="2770632"/>
-            <a:ext cx="237744" cy="237744"/>
+            <a:off x="969264" y="2770632"/>
+            <a:ext cx="201168" cy="201168"/>
           </a:xfrm>
           <a:prstGeom prst="rect">
             <a:avLst/>
@@ -8222,8 +8222,8 @@
         </p:nvSpPr>
         <p:spPr>
           <a:xfrm>
-            <a:off x="1353312" y="2670048"/>
-            <a:ext cx="5029200" cy="438912"/>
+            <a:off x="1280160" y="2670048"/>
+            <a:ext cx="3593591" cy="402336"/>
           </a:xfrm>
           <a:prstGeom prst="rect">
             <a:avLst/>
@@ -8248,7 +8248,7 @@
               </a:spcAft>
             </a:pPr>
             <a:r>
-              <a:rPr sz="1200" b="0">
+              <a:rPr sz="1050" b="0">
                 <a:solidFill>
                   <a:srgbClr val="1A1A1A"/>
                 </a:solidFill>
@@ -8267,8 +8267,8 @@
         </p:nvSpPr>
         <p:spPr>
           <a:xfrm>
-            <a:off x="841248" y="3182112"/>
-            <a:ext cx="5715000" cy="438912"/>
+            <a:off x="841248" y="3145536"/>
+            <a:ext cx="4160520" cy="402336"/>
           </a:xfrm>
           <a:prstGeom prst="roundRect">
             <a:avLst>
@@ -8323,8 +8323,8 @@
         </p:blipFill>
         <p:spPr>
           <a:xfrm>
-            <a:off x="987552" y="3282696"/>
-            <a:ext cx="237744" cy="237744"/>
+            <a:off x="969264" y="3246120"/>
+            <a:ext cx="201168" cy="201168"/>
           </a:xfrm>
           <a:prstGeom prst="rect">
             <a:avLst/>
@@ -8339,8 +8339,8 @@
         </p:nvSpPr>
         <p:spPr>
           <a:xfrm>
-            <a:off x="1353312" y="3182112"/>
-            <a:ext cx="5029200" cy="438912"/>
+            <a:off x="1280160" y="3145536"/>
+            <a:ext cx="3593591" cy="402336"/>
           </a:xfrm>
           <a:prstGeom prst="rect">
             <a:avLst/>
@@ -8365,7 +8365,7 @@
               </a:spcAft>
             </a:pPr>
             <a:r>
-              <a:rPr sz="1200" b="0">
+              <a:rPr sz="1050" b="0">
                 <a:solidFill>
                   <a:srgbClr val="1A1A1A"/>
                 </a:solidFill>
@@ -8384,8 +8384,8 @@
         </p:nvSpPr>
         <p:spPr>
           <a:xfrm>
-            <a:off x="841248" y="3694176"/>
-            <a:ext cx="5715000" cy="438912"/>
+            <a:off x="841248" y="3621024"/>
+            <a:ext cx="4160520" cy="402336"/>
           </a:xfrm>
           <a:prstGeom prst="roundRect">
             <a:avLst>
@@ -8440,8 +8440,8 @@
         </p:blipFill>
         <p:spPr>
           <a:xfrm>
-            <a:off x="987552" y="3794760"/>
-            <a:ext cx="237744" cy="237744"/>
+            <a:off x="969264" y="3721607"/>
+            <a:ext cx="201168" cy="201168"/>
           </a:xfrm>
           <a:prstGeom prst="rect">
             <a:avLst/>
@@ -8456,8 +8456,8 @@
         </p:nvSpPr>
         <p:spPr>
           <a:xfrm>
-            <a:off x="1353312" y="3694176"/>
-            <a:ext cx="5029200" cy="438912"/>
+            <a:off x="1280160" y="3621024"/>
+            <a:ext cx="3593591" cy="402336"/>
           </a:xfrm>
           <a:prstGeom prst="rect">
             <a:avLst/>
@@ -8482,7 +8482,7 @@
               </a:spcAft>
             </a:pPr>
             <a:r>
-              <a:rPr sz="1200" b="0">
+              <a:rPr sz="1050" b="0">
                 <a:solidFill>
                   <a:srgbClr val="1A1A1A"/>
                 </a:solidFill>
@@ -8501,8 +8501,8 @@
         </p:nvSpPr>
         <p:spPr>
           <a:xfrm>
-            <a:off x="841248" y="4206240"/>
-            <a:ext cx="5715000" cy="438912"/>
+            <a:off x="841248" y="4096512"/>
+            <a:ext cx="4160520" cy="402336"/>
           </a:xfrm>
           <a:prstGeom prst="roundRect">
             <a:avLst>
@@ -8557,8 +8557,8 @@
         </p:blipFill>
         <p:spPr>
           <a:xfrm>
-            <a:off x="987552" y="4306824"/>
-            <a:ext cx="237744" cy="237744"/>
+            <a:off x="969264" y="4197096"/>
+            <a:ext cx="201168" cy="201168"/>
           </a:xfrm>
           <a:prstGeom prst="rect">
             <a:avLst/>
@@ -8573,8 +8573,8 @@
         </p:nvSpPr>
         <p:spPr>
           <a:xfrm>
-            <a:off x="1353312" y="4206240"/>
-            <a:ext cx="5029200" cy="438912"/>
+            <a:off x="1280160" y="4096512"/>
+            <a:ext cx="3593591" cy="402336"/>
           </a:xfrm>
           <a:prstGeom prst="rect">
             <a:avLst/>
@@ -8599,7 +8599,7 @@
               </a:spcAft>
             </a:pPr>
             <a:r>
-              <a:rPr sz="1200" b="0">
+              <a:rPr sz="1050" b="0">
                 <a:solidFill>
                   <a:srgbClr val="1A1A1A"/>
                 </a:solidFill>
@@ -8618,8 +8618,8 @@
         </p:nvSpPr>
         <p:spPr>
           <a:xfrm>
-            <a:off x="841248" y="4718304"/>
-            <a:ext cx="5715000" cy="438912"/>
+            <a:off x="841248" y="4572000"/>
+            <a:ext cx="4160520" cy="402336"/>
           </a:xfrm>
           <a:prstGeom prst="roundRect">
             <a:avLst>
@@ -8674,8 +8674,8 @@
         </p:blipFill>
         <p:spPr>
           <a:xfrm>
-            <a:off x="987552" y="4818888"/>
-            <a:ext cx="237744" cy="237744"/>
+            <a:off x="969264" y="4672583"/>
+            <a:ext cx="201168" cy="201168"/>
           </a:xfrm>
           <a:prstGeom prst="rect">
             <a:avLst/>
@@ -8690,8 +8690,8 @@
         </p:nvSpPr>
         <p:spPr>
           <a:xfrm>
-            <a:off x="1353312" y="4718304"/>
-            <a:ext cx="5029200" cy="438912"/>
+            <a:off x="1280160" y="4572000"/>
+            <a:ext cx="3593591" cy="402336"/>
           </a:xfrm>
           <a:prstGeom prst="rect">
             <a:avLst/>
@@ -8716,7 +8716,7 @@
               </a:spcAft>
             </a:pPr>
             <a:r>
-              <a:rPr sz="1200" b="0">
+              <a:rPr sz="1050" b="0">
                 <a:solidFill>
                   <a:srgbClr val="1A1A1A"/>
                 </a:solidFill>
@@ -8735,8 +8735,8 @@
         </p:nvSpPr>
         <p:spPr>
           <a:xfrm>
-            <a:off x="841248" y="5230368"/>
-            <a:ext cx="5715000" cy="438912"/>
+            <a:off x="841248" y="5047488"/>
+            <a:ext cx="4160520" cy="402336"/>
           </a:xfrm>
           <a:prstGeom prst="roundRect">
             <a:avLst>
@@ -8791,8 +8791,8 @@
         </p:blipFill>
         <p:spPr>
           <a:xfrm>
-            <a:off x="987552" y="5330952"/>
-            <a:ext cx="237744" cy="237744"/>
+            <a:off x="969264" y="5148071"/>
+            <a:ext cx="201168" cy="201168"/>
           </a:xfrm>
           <a:prstGeom prst="rect">
             <a:avLst/>
@@ -8807,8 +8807,8 @@
         </p:nvSpPr>
         <p:spPr>
           <a:xfrm>
-            <a:off x="1353312" y="5230368"/>
-            <a:ext cx="5029200" cy="438912"/>
+            <a:off x="1280160" y="5047488"/>
+            <a:ext cx="3593591" cy="402336"/>
           </a:xfrm>
           <a:prstGeom prst="rect">
             <a:avLst/>
@@ -8833,7 +8833,7 @@
               </a:spcAft>
             </a:pPr>
             <a:r>
-              <a:rPr sz="1200" b="0">
+              <a:rPr sz="1050" b="0">
                 <a:solidFill>
                   <a:srgbClr val="1A1A1A"/>
                 </a:solidFill>
@@ -8852,8 +8852,8 @@
         </p:nvSpPr>
         <p:spPr>
           <a:xfrm>
-            <a:off x="6812280" y="2670048"/>
-            <a:ext cx="4538167" cy="2999232"/>
+            <a:off x="5385816" y="3305015"/>
+            <a:ext cx="5964631" cy="1582993"/>
           </a:xfrm>
           <a:prstGeom prst="roundRect">
             <a:avLst>
@@ -8892,100 +8892,9 @@
           </a:p>
         </p:txBody>
       </p:sp>
-      <p:sp>
-        <p:nvSpPr>
-          <p:cNvPr id="26" name="Rounded Rectangle 25"/>
-          <p:cNvSpPr/>
-          <p:nvPr/>
-        </p:nvSpPr>
-        <p:spPr>
-          <a:xfrm>
-            <a:off x="7013448" y="2871216"/>
-            <a:ext cx="1298448" cy="310896"/>
-          </a:xfrm>
-          <a:prstGeom prst="roundRect">
-            <a:avLst>
-              <a:gd name="adj" fmla="val 50000"/>
-            </a:avLst>
-          </a:prstGeom>
-          <a:solidFill>
-            <a:srgbClr val="FCECEC"/>
-          </a:solidFill>
-          <a:ln>
-            <a:noFill/>
-          </a:ln>
-          <a:effectLst/>
-        </p:spPr>
-        <p:style>
-          <a:lnRef idx="1">
-            <a:schemeClr val="accent1"/>
-          </a:lnRef>
-          <a:fillRef idx="3">
-            <a:schemeClr val="accent1"/>
-          </a:fillRef>
-          <a:effectRef idx="2">
-            <a:schemeClr val="accent1"/>
-          </a:effectRef>
-          <a:fontRef idx="minor">
-            <a:schemeClr val="lt1"/>
-          </a:fontRef>
-        </p:style>
-        <p:txBody>
-          <a:bodyPr rtlCol="0" anchor="ctr"/>
-          <a:lstStyle/>
-          <a:p>
-            <a:pPr algn="ctr"/>
-          </a:p>
-        </p:txBody>
-      </p:sp>
-      <p:sp>
-        <p:nvSpPr>
-          <p:cNvPr id="27" name="TextBox 26"/>
-          <p:cNvSpPr txBox="1"/>
-          <p:nvPr/>
-        </p:nvSpPr>
-        <p:spPr>
-          <a:xfrm>
-            <a:off x="7013448" y="2871216"/>
-            <a:ext cx="1298448" cy="310896"/>
-          </a:xfrm>
-          <a:prstGeom prst="rect">
-            <a:avLst/>
-          </a:prstGeom>
-          <a:noFill/>
-        </p:spPr>
-        <p:txBody>
-          <a:bodyPr wrap="none" anchor="ctr" lIns="0" rIns="0" tIns="0" bIns="0">
-            <a:spAutoFit/>
-          </a:bodyPr>
-          <a:lstStyle/>
-          <a:p>
-            <a:pPr algn="ctr">
-              <a:lnSpc>
-                <a:spcPct val="106000"/>
-              </a:lnSpc>
-              <a:spcBef>
-                <a:spcPts val="0"/>
-              </a:spcBef>
-              <a:spcAft>
-                <a:spcPts val="0"/>
-              </a:spcAft>
-            </a:pPr>
-            <a:r>
-              <a:rPr sz="850" b="1">
-                <a:solidFill>
-                  <a:srgbClr val="B80000"/>
-                </a:solidFill>
-                <a:latin typeface="Red Hat Display"/>
-              </a:rPr>
-              <a:t>MEDIA PASS</a:t>
-            </a:r>
-          </a:p>
-        </p:txBody>
-      </p:sp>
       <p:pic>
         <p:nvPicPr>
-          <p:cNvPr id="28" name="Picture 27" descr="eye_slate.png"/>
+          <p:cNvPr id="26" name="Picture 25" descr="01-five-pillars.png"/>
           <p:cNvPicPr>
             <a:picLocks noChangeAspect="1"/>
           </p:cNvPicPr>
@@ -8999,62 +8908,17 @@
         </p:blipFill>
         <p:spPr>
           <a:xfrm>
-            <a:off x="8843619" y="3383280"/>
-            <a:ext cx="475488" cy="475488"/>
+            <a:off x="5532120" y="3451319"/>
+            <a:ext cx="5672023" cy="1290385"/>
           </a:xfrm>
           <a:prstGeom prst="rect">
             <a:avLst/>
           </a:prstGeom>
         </p:spPr>
       </p:pic>
-      <p:sp>
-        <p:nvSpPr>
-          <p:cNvPr id="29" name="TextBox 28"/>
-          <p:cNvSpPr txBox="1"/>
-          <p:nvPr/>
-        </p:nvSpPr>
-        <p:spPr>
-          <a:xfrm>
-            <a:off x="7050024" y="3995928"/>
-            <a:ext cx="4062679" cy="1536192"/>
-          </a:xfrm>
-          <a:prstGeom prst="rect">
-            <a:avLst/>
-          </a:prstGeom>
-          <a:noFill/>
-        </p:spPr>
-        <p:txBody>
-          <a:bodyPr wrap="square" anchor="t" lIns="0" rIns="0" tIns="0" bIns="0">
-            <a:spAutoFit/>
-          </a:bodyPr>
-          <a:lstStyle/>
-          <a:p>
-            <a:pPr algn="l">
-              <a:lnSpc>
-                <a:spcPct val="120000"/>
-              </a:lnSpc>
-              <a:spcBef>
-                <a:spcPts val="0"/>
-              </a:spcBef>
-              <a:spcAft>
-                <a:spcPts val="0"/>
-              </a:spcAft>
-            </a:pPr>
-            <a:r>
-              <a:rPr sz="950" b="0">
-                <a:solidFill>
-                  <a:srgbClr val="8A9099"/>
-                </a:solidFill>
-                <a:latin typeface="Red Hat Text"/>
-              </a:rPr>
-              <a:t>The same app-security-testing-01-five-pillars.svg, read this time as two bands — the blue shift-LEFT gates sitting before the "build" step, the amber shift-RIGHT gates after it — with a cost arrow underneath rising from "cheap one-line fix" on the left to "production incident" on the right.</a:t>
-            </a:r>
-          </a:p>
-        </p:txBody>
-      </p:sp>
       <p:cxnSp>
         <p:nvCxnSpPr>
-          <p:cNvPr id="30" name="Connector 29"/>
+          <p:cNvPr id="27" name="Connector 26"/>
           <p:cNvCxnSpPr/>
           <p:nvPr/>
         </p:nvCxnSpPr>
@@ -9090,7 +8954,7 @@
       </p:cxnSp>
       <p:sp>
         <p:nvSpPr>
-          <p:cNvPr id="31" name="TextBox 30"/>
+          <p:cNvPr id="28" name="TextBox 27"/>
           <p:cNvSpPr txBox="1"/>
           <p:nvPr/>
         </p:nvSpPr>
@@ -9135,7 +8999,7 @@
       </p:sp>
       <p:sp>
         <p:nvSpPr>
-          <p:cNvPr id="32" name="TextBox 31"/>
+          <p:cNvPr id="29" name="TextBox 28"/>
           <p:cNvSpPr txBox="1"/>
           <p:nvPr/>
         </p:nvSpPr>
@@ -9355,11 +9219,11 @@
         <p:spPr>
           <a:xfrm>
             <a:off x="841248" y="2395728"/>
-            <a:ext cx="5715000" cy="438912"/>
+            <a:ext cx="5138928" cy="786384"/>
           </a:xfrm>
           <a:prstGeom prst="roundRect">
             <a:avLst>
-              <a:gd name="adj" fmla="val 6000"/>
+              <a:gd name="adj" fmla="val 7000"/>
             </a:avLst>
           </a:prstGeom>
           <a:solidFill>
@@ -9394,9 +9258,55 @@
           </a:p>
         </p:txBody>
       </p:sp>
+      <p:sp>
+        <p:nvSpPr>
+          <p:cNvPr id="7" name="Rounded Rectangle 6"/>
+          <p:cNvSpPr/>
+          <p:nvPr/>
+        </p:nvSpPr>
+        <p:spPr>
+          <a:xfrm>
+            <a:off x="987552" y="2532888"/>
+            <a:ext cx="512064" cy="512064"/>
+          </a:xfrm>
+          <a:prstGeom prst="roundRect">
+            <a:avLst>
+              <a:gd name="adj" fmla="val 26000"/>
+            </a:avLst>
+          </a:prstGeom>
+          <a:solidFill>
+            <a:srgbClr val="EE0000"/>
+          </a:solidFill>
+          <a:ln>
+            <a:noFill/>
+          </a:ln>
+          <a:effectLst/>
+        </p:spPr>
+        <p:style>
+          <a:lnRef idx="1">
+            <a:schemeClr val="accent1"/>
+          </a:lnRef>
+          <a:fillRef idx="3">
+            <a:schemeClr val="accent1"/>
+          </a:fillRef>
+          <a:effectRef idx="2">
+            <a:schemeClr val="accent1"/>
+          </a:effectRef>
+          <a:fontRef idx="minor">
+            <a:schemeClr val="lt1"/>
+          </a:fontRef>
+        </p:style>
+        <p:txBody>
+          <a:bodyPr rtlCol="0" anchor="ctr"/>
+          <a:lstStyle/>
+          <a:p>
+            <a:pPr algn="ctr"/>
+          </a:p>
+        </p:txBody>
+      </p:sp>
       <p:pic>
         <p:nvPicPr>
-          <p:cNvPr id="7" name="Picture 6" descr="check_steel.png"/>
+          <p:cNvPr id="8" name="Picture 7" descr="check_white.png"/>
           <p:cNvPicPr>
             <a:picLocks noChangeAspect="1"/>
           </p:cNvPicPr>
@@ -9410,8 +9320,8 @@
         </p:blipFill>
         <p:spPr>
           <a:xfrm>
-            <a:off x="987552" y="2496312"/>
-            <a:ext cx="237744" cy="237744"/>
+            <a:off x="1110447" y="2655783"/>
+            <a:ext cx="266273" cy="266273"/>
           </a:xfrm>
           <a:prstGeom prst="rect">
             <a:avLst/>
@@ -9420,14 +9330,14 @@
       </p:pic>
       <p:sp>
         <p:nvSpPr>
-          <p:cNvPr id="8" name="TextBox 7"/>
+          <p:cNvPr id="9" name="TextBox 8"/>
           <p:cNvSpPr txBox="1"/>
           <p:nvPr/>
         </p:nvSpPr>
         <p:spPr>
           <a:xfrm>
-            <a:off x="1353312" y="2395728"/>
-            <a:ext cx="5029200" cy="438912"/>
+            <a:off x="1627632" y="2395728"/>
+            <a:ext cx="4206240" cy="786384"/>
           </a:xfrm>
           <a:prstGeom prst="rect">
             <a:avLst/>
@@ -9452,7 +9362,7 @@
               </a:spcAft>
             </a:pPr>
             <a:r>
-              <a:rPr sz="1200" b="0">
+              <a:rPr sz="1150" b="0">
                 <a:solidFill>
                   <a:srgbClr val="1A1A1A"/>
                 </a:solidFill>
@@ -9465,18 +9375,18 @@
       </p:sp>
       <p:sp>
         <p:nvSpPr>
-          <p:cNvPr id="9" name="Rounded Rectangle 8"/>
+          <p:cNvPr id="10" name="Rounded Rectangle 9"/>
           <p:cNvSpPr/>
           <p:nvPr/>
         </p:nvSpPr>
         <p:spPr>
           <a:xfrm>
-            <a:off x="841248" y="2907792"/>
-            <a:ext cx="5715000" cy="438912"/>
+            <a:off x="6254496" y="2395728"/>
+            <a:ext cx="5138928" cy="786384"/>
           </a:xfrm>
           <a:prstGeom prst="roundRect">
             <a:avLst>
-              <a:gd name="adj" fmla="val 6000"/>
+              <a:gd name="adj" fmla="val 7000"/>
             </a:avLst>
           </a:prstGeom>
           <a:solidFill>
@@ -9511,9 +9421,55 @@
           </a:p>
         </p:txBody>
       </p:sp>
+      <p:sp>
+        <p:nvSpPr>
+          <p:cNvPr id="11" name="Rounded Rectangle 10"/>
+          <p:cNvSpPr/>
+          <p:nvPr/>
+        </p:nvSpPr>
+        <p:spPr>
+          <a:xfrm>
+            <a:off x="6400800" y="2532888"/>
+            <a:ext cx="512064" cy="512064"/>
+          </a:xfrm>
+          <a:prstGeom prst="roundRect">
+            <a:avLst>
+              <a:gd name="adj" fmla="val 26000"/>
+            </a:avLst>
+          </a:prstGeom>
+          <a:solidFill>
+            <a:srgbClr val="EE0000"/>
+          </a:solidFill>
+          <a:ln>
+            <a:noFill/>
+          </a:ln>
+          <a:effectLst/>
+        </p:spPr>
+        <p:style>
+          <a:lnRef idx="1">
+            <a:schemeClr val="accent1"/>
+          </a:lnRef>
+          <a:fillRef idx="3">
+            <a:schemeClr val="accent1"/>
+          </a:fillRef>
+          <a:effectRef idx="2">
+            <a:schemeClr val="accent1"/>
+          </a:effectRef>
+          <a:fontRef idx="minor">
+            <a:schemeClr val="lt1"/>
+          </a:fontRef>
+        </p:style>
+        <p:txBody>
+          <a:bodyPr rtlCol="0" anchor="ctr"/>
+          <a:lstStyle/>
+          <a:p>
+            <a:pPr algn="ctr"/>
+          </a:p>
+        </p:txBody>
+      </p:sp>
       <p:pic>
         <p:nvPicPr>
-          <p:cNvPr id="10" name="Picture 9" descr="check_steel.png"/>
+          <p:cNvPr id="12" name="Picture 11" descr="check_white.png"/>
           <p:cNvPicPr>
             <a:picLocks noChangeAspect="1"/>
           </p:cNvPicPr>
@@ -9527,8 +9483,8 @@
         </p:blipFill>
         <p:spPr>
           <a:xfrm>
-            <a:off x="987552" y="3008376"/>
-            <a:ext cx="237744" cy="237744"/>
+            <a:off x="6523695" y="2655783"/>
+            <a:ext cx="266273" cy="266273"/>
           </a:xfrm>
           <a:prstGeom prst="rect">
             <a:avLst/>
@@ -9537,14 +9493,14 @@
       </p:pic>
       <p:sp>
         <p:nvSpPr>
-          <p:cNvPr id="11" name="TextBox 10"/>
+          <p:cNvPr id="13" name="TextBox 12"/>
           <p:cNvSpPr txBox="1"/>
           <p:nvPr/>
         </p:nvSpPr>
         <p:spPr>
           <a:xfrm>
-            <a:off x="1353312" y="2907792"/>
-            <a:ext cx="5029200" cy="438912"/>
+            <a:off x="7040880" y="2395728"/>
+            <a:ext cx="4206240" cy="786384"/>
           </a:xfrm>
           <a:prstGeom prst="rect">
             <a:avLst/>
@@ -9569,7 +9525,7 @@
               </a:spcAft>
             </a:pPr>
             <a:r>
-              <a:rPr sz="1200" b="0">
+              <a:rPr sz="1150" b="0">
                 <a:solidFill>
                   <a:srgbClr val="1A1A1A"/>
                 </a:solidFill>
@@ -9582,18 +9538,18 @@
       </p:sp>
       <p:sp>
         <p:nvSpPr>
-          <p:cNvPr id="12" name="Rounded Rectangle 11"/>
+          <p:cNvPr id="14" name="Rounded Rectangle 13"/>
           <p:cNvSpPr/>
           <p:nvPr/>
         </p:nvSpPr>
         <p:spPr>
           <a:xfrm>
-            <a:off x="841248" y="3419856"/>
-            <a:ext cx="5715000" cy="438912"/>
+            <a:off x="841248" y="3328416"/>
+            <a:ext cx="5138928" cy="786384"/>
           </a:xfrm>
           <a:prstGeom prst="roundRect">
             <a:avLst>
-              <a:gd name="adj" fmla="val 6000"/>
+              <a:gd name="adj" fmla="val 7000"/>
             </a:avLst>
           </a:prstGeom>
           <a:solidFill>
@@ -9628,9 +9584,55 @@
           </a:p>
         </p:txBody>
       </p:sp>
+      <p:sp>
+        <p:nvSpPr>
+          <p:cNvPr id="15" name="Rounded Rectangle 14"/>
+          <p:cNvSpPr/>
+          <p:nvPr/>
+        </p:nvSpPr>
+        <p:spPr>
+          <a:xfrm>
+            <a:off x="987552" y="3465576"/>
+            <a:ext cx="512064" cy="512064"/>
+          </a:xfrm>
+          <a:prstGeom prst="roundRect">
+            <a:avLst>
+              <a:gd name="adj" fmla="val 26000"/>
+            </a:avLst>
+          </a:prstGeom>
+          <a:solidFill>
+            <a:srgbClr val="EE0000"/>
+          </a:solidFill>
+          <a:ln>
+            <a:noFill/>
+          </a:ln>
+          <a:effectLst/>
+        </p:spPr>
+        <p:style>
+          <a:lnRef idx="1">
+            <a:schemeClr val="accent1"/>
+          </a:lnRef>
+          <a:fillRef idx="3">
+            <a:schemeClr val="accent1"/>
+          </a:fillRef>
+          <a:effectRef idx="2">
+            <a:schemeClr val="accent1"/>
+          </a:effectRef>
+          <a:fontRef idx="minor">
+            <a:schemeClr val="lt1"/>
+          </a:fontRef>
+        </p:style>
+        <p:txBody>
+          <a:bodyPr rtlCol="0" anchor="ctr"/>
+          <a:lstStyle/>
+          <a:p>
+            <a:pPr algn="ctr"/>
+          </a:p>
+        </p:txBody>
+      </p:sp>
       <p:pic>
         <p:nvPicPr>
-          <p:cNvPr id="13" name="Picture 12" descr="check_steel.png"/>
+          <p:cNvPr id="16" name="Picture 15" descr="check_white.png"/>
           <p:cNvPicPr>
             <a:picLocks noChangeAspect="1"/>
           </p:cNvPicPr>
@@ -9644,8 +9646,8 @@
         </p:blipFill>
         <p:spPr>
           <a:xfrm>
-            <a:off x="987552" y="3520440"/>
-            <a:ext cx="237744" cy="237744"/>
+            <a:off x="1110447" y="3588471"/>
+            <a:ext cx="266273" cy="266273"/>
           </a:xfrm>
           <a:prstGeom prst="rect">
             <a:avLst/>
@@ -9654,14 +9656,14 @@
       </p:pic>
       <p:sp>
         <p:nvSpPr>
-          <p:cNvPr id="14" name="TextBox 13"/>
+          <p:cNvPr id="17" name="TextBox 16"/>
           <p:cNvSpPr txBox="1"/>
           <p:nvPr/>
         </p:nvSpPr>
         <p:spPr>
           <a:xfrm>
-            <a:off x="1353312" y="3419856"/>
-            <a:ext cx="5029200" cy="438912"/>
+            <a:off x="1627632" y="3328416"/>
+            <a:ext cx="4206240" cy="786384"/>
           </a:xfrm>
           <a:prstGeom prst="rect">
             <a:avLst/>
@@ -9686,7 +9688,7 @@
               </a:spcAft>
             </a:pPr>
             <a:r>
-              <a:rPr sz="1200" b="0">
+              <a:rPr sz="1150" b="0">
                 <a:solidFill>
                   <a:srgbClr val="1A1A1A"/>
                 </a:solidFill>
@@ -9699,18 +9701,18 @@
       </p:sp>
       <p:sp>
         <p:nvSpPr>
-          <p:cNvPr id="15" name="Rounded Rectangle 14"/>
+          <p:cNvPr id="18" name="Rounded Rectangle 17"/>
           <p:cNvSpPr/>
           <p:nvPr/>
         </p:nvSpPr>
         <p:spPr>
           <a:xfrm>
-            <a:off x="841248" y="3931920"/>
-            <a:ext cx="5715000" cy="438912"/>
+            <a:off x="6254496" y="3328416"/>
+            <a:ext cx="5138928" cy="786384"/>
           </a:xfrm>
           <a:prstGeom prst="roundRect">
             <a:avLst>
-              <a:gd name="adj" fmla="val 6000"/>
+              <a:gd name="adj" fmla="val 7000"/>
             </a:avLst>
           </a:prstGeom>
           <a:solidFill>
@@ -9745,9 +9747,55 @@
           </a:p>
         </p:txBody>
       </p:sp>
+      <p:sp>
+        <p:nvSpPr>
+          <p:cNvPr id="19" name="Rounded Rectangle 18"/>
+          <p:cNvSpPr/>
+          <p:nvPr/>
+        </p:nvSpPr>
+        <p:spPr>
+          <a:xfrm>
+            <a:off x="6400800" y="3465576"/>
+            <a:ext cx="512064" cy="512064"/>
+          </a:xfrm>
+          <a:prstGeom prst="roundRect">
+            <a:avLst>
+              <a:gd name="adj" fmla="val 26000"/>
+            </a:avLst>
+          </a:prstGeom>
+          <a:solidFill>
+            <a:srgbClr val="EE0000"/>
+          </a:solidFill>
+          <a:ln>
+            <a:noFill/>
+          </a:ln>
+          <a:effectLst/>
+        </p:spPr>
+        <p:style>
+          <a:lnRef idx="1">
+            <a:schemeClr val="accent1"/>
+          </a:lnRef>
+          <a:fillRef idx="3">
+            <a:schemeClr val="accent1"/>
+          </a:fillRef>
+          <a:effectRef idx="2">
+            <a:schemeClr val="accent1"/>
+          </a:effectRef>
+          <a:fontRef idx="minor">
+            <a:schemeClr val="lt1"/>
+          </a:fontRef>
+        </p:style>
+        <p:txBody>
+          <a:bodyPr rtlCol="0" anchor="ctr"/>
+          <a:lstStyle/>
+          <a:p>
+            <a:pPr algn="ctr"/>
+          </a:p>
+        </p:txBody>
+      </p:sp>
       <p:pic>
         <p:nvPicPr>
-          <p:cNvPr id="16" name="Picture 15" descr="check_steel.png"/>
+          <p:cNvPr id="20" name="Picture 19" descr="check_white.png"/>
           <p:cNvPicPr>
             <a:picLocks noChangeAspect="1"/>
           </p:cNvPicPr>
@@ -9761,8 +9809,8 @@
         </p:blipFill>
         <p:spPr>
           <a:xfrm>
-            <a:off x="987552" y="4032504"/>
-            <a:ext cx="237744" cy="237744"/>
+            <a:off x="6523695" y="3588471"/>
+            <a:ext cx="266273" cy="266273"/>
           </a:xfrm>
           <a:prstGeom prst="rect">
             <a:avLst/>
@@ -9771,14 +9819,14 @@
       </p:pic>
       <p:sp>
         <p:nvSpPr>
-          <p:cNvPr id="17" name="TextBox 16"/>
+          <p:cNvPr id="21" name="TextBox 20"/>
           <p:cNvSpPr txBox="1"/>
           <p:nvPr/>
         </p:nvSpPr>
         <p:spPr>
           <a:xfrm>
-            <a:off x="1353312" y="3931920"/>
-            <a:ext cx="5029200" cy="438912"/>
+            <a:off x="7040880" y="3328416"/>
+            <a:ext cx="4206240" cy="786384"/>
           </a:xfrm>
           <a:prstGeom prst="rect">
             <a:avLst/>
@@ -9803,7 +9851,7 @@
               </a:spcAft>
             </a:pPr>
             <a:r>
-              <a:rPr sz="1200" b="0">
+              <a:rPr sz="1150" b="0">
                 <a:solidFill>
                   <a:srgbClr val="1A1A1A"/>
                 </a:solidFill>
@@ -9816,18 +9864,18 @@
       </p:sp>
       <p:sp>
         <p:nvSpPr>
-          <p:cNvPr id="18" name="Rounded Rectangle 17"/>
+          <p:cNvPr id="22" name="Rounded Rectangle 21"/>
           <p:cNvSpPr/>
           <p:nvPr/>
         </p:nvSpPr>
         <p:spPr>
           <a:xfrm>
-            <a:off x="841248" y="4443984"/>
-            <a:ext cx="5715000" cy="438912"/>
+            <a:off x="841248" y="4261104"/>
+            <a:ext cx="5138928" cy="786384"/>
           </a:xfrm>
           <a:prstGeom prst="roundRect">
             <a:avLst>
-              <a:gd name="adj" fmla="val 6000"/>
+              <a:gd name="adj" fmla="val 7000"/>
             </a:avLst>
           </a:prstGeom>
           <a:solidFill>
@@ -9862,9 +9910,55 @@
           </a:p>
         </p:txBody>
       </p:sp>
+      <p:sp>
+        <p:nvSpPr>
+          <p:cNvPr id="23" name="Rounded Rectangle 22"/>
+          <p:cNvSpPr/>
+          <p:nvPr/>
+        </p:nvSpPr>
+        <p:spPr>
+          <a:xfrm>
+            <a:off x="987552" y="4398264"/>
+            <a:ext cx="512064" cy="512064"/>
+          </a:xfrm>
+          <a:prstGeom prst="roundRect">
+            <a:avLst>
+              <a:gd name="adj" fmla="val 26000"/>
+            </a:avLst>
+          </a:prstGeom>
+          <a:solidFill>
+            <a:srgbClr val="EE0000"/>
+          </a:solidFill>
+          <a:ln>
+            <a:noFill/>
+          </a:ln>
+          <a:effectLst/>
+        </p:spPr>
+        <p:style>
+          <a:lnRef idx="1">
+            <a:schemeClr val="accent1"/>
+          </a:lnRef>
+          <a:fillRef idx="3">
+            <a:schemeClr val="accent1"/>
+          </a:fillRef>
+          <a:effectRef idx="2">
+            <a:schemeClr val="accent1"/>
+          </a:effectRef>
+          <a:fontRef idx="minor">
+            <a:schemeClr val="lt1"/>
+          </a:fontRef>
+        </p:style>
+        <p:txBody>
+          <a:bodyPr rtlCol="0" anchor="ctr"/>
+          <a:lstStyle/>
+          <a:p>
+            <a:pPr algn="ctr"/>
+          </a:p>
+        </p:txBody>
+      </p:sp>
       <p:pic>
         <p:nvPicPr>
-          <p:cNvPr id="19" name="Picture 18" descr="check_steel.png"/>
+          <p:cNvPr id="24" name="Picture 23" descr="check_white.png"/>
           <p:cNvPicPr>
             <a:picLocks noChangeAspect="1"/>
           </p:cNvPicPr>
@@ -9878,8 +9972,8 @@
         </p:blipFill>
         <p:spPr>
           <a:xfrm>
-            <a:off x="987552" y="4544568"/>
-            <a:ext cx="237744" cy="237744"/>
+            <a:off x="1110447" y="4521159"/>
+            <a:ext cx="266273" cy="266273"/>
           </a:xfrm>
           <a:prstGeom prst="rect">
             <a:avLst/>
@@ -9888,14 +9982,14 @@
       </p:pic>
       <p:sp>
         <p:nvSpPr>
-          <p:cNvPr id="20" name="TextBox 19"/>
+          <p:cNvPr id="25" name="TextBox 24"/>
           <p:cNvSpPr txBox="1"/>
           <p:nvPr/>
         </p:nvSpPr>
         <p:spPr>
           <a:xfrm>
-            <a:off x="1353312" y="4443984"/>
-            <a:ext cx="5029200" cy="438912"/>
+            <a:off x="1627632" y="4261104"/>
+            <a:ext cx="4206240" cy="786384"/>
           </a:xfrm>
           <a:prstGeom prst="rect">
             <a:avLst/>
@@ -9920,7 +10014,7 @@
               </a:spcAft>
             </a:pPr>
             <a:r>
-              <a:rPr sz="1200" b="0">
+              <a:rPr sz="1150" b="0">
                 <a:solidFill>
                   <a:srgbClr val="1A1A1A"/>
                 </a:solidFill>
@@ -9933,18 +10027,18 @@
       </p:sp>
       <p:sp>
         <p:nvSpPr>
-          <p:cNvPr id="21" name="Rounded Rectangle 20"/>
+          <p:cNvPr id="26" name="Rounded Rectangle 25"/>
           <p:cNvSpPr/>
           <p:nvPr/>
         </p:nvSpPr>
         <p:spPr>
           <a:xfrm>
-            <a:off x="841248" y="4956048"/>
-            <a:ext cx="5715000" cy="438912"/>
+            <a:off x="6254496" y="4261104"/>
+            <a:ext cx="5138928" cy="786384"/>
           </a:xfrm>
           <a:prstGeom prst="roundRect">
             <a:avLst>
-              <a:gd name="adj" fmla="val 6000"/>
+              <a:gd name="adj" fmla="val 7000"/>
             </a:avLst>
           </a:prstGeom>
           <a:solidFill>
@@ -9979,9 +10073,55 @@
           </a:p>
         </p:txBody>
       </p:sp>
+      <p:sp>
+        <p:nvSpPr>
+          <p:cNvPr id="27" name="Rounded Rectangle 26"/>
+          <p:cNvSpPr/>
+          <p:nvPr/>
+        </p:nvSpPr>
+        <p:spPr>
+          <a:xfrm>
+            <a:off x="6400800" y="4398264"/>
+            <a:ext cx="512064" cy="512064"/>
+          </a:xfrm>
+          <a:prstGeom prst="roundRect">
+            <a:avLst>
+              <a:gd name="adj" fmla="val 26000"/>
+            </a:avLst>
+          </a:prstGeom>
+          <a:solidFill>
+            <a:srgbClr val="EE0000"/>
+          </a:solidFill>
+          <a:ln>
+            <a:noFill/>
+          </a:ln>
+          <a:effectLst/>
+        </p:spPr>
+        <p:style>
+          <a:lnRef idx="1">
+            <a:schemeClr val="accent1"/>
+          </a:lnRef>
+          <a:fillRef idx="3">
+            <a:schemeClr val="accent1"/>
+          </a:fillRef>
+          <a:effectRef idx="2">
+            <a:schemeClr val="accent1"/>
+          </a:effectRef>
+          <a:fontRef idx="minor">
+            <a:schemeClr val="lt1"/>
+          </a:fontRef>
+        </p:style>
+        <p:txBody>
+          <a:bodyPr rtlCol="0" anchor="ctr"/>
+          <a:lstStyle/>
+          <a:p>
+            <a:pPr algn="ctr"/>
+          </a:p>
+        </p:txBody>
+      </p:sp>
       <p:pic>
         <p:nvPicPr>
-          <p:cNvPr id="22" name="Picture 21" descr="check_steel.png"/>
+          <p:cNvPr id="28" name="Picture 27" descr="check_white.png"/>
           <p:cNvPicPr>
             <a:picLocks noChangeAspect="1"/>
           </p:cNvPicPr>
@@ -9995,8 +10135,8 @@
         </p:blipFill>
         <p:spPr>
           <a:xfrm>
-            <a:off x="987552" y="5056632"/>
-            <a:ext cx="237744" cy="237744"/>
+            <a:off x="6523695" y="4521159"/>
+            <a:ext cx="266273" cy="266273"/>
           </a:xfrm>
           <a:prstGeom prst="rect">
             <a:avLst/>
@@ -10005,14 +10145,14 @@
       </p:pic>
       <p:sp>
         <p:nvSpPr>
-          <p:cNvPr id="23" name="TextBox 22"/>
+          <p:cNvPr id="29" name="TextBox 28"/>
           <p:cNvSpPr txBox="1"/>
           <p:nvPr/>
         </p:nvSpPr>
         <p:spPr>
           <a:xfrm>
-            <a:off x="1353312" y="4956048"/>
-            <a:ext cx="5029200" cy="438912"/>
+            <a:off x="7040880" y="4261104"/>
+            <a:ext cx="4206240" cy="786384"/>
           </a:xfrm>
           <a:prstGeom prst="rect">
             <a:avLst/>
@@ -10037,7 +10177,7 @@
               </a:spcAft>
             </a:pPr>
             <a:r>
-              <a:rPr sz="1200" b="0">
+              <a:rPr sz="1150" b="0">
                 <a:solidFill>
                   <a:srgbClr val="1A1A1A"/>
                 </a:solidFill>
@@ -10048,217 +10188,9 @@
           </a:p>
         </p:txBody>
       </p:sp>
-      <p:sp>
-        <p:nvSpPr>
-          <p:cNvPr id="24" name="Rounded Rectangle 23"/>
-          <p:cNvSpPr/>
-          <p:nvPr/>
-        </p:nvSpPr>
-        <p:spPr>
-          <a:xfrm>
-            <a:off x="6812280" y="2395728"/>
-            <a:ext cx="4538167" cy="2999232"/>
-          </a:xfrm>
-          <a:prstGeom prst="roundRect">
-            <a:avLst>
-              <a:gd name="adj" fmla="val 4000"/>
-            </a:avLst>
-          </a:prstGeom>
-          <a:solidFill>
-            <a:srgbClr val="FFFFFF"/>
-          </a:solidFill>
-          <a:ln w="15240">
-            <a:solidFill>
-              <a:srgbClr val="DDE1E6"/>
-            </a:solidFill>
-          </a:ln>
-          <a:effectLst/>
-        </p:spPr>
-        <p:style>
-          <a:lnRef idx="1">
-            <a:schemeClr val="accent1"/>
-          </a:lnRef>
-          <a:fillRef idx="3">
-            <a:schemeClr val="accent1"/>
-          </a:fillRef>
-          <a:effectRef idx="2">
-            <a:schemeClr val="accent1"/>
-          </a:effectRef>
-          <a:fontRef idx="minor">
-            <a:schemeClr val="lt1"/>
-          </a:fontRef>
-        </p:style>
-        <p:txBody>
-          <a:bodyPr rtlCol="0" anchor="ctr"/>
-          <a:lstStyle/>
-          <a:p>
-            <a:pPr algn="ctr"/>
-          </a:p>
-        </p:txBody>
-      </p:sp>
-      <p:sp>
-        <p:nvSpPr>
-          <p:cNvPr id="25" name="Rounded Rectangle 24"/>
-          <p:cNvSpPr/>
-          <p:nvPr/>
-        </p:nvSpPr>
-        <p:spPr>
-          <a:xfrm>
-            <a:off x="7013448" y="2596896"/>
-            <a:ext cx="1298448" cy="310896"/>
-          </a:xfrm>
-          <a:prstGeom prst="roundRect">
-            <a:avLst>
-              <a:gd name="adj" fmla="val 50000"/>
-            </a:avLst>
-          </a:prstGeom>
-          <a:solidFill>
-            <a:srgbClr val="FCECEC"/>
-          </a:solidFill>
-          <a:ln>
-            <a:noFill/>
-          </a:ln>
-          <a:effectLst/>
-        </p:spPr>
-        <p:style>
-          <a:lnRef idx="1">
-            <a:schemeClr val="accent1"/>
-          </a:lnRef>
-          <a:fillRef idx="3">
-            <a:schemeClr val="accent1"/>
-          </a:fillRef>
-          <a:effectRef idx="2">
-            <a:schemeClr val="accent1"/>
-          </a:effectRef>
-          <a:fontRef idx="minor">
-            <a:schemeClr val="lt1"/>
-          </a:fontRef>
-        </p:style>
-        <p:txBody>
-          <a:bodyPr rtlCol="0" anchor="ctr"/>
-          <a:lstStyle/>
-          <a:p>
-            <a:pPr algn="ctr"/>
-          </a:p>
-        </p:txBody>
-      </p:sp>
-      <p:sp>
-        <p:nvSpPr>
-          <p:cNvPr id="26" name="TextBox 25"/>
-          <p:cNvSpPr txBox="1"/>
-          <p:nvPr/>
-        </p:nvSpPr>
-        <p:spPr>
-          <a:xfrm>
-            <a:off x="7013448" y="2596896"/>
-            <a:ext cx="1298448" cy="310896"/>
-          </a:xfrm>
-          <a:prstGeom prst="rect">
-            <a:avLst/>
-          </a:prstGeom>
-          <a:noFill/>
-        </p:spPr>
-        <p:txBody>
-          <a:bodyPr wrap="none" anchor="ctr" lIns="0" rIns="0" tIns="0" bIns="0">
-            <a:spAutoFit/>
-          </a:bodyPr>
-          <a:lstStyle/>
-          <a:p>
-            <a:pPr algn="ctr">
-              <a:lnSpc>
-                <a:spcPct val="106000"/>
-              </a:lnSpc>
-              <a:spcBef>
-                <a:spcPts val="0"/>
-              </a:spcBef>
-              <a:spcAft>
-                <a:spcPts val="0"/>
-              </a:spcAft>
-            </a:pPr>
-            <a:r>
-              <a:rPr sz="850" b="1">
-                <a:solidFill>
-                  <a:srgbClr val="B80000"/>
-                </a:solidFill>
-                <a:latin typeface="Red Hat Display"/>
-              </a:rPr>
-              <a:t>MEDIA PASS</a:t>
-            </a:r>
-          </a:p>
-        </p:txBody>
-      </p:sp>
-      <p:pic>
-        <p:nvPicPr>
-          <p:cNvPr id="27" name="Picture 26" descr="eye_slate.png"/>
-          <p:cNvPicPr>
-            <a:picLocks noChangeAspect="1"/>
-          </p:cNvPicPr>
-          <p:nvPr/>
-        </p:nvPicPr>
-        <p:blipFill>
-          <a:blip r:embed="rId4"/>
-          <a:stretch>
-            <a:fillRect/>
-          </a:stretch>
-        </p:blipFill>
-        <p:spPr>
-          <a:xfrm>
-            <a:off x="8843619" y="3108960"/>
-            <a:ext cx="475488" cy="475488"/>
-          </a:xfrm>
-          <a:prstGeom prst="rect">
-            <a:avLst/>
-          </a:prstGeom>
-        </p:spPr>
-      </p:pic>
-      <p:sp>
-        <p:nvSpPr>
-          <p:cNvPr id="28" name="TextBox 27"/>
-          <p:cNvSpPr txBox="1"/>
-          <p:nvPr/>
-        </p:nvSpPr>
-        <p:spPr>
-          <a:xfrm>
-            <a:off x="7050024" y="3721608"/>
-            <a:ext cx="4062679" cy="1536192"/>
-          </a:xfrm>
-          <a:prstGeom prst="rect">
-            <a:avLst/>
-          </a:prstGeom>
-          <a:noFill/>
-        </p:spPr>
-        <p:txBody>
-          <a:bodyPr wrap="square" anchor="t" lIns="0" rIns="0" tIns="0" bIns="0">
-            <a:spAutoFit/>
-          </a:bodyPr>
-          <a:lstStyle/>
-          <a:p>
-            <a:pPr algn="l">
-              <a:lnSpc>
-                <a:spcPct val="120000"/>
-              </a:lnSpc>
-              <a:spcBef>
-                <a:spcPts val="0"/>
-              </a:spcBef>
-              <a:spcAft>
-                <a:spcPts val="0"/>
-              </a:spcAft>
-            </a:pPr>
-            <a:r>
-              <a:rPr sz="950" b="0">
-                <a:solidFill>
-                  <a:srgbClr val="8A9099"/>
-                </a:solidFill>
-                <a:latin typeface="Red Hat Text"/>
-              </a:rPr>
-              <a:t>A two-track panel for the same log4shell jar. TOP track "source scan (Trivy)" reads `pom.xml`, finds nothing, stamped green "CLEAN — not declared here." BOTTOM track "image scan (RHACS)" reads the assembled image layers, finds `log4j-core` inside a layer, stamped red "CVE-2021-44228 CRITICAL." A brace joining them labelled "defense in depth — the second layer catches what the first can't see."</a:t>
-            </a:r>
-          </a:p>
-        </p:txBody>
-      </p:sp>
       <p:cxnSp>
         <p:nvCxnSpPr>
-          <p:cNvPr id="29" name="Connector 28"/>
+          <p:cNvPr id="30" name="Connector 29"/>
           <p:cNvCxnSpPr/>
           <p:nvPr/>
         </p:nvCxnSpPr>
@@ -10294,7 +10226,7 @@
       </p:cxnSp>
       <p:sp>
         <p:nvSpPr>
-          <p:cNvPr id="30" name="TextBox 29"/>
+          <p:cNvPr id="31" name="TextBox 30"/>
           <p:cNvSpPr txBox="1"/>
           <p:nvPr/>
         </p:nvSpPr>
@@ -10339,7 +10271,7 @@
       </p:sp>
       <p:sp>
         <p:nvSpPr>
-          <p:cNvPr id="31" name="TextBox 30"/>
+          <p:cNvPr id="32" name="TextBox 31"/>
           <p:cNvSpPr txBox="1"/>
           <p:nvPr/>
         </p:nvSpPr>
@@ -10604,11 +10536,11 @@
         <p:spPr>
           <a:xfrm>
             <a:off x="841248" y="2670048"/>
-            <a:ext cx="5715000" cy="438912"/>
+            <a:ext cx="5138928" cy="786384"/>
           </a:xfrm>
           <a:prstGeom prst="roundRect">
             <a:avLst>
-              <a:gd name="adj" fmla="val 6000"/>
+              <a:gd name="adj" fmla="val 7000"/>
             </a:avLst>
           </a:prstGeom>
           <a:solidFill>
@@ -10643,9 +10575,55 @@
           </a:p>
         </p:txBody>
       </p:sp>
+      <p:sp>
+        <p:nvSpPr>
+          <p:cNvPr id="8" name="Rounded Rectangle 7"/>
+          <p:cNvSpPr/>
+          <p:nvPr/>
+        </p:nvSpPr>
+        <p:spPr>
+          <a:xfrm>
+            <a:off x="987552" y="2807208"/>
+            <a:ext cx="512064" cy="512064"/>
+          </a:xfrm>
+          <a:prstGeom prst="roundRect">
+            <a:avLst>
+              <a:gd name="adj" fmla="val 26000"/>
+            </a:avLst>
+          </a:prstGeom>
+          <a:solidFill>
+            <a:srgbClr val="EE0000"/>
+          </a:solidFill>
+          <a:ln>
+            <a:noFill/>
+          </a:ln>
+          <a:effectLst/>
+        </p:spPr>
+        <p:style>
+          <a:lnRef idx="1">
+            <a:schemeClr val="accent1"/>
+          </a:lnRef>
+          <a:fillRef idx="3">
+            <a:schemeClr val="accent1"/>
+          </a:fillRef>
+          <a:effectRef idx="2">
+            <a:schemeClr val="accent1"/>
+          </a:effectRef>
+          <a:fontRef idx="minor">
+            <a:schemeClr val="lt1"/>
+          </a:fontRef>
+        </p:style>
+        <p:txBody>
+          <a:bodyPr rtlCol="0" anchor="ctr"/>
+          <a:lstStyle/>
+          <a:p>
+            <a:pPr algn="ctr"/>
+          </a:p>
+        </p:txBody>
+      </p:sp>
       <p:pic>
         <p:nvPicPr>
-          <p:cNvPr id="8" name="Picture 7" descr="check_steel.png"/>
+          <p:cNvPr id="9" name="Picture 8" descr="check_white.png"/>
           <p:cNvPicPr>
             <a:picLocks noChangeAspect="1"/>
           </p:cNvPicPr>
@@ -10659,8 +10637,8 @@
         </p:blipFill>
         <p:spPr>
           <a:xfrm>
-            <a:off x="987552" y="2770632"/>
-            <a:ext cx="237744" cy="237744"/>
+            <a:off x="1110447" y="2930103"/>
+            <a:ext cx="266273" cy="266273"/>
           </a:xfrm>
           <a:prstGeom prst="rect">
             <a:avLst/>
@@ -10669,14 +10647,14 @@
       </p:pic>
       <p:sp>
         <p:nvSpPr>
-          <p:cNvPr id="9" name="TextBox 8"/>
+          <p:cNvPr id="10" name="TextBox 9"/>
           <p:cNvSpPr txBox="1"/>
           <p:nvPr/>
         </p:nvSpPr>
         <p:spPr>
           <a:xfrm>
-            <a:off x="1353312" y="2670048"/>
-            <a:ext cx="5029200" cy="438912"/>
+            <a:off x="1627632" y="2670048"/>
+            <a:ext cx="4206240" cy="786384"/>
           </a:xfrm>
           <a:prstGeom prst="rect">
             <a:avLst/>
@@ -10701,7 +10679,7 @@
               </a:spcAft>
             </a:pPr>
             <a:r>
-              <a:rPr sz="1200" b="0">
+              <a:rPr sz="1150" b="0">
                 <a:solidFill>
                   <a:srgbClr val="1A1A1A"/>
                 </a:solidFill>
@@ -10714,18 +10692,18 @@
       </p:sp>
       <p:sp>
         <p:nvSpPr>
-          <p:cNvPr id="10" name="Rounded Rectangle 9"/>
+          <p:cNvPr id="11" name="Rounded Rectangle 10"/>
           <p:cNvSpPr/>
           <p:nvPr/>
         </p:nvSpPr>
         <p:spPr>
           <a:xfrm>
-            <a:off x="841248" y="3182112"/>
-            <a:ext cx="5715000" cy="438912"/>
+            <a:off x="6254496" y="2670048"/>
+            <a:ext cx="5138928" cy="786384"/>
           </a:xfrm>
           <a:prstGeom prst="roundRect">
             <a:avLst>
-              <a:gd name="adj" fmla="val 6000"/>
+              <a:gd name="adj" fmla="val 7000"/>
             </a:avLst>
           </a:prstGeom>
           <a:solidFill>
@@ -10760,9 +10738,55 @@
           </a:p>
         </p:txBody>
       </p:sp>
+      <p:sp>
+        <p:nvSpPr>
+          <p:cNvPr id="12" name="Rounded Rectangle 11"/>
+          <p:cNvSpPr/>
+          <p:nvPr/>
+        </p:nvSpPr>
+        <p:spPr>
+          <a:xfrm>
+            <a:off x="6400800" y="2807208"/>
+            <a:ext cx="512064" cy="512064"/>
+          </a:xfrm>
+          <a:prstGeom prst="roundRect">
+            <a:avLst>
+              <a:gd name="adj" fmla="val 26000"/>
+            </a:avLst>
+          </a:prstGeom>
+          <a:solidFill>
+            <a:srgbClr val="EE0000"/>
+          </a:solidFill>
+          <a:ln>
+            <a:noFill/>
+          </a:ln>
+          <a:effectLst/>
+        </p:spPr>
+        <p:style>
+          <a:lnRef idx="1">
+            <a:schemeClr val="accent1"/>
+          </a:lnRef>
+          <a:fillRef idx="3">
+            <a:schemeClr val="accent1"/>
+          </a:fillRef>
+          <a:effectRef idx="2">
+            <a:schemeClr val="accent1"/>
+          </a:effectRef>
+          <a:fontRef idx="minor">
+            <a:schemeClr val="lt1"/>
+          </a:fontRef>
+        </p:style>
+        <p:txBody>
+          <a:bodyPr rtlCol="0" anchor="ctr"/>
+          <a:lstStyle/>
+          <a:p>
+            <a:pPr algn="ctr"/>
+          </a:p>
+        </p:txBody>
+      </p:sp>
       <p:pic>
         <p:nvPicPr>
-          <p:cNvPr id="11" name="Picture 10" descr="check_steel.png"/>
+          <p:cNvPr id="13" name="Picture 12" descr="check_white.png"/>
           <p:cNvPicPr>
             <a:picLocks noChangeAspect="1"/>
           </p:cNvPicPr>
@@ -10776,8 +10800,8 @@
         </p:blipFill>
         <p:spPr>
           <a:xfrm>
-            <a:off x="987552" y="3282696"/>
-            <a:ext cx="237744" cy="237744"/>
+            <a:off x="6523695" y="2930103"/>
+            <a:ext cx="266273" cy="266273"/>
           </a:xfrm>
           <a:prstGeom prst="rect">
             <a:avLst/>
@@ -10786,14 +10810,14 @@
       </p:pic>
       <p:sp>
         <p:nvSpPr>
-          <p:cNvPr id="12" name="TextBox 11"/>
+          <p:cNvPr id="14" name="TextBox 13"/>
           <p:cNvSpPr txBox="1"/>
           <p:nvPr/>
         </p:nvSpPr>
         <p:spPr>
           <a:xfrm>
-            <a:off x="1353312" y="3182112"/>
-            <a:ext cx="5029200" cy="438912"/>
+            <a:off x="7040880" y="2670048"/>
+            <a:ext cx="4206240" cy="786384"/>
           </a:xfrm>
           <a:prstGeom prst="rect">
             <a:avLst/>
@@ -10818,7 +10842,7 @@
               </a:spcAft>
             </a:pPr>
             <a:r>
-              <a:rPr sz="1200" b="0">
+              <a:rPr sz="1150" b="0">
                 <a:solidFill>
                   <a:srgbClr val="1A1A1A"/>
                 </a:solidFill>
@@ -10831,18 +10855,18 @@
       </p:sp>
       <p:sp>
         <p:nvSpPr>
-          <p:cNvPr id="13" name="Rounded Rectangle 12"/>
+          <p:cNvPr id="15" name="Rounded Rectangle 14"/>
           <p:cNvSpPr/>
           <p:nvPr/>
         </p:nvSpPr>
         <p:spPr>
           <a:xfrm>
-            <a:off x="841248" y="3694176"/>
-            <a:ext cx="5715000" cy="438912"/>
+            <a:off x="841248" y="3602736"/>
+            <a:ext cx="5138928" cy="786384"/>
           </a:xfrm>
           <a:prstGeom prst="roundRect">
             <a:avLst>
-              <a:gd name="adj" fmla="val 6000"/>
+              <a:gd name="adj" fmla="val 7000"/>
             </a:avLst>
           </a:prstGeom>
           <a:solidFill>
@@ -10877,9 +10901,55 @@
           </a:p>
         </p:txBody>
       </p:sp>
+      <p:sp>
+        <p:nvSpPr>
+          <p:cNvPr id="16" name="Rounded Rectangle 15"/>
+          <p:cNvSpPr/>
+          <p:nvPr/>
+        </p:nvSpPr>
+        <p:spPr>
+          <a:xfrm>
+            <a:off x="987552" y="3739896"/>
+            <a:ext cx="512064" cy="512064"/>
+          </a:xfrm>
+          <a:prstGeom prst="roundRect">
+            <a:avLst>
+              <a:gd name="adj" fmla="val 26000"/>
+            </a:avLst>
+          </a:prstGeom>
+          <a:solidFill>
+            <a:srgbClr val="EE0000"/>
+          </a:solidFill>
+          <a:ln>
+            <a:noFill/>
+          </a:ln>
+          <a:effectLst/>
+        </p:spPr>
+        <p:style>
+          <a:lnRef idx="1">
+            <a:schemeClr val="accent1"/>
+          </a:lnRef>
+          <a:fillRef idx="3">
+            <a:schemeClr val="accent1"/>
+          </a:fillRef>
+          <a:effectRef idx="2">
+            <a:schemeClr val="accent1"/>
+          </a:effectRef>
+          <a:fontRef idx="minor">
+            <a:schemeClr val="lt1"/>
+          </a:fontRef>
+        </p:style>
+        <p:txBody>
+          <a:bodyPr rtlCol="0" anchor="ctr"/>
+          <a:lstStyle/>
+          <a:p>
+            <a:pPr algn="ctr"/>
+          </a:p>
+        </p:txBody>
+      </p:sp>
       <p:pic>
         <p:nvPicPr>
-          <p:cNvPr id="14" name="Picture 13" descr="check_steel.png"/>
+          <p:cNvPr id="17" name="Picture 16" descr="check_white.png"/>
           <p:cNvPicPr>
             <a:picLocks noChangeAspect="1"/>
           </p:cNvPicPr>
@@ -10893,8 +10963,8 @@
         </p:blipFill>
         <p:spPr>
           <a:xfrm>
-            <a:off x="987552" y="3794760"/>
-            <a:ext cx="237744" cy="237744"/>
+            <a:off x="1110447" y="3862791"/>
+            <a:ext cx="266273" cy="266273"/>
           </a:xfrm>
           <a:prstGeom prst="rect">
             <a:avLst/>
@@ -10903,14 +10973,14 @@
       </p:pic>
       <p:sp>
         <p:nvSpPr>
-          <p:cNvPr id="15" name="TextBox 14"/>
+          <p:cNvPr id="18" name="TextBox 17"/>
           <p:cNvSpPr txBox="1"/>
           <p:nvPr/>
         </p:nvSpPr>
         <p:spPr>
           <a:xfrm>
-            <a:off x="1353312" y="3694176"/>
-            <a:ext cx="5029200" cy="438912"/>
+            <a:off x="1627632" y="3602736"/>
+            <a:ext cx="4206240" cy="786384"/>
           </a:xfrm>
           <a:prstGeom prst="rect">
             <a:avLst/>
@@ -10935,7 +11005,7 @@
               </a:spcAft>
             </a:pPr>
             <a:r>
-              <a:rPr sz="1200" b="0">
+              <a:rPr sz="1150" b="0">
                 <a:solidFill>
                   <a:srgbClr val="1A1A1A"/>
                 </a:solidFill>
@@ -10948,18 +11018,18 @@
       </p:sp>
       <p:sp>
         <p:nvSpPr>
-          <p:cNvPr id="16" name="Rounded Rectangle 15"/>
+          <p:cNvPr id="19" name="Rounded Rectangle 18"/>
           <p:cNvSpPr/>
           <p:nvPr/>
         </p:nvSpPr>
         <p:spPr>
           <a:xfrm>
-            <a:off x="841248" y="4206240"/>
-            <a:ext cx="5715000" cy="438912"/>
+            <a:off x="6254496" y="3602736"/>
+            <a:ext cx="5138928" cy="786384"/>
           </a:xfrm>
           <a:prstGeom prst="roundRect">
             <a:avLst>
-              <a:gd name="adj" fmla="val 6000"/>
+              <a:gd name="adj" fmla="val 7000"/>
             </a:avLst>
           </a:prstGeom>
           <a:solidFill>
@@ -10994,9 +11064,55 @@
           </a:p>
         </p:txBody>
       </p:sp>
+      <p:sp>
+        <p:nvSpPr>
+          <p:cNvPr id="20" name="Rounded Rectangle 19"/>
+          <p:cNvSpPr/>
+          <p:nvPr/>
+        </p:nvSpPr>
+        <p:spPr>
+          <a:xfrm>
+            <a:off x="6400800" y="3739896"/>
+            <a:ext cx="512064" cy="512064"/>
+          </a:xfrm>
+          <a:prstGeom prst="roundRect">
+            <a:avLst>
+              <a:gd name="adj" fmla="val 26000"/>
+            </a:avLst>
+          </a:prstGeom>
+          <a:solidFill>
+            <a:srgbClr val="EE0000"/>
+          </a:solidFill>
+          <a:ln>
+            <a:noFill/>
+          </a:ln>
+          <a:effectLst/>
+        </p:spPr>
+        <p:style>
+          <a:lnRef idx="1">
+            <a:schemeClr val="accent1"/>
+          </a:lnRef>
+          <a:fillRef idx="3">
+            <a:schemeClr val="accent1"/>
+          </a:fillRef>
+          <a:effectRef idx="2">
+            <a:schemeClr val="accent1"/>
+          </a:effectRef>
+          <a:fontRef idx="minor">
+            <a:schemeClr val="lt1"/>
+          </a:fontRef>
+        </p:style>
+        <p:txBody>
+          <a:bodyPr rtlCol="0" anchor="ctr"/>
+          <a:lstStyle/>
+          <a:p>
+            <a:pPr algn="ctr"/>
+          </a:p>
+        </p:txBody>
+      </p:sp>
       <p:pic>
         <p:nvPicPr>
-          <p:cNvPr id="17" name="Picture 16" descr="check_steel.png"/>
+          <p:cNvPr id="21" name="Picture 20" descr="check_white.png"/>
           <p:cNvPicPr>
             <a:picLocks noChangeAspect="1"/>
           </p:cNvPicPr>
@@ -11010,8 +11126,8 @@
         </p:blipFill>
         <p:spPr>
           <a:xfrm>
-            <a:off x="987552" y="4306824"/>
-            <a:ext cx="237744" cy="237744"/>
+            <a:off x="6523695" y="3862791"/>
+            <a:ext cx="266273" cy="266273"/>
           </a:xfrm>
           <a:prstGeom prst="rect">
             <a:avLst/>
@@ -11020,14 +11136,14 @@
       </p:pic>
       <p:sp>
         <p:nvSpPr>
-          <p:cNvPr id="18" name="TextBox 17"/>
+          <p:cNvPr id="22" name="TextBox 21"/>
           <p:cNvSpPr txBox="1"/>
           <p:nvPr/>
         </p:nvSpPr>
         <p:spPr>
           <a:xfrm>
-            <a:off x="1353312" y="4206240"/>
-            <a:ext cx="5029200" cy="438912"/>
+            <a:off x="7040880" y="3602736"/>
+            <a:ext cx="4206240" cy="786384"/>
           </a:xfrm>
           <a:prstGeom prst="rect">
             <a:avLst/>
@@ -11052,7 +11168,7 @@
               </a:spcAft>
             </a:pPr>
             <a:r>
-              <a:rPr sz="1200" b="0">
+              <a:rPr sz="1150" b="0">
                 <a:solidFill>
                   <a:srgbClr val="1A1A1A"/>
                 </a:solidFill>
@@ -11065,18 +11181,18 @@
       </p:sp>
       <p:sp>
         <p:nvSpPr>
-          <p:cNvPr id="19" name="Rounded Rectangle 18"/>
+          <p:cNvPr id="23" name="Rounded Rectangle 22"/>
           <p:cNvSpPr/>
           <p:nvPr/>
         </p:nvSpPr>
         <p:spPr>
           <a:xfrm>
-            <a:off x="841248" y="4718304"/>
-            <a:ext cx="5715000" cy="438912"/>
+            <a:off x="841248" y="4535424"/>
+            <a:ext cx="5138928" cy="786384"/>
           </a:xfrm>
           <a:prstGeom prst="roundRect">
             <a:avLst>
-              <a:gd name="adj" fmla="val 6000"/>
+              <a:gd name="adj" fmla="val 7000"/>
             </a:avLst>
           </a:prstGeom>
           <a:solidFill>
@@ -11111,9 +11227,55 @@
           </a:p>
         </p:txBody>
       </p:sp>
+      <p:sp>
+        <p:nvSpPr>
+          <p:cNvPr id="24" name="Rounded Rectangle 23"/>
+          <p:cNvSpPr/>
+          <p:nvPr/>
+        </p:nvSpPr>
+        <p:spPr>
+          <a:xfrm>
+            <a:off x="987552" y="4672584"/>
+            <a:ext cx="512064" cy="512064"/>
+          </a:xfrm>
+          <a:prstGeom prst="roundRect">
+            <a:avLst>
+              <a:gd name="adj" fmla="val 26000"/>
+            </a:avLst>
+          </a:prstGeom>
+          <a:solidFill>
+            <a:srgbClr val="EE0000"/>
+          </a:solidFill>
+          <a:ln>
+            <a:noFill/>
+          </a:ln>
+          <a:effectLst/>
+        </p:spPr>
+        <p:style>
+          <a:lnRef idx="1">
+            <a:schemeClr val="accent1"/>
+          </a:lnRef>
+          <a:fillRef idx="3">
+            <a:schemeClr val="accent1"/>
+          </a:fillRef>
+          <a:effectRef idx="2">
+            <a:schemeClr val="accent1"/>
+          </a:effectRef>
+          <a:fontRef idx="minor">
+            <a:schemeClr val="lt1"/>
+          </a:fontRef>
+        </p:style>
+        <p:txBody>
+          <a:bodyPr rtlCol="0" anchor="ctr"/>
+          <a:lstStyle/>
+          <a:p>
+            <a:pPr algn="ctr"/>
+          </a:p>
+        </p:txBody>
+      </p:sp>
       <p:pic>
         <p:nvPicPr>
-          <p:cNvPr id="20" name="Picture 19" descr="check_steel.png"/>
+          <p:cNvPr id="25" name="Picture 24" descr="check_white.png"/>
           <p:cNvPicPr>
             <a:picLocks noChangeAspect="1"/>
           </p:cNvPicPr>
@@ -11127,8 +11289,8 @@
         </p:blipFill>
         <p:spPr>
           <a:xfrm>
-            <a:off x="987552" y="4818888"/>
-            <a:ext cx="237744" cy="237744"/>
+            <a:off x="1110447" y="4795479"/>
+            <a:ext cx="266273" cy="266273"/>
           </a:xfrm>
           <a:prstGeom prst="rect">
             <a:avLst/>
@@ -11137,14 +11299,14 @@
       </p:pic>
       <p:sp>
         <p:nvSpPr>
-          <p:cNvPr id="21" name="TextBox 20"/>
+          <p:cNvPr id="26" name="TextBox 25"/>
           <p:cNvSpPr txBox="1"/>
           <p:nvPr/>
         </p:nvSpPr>
         <p:spPr>
           <a:xfrm>
-            <a:off x="1353312" y="4718304"/>
-            <a:ext cx="5029200" cy="438912"/>
+            <a:off x="1627632" y="4535424"/>
+            <a:ext cx="4206240" cy="786384"/>
           </a:xfrm>
           <a:prstGeom prst="rect">
             <a:avLst/>
@@ -11169,7 +11331,7 @@
               </a:spcAft>
             </a:pPr>
             <a:r>
-              <a:rPr sz="1200" b="0">
+              <a:rPr sz="1150" b="0">
                 <a:solidFill>
                   <a:srgbClr val="1A1A1A"/>
                 </a:solidFill>
@@ -11182,18 +11344,18 @@
       </p:sp>
       <p:sp>
         <p:nvSpPr>
-          <p:cNvPr id="22" name="Rounded Rectangle 21"/>
+          <p:cNvPr id="27" name="Rounded Rectangle 26"/>
           <p:cNvSpPr/>
           <p:nvPr/>
         </p:nvSpPr>
         <p:spPr>
           <a:xfrm>
-            <a:off x="841248" y="5230368"/>
-            <a:ext cx="5715000" cy="438912"/>
+            <a:off x="6254496" y="4535424"/>
+            <a:ext cx="5138928" cy="786384"/>
           </a:xfrm>
           <a:prstGeom prst="roundRect">
             <a:avLst>
-              <a:gd name="adj" fmla="val 6000"/>
+              <a:gd name="adj" fmla="val 7000"/>
             </a:avLst>
           </a:prstGeom>
           <a:solidFill>
@@ -11228,9 +11390,55 @@
           </a:p>
         </p:txBody>
       </p:sp>
+      <p:sp>
+        <p:nvSpPr>
+          <p:cNvPr id="28" name="Rounded Rectangle 27"/>
+          <p:cNvSpPr/>
+          <p:nvPr/>
+        </p:nvSpPr>
+        <p:spPr>
+          <a:xfrm>
+            <a:off x="6400800" y="4672584"/>
+            <a:ext cx="512064" cy="512064"/>
+          </a:xfrm>
+          <a:prstGeom prst="roundRect">
+            <a:avLst>
+              <a:gd name="adj" fmla="val 26000"/>
+            </a:avLst>
+          </a:prstGeom>
+          <a:solidFill>
+            <a:srgbClr val="EE0000"/>
+          </a:solidFill>
+          <a:ln>
+            <a:noFill/>
+          </a:ln>
+          <a:effectLst/>
+        </p:spPr>
+        <p:style>
+          <a:lnRef idx="1">
+            <a:schemeClr val="accent1"/>
+          </a:lnRef>
+          <a:fillRef idx="3">
+            <a:schemeClr val="accent1"/>
+          </a:fillRef>
+          <a:effectRef idx="2">
+            <a:schemeClr val="accent1"/>
+          </a:effectRef>
+          <a:fontRef idx="minor">
+            <a:schemeClr val="lt1"/>
+          </a:fontRef>
+        </p:style>
+        <p:txBody>
+          <a:bodyPr rtlCol="0" anchor="ctr"/>
+          <a:lstStyle/>
+          <a:p>
+            <a:pPr algn="ctr"/>
+          </a:p>
+        </p:txBody>
+      </p:sp>
       <p:pic>
         <p:nvPicPr>
-          <p:cNvPr id="23" name="Picture 22" descr="check_steel.png"/>
+          <p:cNvPr id="29" name="Picture 28" descr="check_white.png"/>
           <p:cNvPicPr>
             <a:picLocks noChangeAspect="1"/>
           </p:cNvPicPr>
@@ -11244,8 +11452,8 @@
         </p:blipFill>
         <p:spPr>
           <a:xfrm>
-            <a:off x="987552" y="5330952"/>
-            <a:ext cx="237744" cy="237744"/>
+            <a:off x="6523695" y="4795479"/>
+            <a:ext cx="266273" cy="266273"/>
           </a:xfrm>
           <a:prstGeom prst="rect">
             <a:avLst/>
@@ -11254,14 +11462,14 @@
       </p:pic>
       <p:sp>
         <p:nvSpPr>
-          <p:cNvPr id="24" name="TextBox 23"/>
+          <p:cNvPr id="30" name="TextBox 29"/>
           <p:cNvSpPr txBox="1"/>
           <p:nvPr/>
         </p:nvSpPr>
         <p:spPr>
           <a:xfrm>
-            <a:off x="1353312" y="5230368"/>
-            <a:ext cx="5029200" cy="438912"/>
+            <a:off x="7040880" y="4535424"/>
+            <a:ext cx="4206240" cy="786384"/>
           </a:xfrm>
           <a:prstGeom prst="rect">
             <a:avLst/>
@@ -11286,7 +11494,7 @@
               </a:spcAft>
             </a:pPr>
             <a:r>
-              <a:rPr sz="1200" b="0">
+              <a:rPr sz="1150" b="0">
                 <a:solidFill>
                   <a:srgbClr val="1A1A1A"/>
                 </a:solidFill>
@@ -11297,217 +11505,9 @@
           </a:p>
         </p:txBody>
       </p:sp>
-      <p:sp>
-        <p:nvSpPr>
-          <p:cNvPr id="25" name="Rounded Rectangle 24"/>
-          <p:cNvSpPr/>
-          <p:nvPr/>
-        </p:nvSpPr>
-        <p:spPr>
-          <a:xfrm>
-            <a:off x="6812280" y="2670048"/>
-            <a:ext cx="4538167" cy="2999232"/>
-          </a:xfrm>
-          <a:prstGeom prst="roundRect">
-            <a:avLst>
-              <a:gd name="adj" fmla="val 4000"/>
-            </a:avLst>
-          </a:prstGeom>
-          <a:solidFill>
-            <a:srgbClr val="FFFFFF"/>
-          </a:solidFill>
-          <a:ln w="15240">
-            <a:solidFill>
-              <a:srgbClr val="DDE1E6"/>
-            </a:solidFill>
-          </a:ln>
-          <a:effectLst/>
-        </p:spPr>
-        <p:style>
-          <a:lnRef idx="1">
-            <a:schemeClr val="accent1"/>
-          </a:lnRef>
-          <a:fillRef idx="3">
-            <a:schemeClr val="accent1"/>
-          </a:fillRef>
-          <a:effectRef idx="2">
-            <a:schemeClr val="accent1"/>
-          </a:effectRef>
-          <a:fontRef idx="minor">
-            <a:schemeClr val="lt1"/>
-          </a:fontRef>
-        </p:style>
-        <p:txBody>
-          <a:bodyPr rtlCol="0" anchor="ctr"/>
-          <a:lstStyle/>
-          <a:p>
-            <a:pPr algn="ctr"/>
-          </a:p>
-        </p:txBody>
-      </p:sp>
-      <p:sp>
-        <p:nvSpPr>
-          <p:cNvPr id="26" name="Rounded Rectangle 25"/>
-          <p:cNvSpPr/>
-          <p:nvPr/>
-        </p:nvSpPr>
-        <p:spPr>
-          <a:xfrm>
-            <a:off x="7013448" y="2871216"/>
-            <a:ext cx="1298448" cy="310896"/>
-          </a:xfrm>
-          <a:prstGeom prst="roundRect">
-            <a:avLst>
-              <a:gd name="adj" fmla="val 50000"/>
-            </a:avLst>
-          </a:prstGeom>
-          <a:solidFill>
-            <a:srgbClr val="FCECEC"/>
-          </a:solidFill>
-          <a:ln>
-            <a:noFill/>
-          </a:ln>
-          <a:effectLst/>
-        </p:spPr>
-        <p:style>
-          <a:lnRef idx="1">
-            <a:schemeClr val="accent1"/>
-          </a:lnRef>
-          <a:fillRef idx="3">
-            <a:schemeClr val="accent1"/>
-          </a:fillRef>
-          <a:effectRef idx="2">
-            <a:schemeClr val="accent1"/>
-          </a:effectRef>
-          <a:fontRef idx="minor">
-            <a:schemeClr val="lt1"/>
-          </a:fontRef>
-        </p:style>
-        <p:txBody>
-          <a:bodyPr rtlCol="0" anchor="ctr"/>
-          <a:lstStyle/>
-          <a:p>
-            <a:pPr algn="ctr"/>
-          </a:p>
-        </p:txBody>
-      </p:sp>
-      <p:sp>
-        <p:nvSpPr>
-          <p:cNvPr id="27" name="TextBox 26"/>
-          <p:cNvSpPr txBox="1"/>
-          <p:nvPr/>
-        </p:nvSpPr>
-        <p:spPr>
-          <a:xfrm>
-            <a:off x="7013448" y="2871216"/>
-            <a:ext cx="1298448" cy="310896"/>
-          </a:xfrm>
-          <a:prstGeom prst="rect">
-            <a:avLst/>
-          </a:prstGeom>
-          <a:noFill/>
-        </p:spPr>
-        <p:txBody>
-          <a:bodyPr wrap="none" anchor="ctr" lIns="0" rIns="0" tIns="0" bIns="0">
-            <a:spAutoFit/>
-          </a:bodyPr>
-          <a:lstStyle/>
-          <a:p>
-            <a:pPr algn="ctr">
-              <a:lnSpc>
-                <a:spcPct val="106000"/>
-              </a:lnSpc>
-              <a:spcBef>
-                <a:spcPts val="0"/>
-              </a:spcBef>
-              <a:spcAft>
-                <a:spcPts val="0"/>
-              </a:spcAft>
-            </a:pPr>
-            <a:r>
-              <a:rPr sz="850" b="1">
-                <a:solidFill>
-                  <a:srgbClr val="B80000"/>
-                </a:solidFill>
-                <a:latin typeface="Red Hat Display"/>
-              </a:rPr>
-              <a:t>MEDIA PASS</a:t>
-            </a:r>
-          </a:p>
-        </p:txBody>
-      </p:sp>
-      <p:pic>
-        <p:nvPicPr>
-          <p:cNvPr id="28" name="Picture 27" descr="eye_slate.png"/>
-          <p:cNvPicPr>
-            <a:picLocks noChangeAspect="1"/>
-          </p:cNvPicPr>
-          <p:nvPr/>
-        </p:nvPicPr>
-        <p:blipFill>
-          <a:blip r:embed="rId4"/>
-          <a:stretch>
-            <a:fillRect/>
-          </a:stretch>
-        </p:blipFill>
-        <p:spPr>
-          <a:xfrm>
-            <a:off x="8843619" y="3383280"/>
-            <a:ext cx="475488" cy="475488"/>
-          </a:xfrm>
-          <a:prstGeom prst="rect">
-            <a:avLst/>
-          </a:prstGeom>
-        </p:spPr>
-      </p:pic>
-      <p:sp>
-        <p:nvSpPr>
-          <p:cNvPr id="29" name="TextBox 28"/>
-          <p:cNvSpPr txBox="1"/>
-          <p:nvPr/>
-        </p:nvSpPr>
-        <p:spPr>
-          <a:xfrm>
-            <a:off x="7050024" y="3995928"/>
-            <a:ext cx="4062679" cy="1536192"/>
-          </a:xfrm>
-          <a:prstGeom prst="rect">
-            <a:avLst/>
-          </a:prstGeom>
-          <a:noFill/>
-        </p:spPr>
-        <p:txBody>
-          <a:bodyPr wrap="square" anchor="t" lIns="0" rIns="0" tIns="0" bIns="0">
-            <a:spAutoFit/>
-          </a:bodyPr>
-          <a:lstStyle/>
-          <a:p>
-            <a:pPr algn="l">
-              <a:lnSpc>
-                <a:spcPct val="120000"/>
-              </a:lnSpc>
-              <a:spcBef>
-                <a:spcPts val="0"/>
-              </a:spcBef>
-              <a:spcAft>
-                <a:spcPts val="0"/>
-              </a:spcAft>
-            </a:pPr>
-            <a:r>
-              <a:rPr sz="950" b="0">
-                <a:solidFill>
-                  <a:srgbClr val="8A9099"/>
-                </a:solidFill>
-                <a:latin typeface="Red Hat Text"/>
-              </a:rPr>
-              <a:t>A scan result hitting a fork. One path "report only" → a document dropped onto a pile of unread reports, greyed out. The other path "gate" → a red barrier across the pipeline with the PipelineRun halted behind it and a "non-zero exit" chip. Caption: "a gate is a scan with consequences."</a:t>
-            </a:r>
-          </a:p>
-        </p:txBody>
-      </p:sp>
       <p:cxnSp>
         <p:nvCxnSpPr>
-          <p:cNvPr id="30" name="Connector 29"/>
+          <p:cNvPr id="31" name="Connector 30"/>
           <p:cNvCxnSpPr/>
           <p:nvPr/>
         </p:nvCxnSpPr>
@@ -11543,7 +11543,7 @@
       </p:cxnSp>
       <p:sp>
         <p:nvSpPr>
-          <p:cNvPr id="31" name="TextBox 30"/>
+          <p:cNvPr id="32" name="TextBox 31"/>
           <p:cNvSpPr txBox="1"/>
           <p:nvPr/>
         </p:nvSpPr>
@@ -11588,7 +11588,7 @@
       </p:sp>
       <p:sp>
         <p:nvSpPr>
-          <p:cNvPr id="32" name="TextBox 31"/>
+          <p:cNvPr id="33" name="TextBox 32"/>
           <p:cNvSpPr txBox="1"/>
           <p:nvPr/>
         </p:nvSpPr>
@@ -11808,11 +11808,11 @@
         <p:spPr>
           <a:xfrm>
             <a:off x="841248" y="2395728"/>
-            <a:ext cx="5715000" cy="438912"/>
+            <a:ext cx="5138928" cy="786384"/>
           </a:xfrm>
           <a:prstGeom prst="roundRect">
             <a:avLst>
-              <a:gd name="adj" fmla="val 6000"/>
+              <a:gd name="adj" fmla="val 7000"/>
             </a:avLst>
           </a:prstGeom>
           <a:solidFill>
@@ -11847,9 +11847,55 @@
           </a:p>
         </p:txBody>
       </p:sp>
+      <p:sp>
+        <p:nvSpPr>
+          <p:cNvPr id="7" name="Rounded Rectangle 6"/>
+          <p:cNvSpPr/>
+          <p:nvPr/>
+        </p:nvSpPr>
+        <p:spPr>
+          <a:xfrm>
+            <a:off x="987552" y="2532888"/>
+            <a:ext cx="512064" cy="512064"/>
+          </a:xfrm>
+          <a:prstGeom prst="roundRect">
+            <a:avLst>
+              <a:gd name="adj" fmla="val 26000"/>
+            </a:avLst>
+          </a:prstGeom>
+          <a:solidFill>
+            <a:srgbClr val="EE0000"/>
+          </a:solidFill>
+          <a:ln>
+            <a:noFill/>
+          </a:ln>
+          <a:effectLst/>
+        </p:spPr>
+        <p:style>
+          <a:lnRef idx="1">
+            <a:schemeClr val="accent1"/>
+          </a:lnRef>
+          <a:fillRef idx="3">
+            <a:schemeClr val="accent1"/>
+          </a:fillRef>
+          <a:effectRef idx="2">
+            <a:schemeClr val="accent1"/>
+          </a:effectRef>
+          <a:fontRef idx="minor">
+            <a:schemeClr val="lt1"/>
+          </a:fontRef>
+        </p:style>
+        <p:txBody>
+          <a:bodyPr rtlCol="0" anchor="ctr"/>
+          <a:lstStyle/>
+          <a:p>
+            <a:pPr algn="ctr"/>
+          </a:p>
+        </p:txBody>
+      </p:sp>
       <p:pic>
         <p:nvPicPr>
-          <p:cNvPr id="7" name="Picture 6" descr="check_steel.png"/>
+          <p:cNvPr id="8" name="Picture 7" descr="check_white.png"/>
           <p:cNvPicPr>
             <a:picLocks noChangeAspect="1"/>
           </p:cNvPicPr>
@@ -11863,8 +11909,8 @@
         </p:blipFill>
         <p:spPr>
           <a:xfrm>
-            <a:off x="987552" y="2496312"/>
-            <a:ext cx="237744" cy="237744"/>
+            <a:off x="1110447" y="2655783"/>
+            <a:ext cx="266273" cy="266273"/>
           </a:xfrm>
           <a:prstGeom prst="rect">
             <a:avLst/>
@@ -11873,14 +11919,14 @@
       </p:pic>
       <p:sp>
         <p:nvSpPr>
-          <p:cNvPr id="8" name="TextBox 7"/>
+          <p:cNvPr id="9" name="TextBox 8"/>
           <p:cNvSpPr txBox="1"/>
           <p:nvPr/>
         </p:nvSpPr>
         <p:spPr>
           <a:xfrm>
-            <a:off x="1353312" y="2395728"/>
-            <a:ext cx="5029200" cy="438912"/>
+            <a:off x="1627632" y="2395728"/>
+            <a:ext cx="4206240" cy="786384"/>
           </a:xfrm>
           <a:prstGeom prst="rect">
             <a:avLst/>
@@ -11905,7 +11951,7 @@
               </a:spcAft>
             </a:pPr>
             <a:r>
-              <a:rPr sz="1200" b="0">
+              <a:rPr sz="1150" b="0">
                 <a:solidFill>
                   <a:srgbClr val="1A1A1A"/>
                 </a:solidFill>
@@ -11918,18 +11964,18 @@
       </p:sp>
       <p:sp>
         <p:nvSpPr>
-          <p:cNvPr id="9" name="Rounded Rectangle 8"/>
+          <p:cNvPr id="10" name="Rounded Rectangle 9"/>
           <p:cNvSpPr/>
           <p:nvPr/>
         </p:nvSpPr>
         <p:spPr>
           <a:xfrm>
-            <a:off x="841248" y="2907792"/>
-            <a:ext cx="5715000" cy="438912"/>
+            <a:off x="6254496" y="2395728"/>
+            <a:ext cx="5138928" cy="786384"/>
           </a:xfrm>
           <a:prstGeom prst="roundRect">
             <a:avLst>
-              <a:gd name="adj" fmla="val 6000"/>
+              <a:gd name="adj" fmla="val 7000"/>
             </a:avLst>
           </a:prstGeom>
           <a:solidFill>
@@ -11964,9 +12010,55 @@
           </a:p>
         </p:txBody>
       </p:sp>
+      <p:sp>
+        <p:nvSpPr>
+          <p:cNvPr id="11" name="Rounded Rectangle 10"/>
+          <p:cNvSpPr/>
+          <p:nvPr/>
+        </p:nvSpPr>
+        <p:spPr>
+          <a:xfrm>
+            <a:off x="6400800" y="2532888"/>
+            <a:ext cx="512064" cy="512064"/>
+          </a:xfrm>
+          <a:prstGeom prst="roundRect">
+            <a:avLst>
+              <a:gd name="adj" fmla="val 26000"/>
+            </a:avLst>
+          </a:prstGeom>
+          <a:solidFill>
+            <a:srgbClr val="EE0000"/>
+          </a:solidFill>
+          <a:ln>
+            <a:noFill/>
+          </a:ln>
+          <a:effectLst/>
+        </p:spPr>
+        <p:style>
+          <a:lnRef idx="1">
+            <a:schemeClr val="accent1"/>
+          </a:lnRef>
+          <a:fillRef idx="3">
+            <a:schemeClr val="accent1"/>
+          </a:fillRef>
+          <a:effectRef idx="2">
+            <a:schemeClr val="accent1"/>
+          </a:effectRef>
+          <a:fontRef idx="minor">
+            <a:schemeClr val="lt1"/>
+          </a:fontRef>
+        </p:style>
+        <p:txBody>
+          <a:bodyPr rtlCol="0" anchor="ctr"/>
+          <a:lstStyle/>
+          <a:p>
+            <a:pPr algn="ctr"/>
+          </a:p>
+        </p:txBody>
+      </p:sp>
       <p:pic>
         <p:nvPicPr>
-          <p:cNvPr id="10" name="Picture 9" descr="check_steel.png"/>
+          <p:cNvPr id="12" name="Picture 11" descr="check_white.png"/>
           <p:cNvPicPr>
             <a:picLocks noChangeAspect="1"/>
           </p:cNvPicPr>
@@ -11980,8 +12072,8 @@
         </p:blipFill>
         <p:spPr>
           <a:xfrm>
-            <a:off x="987552" y="3008376"/>
-            <a:ext cx="237744" cy="237744"/>
+            <a:off x="6523695" y="2655783"/>
+            <a:ext cx="266273" cy="266273"/>
           </a:xfrm>
           <a:prstGeom prst="rect">
             <a:avLst/>
@@ -11990,14 +12082,14 @@
       </p:pic>
       <p:sp>
         <p:nvSpPr>
-          <p:cNvPr id="11" name="TextBox 10"/>
+          <p:cNvPr id="13" name="TextBox 12"/>
           <p:cNvSpPr txBox="1"/>
           <p:nvPr/>
         </p:nvSpPr>
         <p:spPr>
           <a:xfrm>
-            <a:off x="1353312" y="2907792"/>
-            <a:ext cx="5029200" cy="438912"/>
+            <a:off x="7040880" y="2395728"/>
+            <a:ext cx="4206240" cy="786384"/>
           </a:xfrm>
           <a:prstGeom prst="rect">
             <a:avLst/>
@@ -12022,7 +12114,7 @@
               </a:spcAft>
             </a:pPr>
             <a:r>
-              <a:rPr sz="1200" b="0">
+              <a:rPr sz="1150" b="0">
                 <a:solidFill>
                   <a:srgbClr val="1A1A1A"/>
                 </a:solidFill>
@@ -12035,18 +12127,18 @@
       </p:sp>
       <p:sp>
         <p:nvSpPr>
-          <p:cNvPr id="12" name="Rounded Rectangle 11"/>
+          <p:cNvPr id="14" name="Rounded Rectangle 13"/>
           <p:cNvSpPr/>
           <p:nvPr/>
         </p:nvSpPr>
         <p:spPr>
           <a:xfrm>
-            <a:off x="841248" y="3419856"/>
-            <a:ext cx="5715000" cy="438912"/>
+            <a:off x="841248" y="3328416"/>
+            <a:ext cx="5138928" cy="786384"/>
           </a:xfrm>
           <a:prstGeom prst="roundRect">
             <a:avLst>
-              <a:gd name="adj" fmla="val 6000"/>
+              <a:gd name="adj" fmla="val 7000"/>
             </a:avLst>
           </a:prstGeom>
           <a:solidFill>
@@ -12081,9 +12173,55 @@
           </a:p>
         </p:txBody>
       </p:sp>
+      <p:sp>
+        <p:nvSpPr>
+          <p:cNvPr id="15" name="Rounded Rectangle 14"/>
+          <p:cNvSpPr/>
+          <p:nvPr/>
+        </p:nvSpPr>
+        <p:spPr>
+          <a:xfrm>
+            <a:off x="987552" y="3465576"/>
+            <a:ext cx="512064" cy="512064"/>
+          </a:xfrm>
+          <a:prstGeom prst="roundRect">
+            <a:avLst>
+              <a:gd name="adj" fmla="val 26000"/>
+            </a:avLst>
+          </a:prstGeom>
+          <a:solidFill>
+            <a:srgbClr val="EE0000"/>
+          </a:solidFill>
+          <a:ln>
+            <a:noFill/>
+          </a:ln>
+          <a:effectLst/>
+        </p:spPr>
+        <p:style>
+          <a:lnRef idx="1">
+            <a:schemeClr val="accent1"/>
+          </a:lnRef>
+          <a:fillRef idx="3">
+            <a:schemeClr val="accent1"/>
+          </a:fillRef>
+          <a:effectRef idx="2">
+            <a:schemeClr val="accent1"/>
+          </a:effectRef>
+          <a:fontRef idx="minor">
+            <a:schemeClr val="lt1"/>
+          </a:fontRef>
+        </p:style>
+        <p:txBody>
+          <a:bodyPr rtlCol="0" anchor="ctr"/>
+          <a:lstStyle/>
+          <a:p>
+            <a:pPr algn="ctr"/>
+          </a:p>
+        </p:txBody>
+      </p:sp>
       <p:pic>
         <p:nvPicPr>
-          <p:cNvPr id="13" name="Picture 12" descr="check_steel.png"/>
+          <p:cNvPr id="16" name="Picture 15" descr="check_white.png"/>
           <p:cNvPicPr>
             <a:picLocks noChangeAspect="1"/>
           </p:cNvPicPr>
@@ -12097,8 +12235,8 @@
         </p:blipFill>
         <p:spPr>
           <a:xfrm>
-            <a:off x="987552" y="3520440"/>
-            <a:ext cx="237744" cy="237744"/>
+            <a:off x="1110447" y="3588471"/>
+            <a:ext cx="266273" cy="266273"/>
           </a:xfrm>
           <a:prstGeom prst="rect">
             <a:avLst/>
@@ -12107,14 +12245,14 @@
       </p:pic>
       <p:sp>
         <p:nvSpPr>
-          <p:cNvPr id="14" name="TextBox 13"/>
+          <p:cNvPr id="17" name="TextBox 16"/>
           <p:cNvSpPr txBox="1"/>
           <p:nvPr/>
         </p:nvSpPr>
         <p:spPr>
           <a:xfrm>
-            <a:off x="1353312" y="3419856"/>
-            <a:ext cx="5029200" cy="438912"/>
+            <a:off x="1627632" y="3328416"/>
+            <a:ext cx="4206240" cy="786384"/>
           </a:xfrm>
           <a:prstGeom prst="rect">
             <a:avLst/>
@@ -12139,7 +12277,7 @@
               </a:spcAft>
             </a:pPr>
             <a:r>
-              <a:rPr sz="1200" b="0">
+              <a:rPr sz="1150" b="0">
                 <a:solidFill>
                   <a:srgbClr val="1A1A1A"/>
                 </a:solidFill>
@@ -12152,18 +12290,18 @@
       </p:sp>
       <p:sp>
         <p:nvSpPr>
-          <p:cNvPr id="15" name="Rounded Rectangle 14"/>
+          <p:cNvPr id="18" name="Rounded Rectangle 17"/>
           <p:cNvSpPr/>
           <p:nvPr/>
         </p:nvSpPr>
         <p:spPr>
           <a:xfrm>
-            <a:off x="841248" y="3931920"/>
-            <a:ext cx="5715000" cy="438912"/>
+            <a:off x="6254496" y="3328416"/>
+            <a:ext cx="5138928" cy="786384"/>
           </a:xfrm>
           <a:prstGeom prst="roundRect">
             <a:avLst>
-              <a:gd name="adj" fmla="val 6000"/>
+              <a:gd name="adj" fmla="val 7000"/>
             </a:avLst>
           </a:prstGeom>
           <a:solidFill>
@@ -12198,9 +12336,55 @@
           </a:p>
         </p:txBody>
       </p:sp>
+      <p:sp>
+        <p:nvSpPr>
+          <p:cNvPr id="19" name="Rounded Rectangle 18"/>
+          <p:cNvSpPr/>
+          <p:nvPr/>
+        </p:nvSpPr>
+        <p:spPr>
+          <a:xfrm>
+            <a:off x="6400800" y="3465576"/>
+            <a:ext cx="512064" cy="512064"/>
+          </a:xfrm>
+          <a:prstGeom prst="roundRect">
+            <a:avLst>
+              <a:gd name="adj" fmla="val 26000"/>
+            </a:avLst>
+          </a:prstGeom>
+          <a:solidFill>
+            <a:srgbClr val="EE0000"/>
+          </a:solidFill>
+          <a:ln>
+            <a:noFill/>
+          </a:ln>
+          <a:effectLst/>
+        </p:spPr>
+        <p:style>
+          <a:lnRef idx="1">
+            <a:schemeClr val="accent1"/>
+          </a:lnRef>
+          <a:fillRef idx="3">
+            <a:schemeClr val="accent1"/>
+          </a:fillRef>
+          <a:effectRef idx="2">
+            <a:schemeClr val="accent1"/>
+          </a:effectRef>
+          <a:fontRef idx="minor">
+            <a:schemeClr val="lt1"/>
+          </a:fontRef>
+        </p:style>
+        <p:txBody>
+          <a:bodyPr rtlCol="0" anchor="ctr"/>
+          <a:lstStyle/>
+          <a:p>
+            <a:pPr algn="ctr"/>
+          </a:p>
+        </p:txBody>
+      </p:sp>
       <p:pic>
         <p:nvPicPr>
-          <p:cNvPr id="16" name="Picture 15" descr="check_steel.png"/>
+          <p:cNvPr id="20" name="Picture 19" descr="check_white.png"/>
           <p:cNvPicPr>
             <a:picLocks noChangeAspect="1"/>
           </p:cNvPicPr>
@@ -12214,8 +12398,8 @@
         </p:blipFill>
         <p:spPr>
           <a:xfrm>
-            <a:off x="987552" y="4032504"/>
-            <a:ext cx="237744" cy="237744"/>
+            <a:off x="6523695" y="3588471"/>
+            <a:ext cx="266273" cy="266273"/>
           </a:xfrm>
           <a:prstGeom prst="rect">
             <a:avLst/>
@@ -12224,14 +12408,14 @@
       </p:pic>
       <p:sp>
         <p:nvSpPr>
-          <p:cNvPr id="17" name="TextBox 16"/>
+          <p:cNvPr id="21" name="TextBox 20"/>
           <p:cNvSpPr txBox="1"/>
           <p:nvPr/>
         </p:nvSpPr>
         <p:spPr>
           <a:xfrm>
-            <a:off x="1353312" y="3931920"/>
-            <a:ext cx="5029200" cy="438912"/>
+            <a:off x="7040880" y="3328416"/>
+            <a:ext cx="4206240" cy="786384"/>
           </a:xfrm>
           <a:prstGeom prst="rect">
             <a:avLst/>
@@ -12256,7 +12440,7 @@
               </a:spcAft>
             </a:pPr>
             <a:r>
-              <a:rPr sz="1200" b="0">
+              <a:rPr sz="1150" b="0">
                 <a:solidFill>
                   <a:srgbClr val="1A1A1A"/>
                 </a:solidFill>
@@ -12269,18 +12453,18 @@
       </p:sp>
       <p:sp>
         <p:nvSpPr>
-          <p:cNvPr id="18" name="Rounded Rectangle 17"/>
+          <p:cNvPr id="22" name="Rounded Rectangle 21"/>
           <p:cNvSpPr/>
           <p:nvPr/>
         </p:nvSpPr>
         <p:spPr>
           <a:xfrm>
-            <a:off x="841248" y="4443984"/>
-            <a:ext cx="5715000" cy="438912"/>
+            <a:off x="841248" y="4261104"/>
+            <a:ext cx="5138928" cy="786384"/>
           </a:xfrm>
           <a:prstGeom prst="roundRect">
             <a:avLst>
-              <a:gd name="adj" fmla="val 6000"/>
+              <a:gd name="adj" fmla="val 7000"/>
             </a:avLst>
           </a:prstGeom>
           <a:solidFill>
@@ -12315,9 +12499,55 @@
           </a:p>
         </p:txBody>
       </p:sp>
+      <p:sp>
+        <p:nvSpPr>
+          <p:cNvPr id="23" name="Rounded Rectangle 22"/>
+          <p:cNvSpPr/>
+          <p:nvPr/>
+        </p:nvSpPr>
+        <p:spPr>
+          <a:xfrm>
+            <a:off x="987552" y="4398264"/>
+            <a:ext cx="512064" cy="512064"/>
+          </a:xfrm>
+          <a:prstGeom prst="roundRect">
+            <a:avLst>
+              <a:gd name="adj" fmla="val 26000"/>
+            </a:avLst>
+          </a:prstGeom>
+          <a:solidFill>
+            <a:srgbClr val="EE0000"/>
+          </a:solidFill>
+          <a:ln>
+            <a:noFill/>
+          </a:ln>
+          <a:effectLst/>
+        </p:spPr>
+        <p:style>
+          <a:lnRef idx="1">
+            <a:schemeClr val="accent1"/>
+          </a:lnRef>
+          <a:fillRef idx="3">
+            <a:schemeClr val="accent1"/>
+          </a:fillRef>
+          <a:effectRef idx="2">
+            <a:schemeClr val="accent1"/>
+          </a:effectRef>
+          <a:fontRef idx="minor">
+            <a:schemeClr val="lt1"/>
+          </a:fontRef>
+        </p:style>
+        <p:txBody>
+          <a:bodyPr rtlCol="0" anchor="ctr"/>
+          <a:lstStyle/>
+          <a:p>
+            <a:pPr algn="ctr"/>
+          </a:p>
+        </p:txBody>
+      </p:sp>
       <p:pic>
         <p:nvPicPr>
-          <p:cNvPr id="19" name="Picture 18" descr="check_steel.png"/>
+          <p:cNvPr id="24" name="Picture 23" descr="check_white.png"/>
           <p:cNvPicPr>
             <a:picLocks noChangeAspect="1"/>
           </p:cNvPicPr>
@@ -12331,8 +12561,8 @@
         </p:blipFill>
         <p:spPr>
           <a:xfrm>
-            <a:off x="987552" y="4544568"/>
-            <a:ext cx="237744" cy="237744"/>
+            <a:off x="1110447" y="4521159"/>
+            <a:ext cx="266273" cy="266273"/>
           </a:xfrm>
           <a:prstGeom prst="rect">
             <a:avLst/>
@@ -12341,14 +12571,14 @@
       </p:pic>
       <p:sp>
         <p:nvSpPr>
-          <p:cNvPr id="20" name="TextBox 19"/>
+          <p:cNvPr id="25" name="TextBox 24"/>
           <p:cNvSpPr txBox="1"/>
           <p:nvPr/>
         </p:nvSpPr>
         <p:spPr>
           <a:xfrm>
-            <a:off x="1353312" y="4443984"/>
-            <a:ext cx="5029200" cy="438912"/>
+            <a:off x="1627632" y="4261104"/>
+            <a:ext cx="4206240" cy="786384"/>
           </a:xfrm>
           <a:prstGeom prst="rect">
             <a:avLst/>
@@ -12373,7 +12603,7 @@
               </a:spcAft>
             </a:pPr>
             <a:r>
-              <a:rPr sz="1200" b="0">
+              <a:rPr sz="1150" b="0">
                 <a:solidFill>
                   <a:srgbClr val="1A1A1A"/>
                 </a:solidFill>
@@ -12386,18 +12616,18 @@
       </p:sp>
       <p:sp>
         <p:nvSpPr>
-          <p:cNvPr id="21" name="Rounded Rectangle 20"/>
+          <p:cNvPr id="26" name="Rounded Rectangle 25"/>
           <p:cNvSpPr/>
           <p:nvPr/>
         </p:nvSpPr>
         <p:spPr>
           <a:xfrm>
-            <a:off x="841248" y="4956048"/>
-            <a:ext cx="5715000" cy="438912"/>
+            <a:off x="6254496" y="4261104"/>
+            <a:ext cx="5138928" cy="786384"/>
           </a:xfrm>
           <a:prstGeom prst="roundRect">
             <a:avLst>
-              <a:gd name="adj" fmla="val 6000"/>
+              <a:gd name="adj" fmla="val 7000"/>
             </a:avLst>
           </a:prstGeom>
           <a:solidFill>
@@ -12432,9 +12662,55 @@
           </a:p>
         </p:txBody>
       </p:sp>
+      <p:sp>
+        <p:nvSpPr>
+          <p:cNvPr id="27" name="Rounded Rectangle 26"/>
+          <p:cNvSpPr/>
+          <p:nvPr/>
+        </p:nvSpPr>
+        <p:spPr>
+          <a:xfrm>
+            <a:off x="6400800" y="4398264"/>
+            <a:ext cx="512064" cy="512064"/>
+          </a:xfrm>
+          <a:prstGeom prst="roundRect">
+            <a:avLst>
+              <a:gd name="adj" fmla="val 26000"/>
+            </a:avLst>
+          </a:prstGeom>
+          <a:solidFill>
+            <a:srgbClr val="EE0000"/>
+          </a:solidFill>
+          <a:ln>
+            <a:noFill/>
+          </a:ln>
+          <a:effectLst/>
+        </p:spPr>
+        <p:style>
+          <a:lnRef idx="1">
+            <a:schemeClr val="accent1"/>
+          </a:lnRef>
+          <a:fillRef idx="3">
+            <a:schemeClr val="accent1"/>
+          </a:fillRef>
+          <a:effectRef idx="2">
+            <a:schemeClr val="accent1"/>
+          </a:effectRef>
+          <a:fontRef idx="minor">
+            <a:schemeClr val="lt1"/>
+          </a:fontRef>
+        </p:style>
+        <p:txBody>
+          <a:bodyPr rtlCol="0" anchor="ctr"/>
+          <a:lstStyle/>
+          <a:p>
+            <a:pPr algn="ctr"/>
+          </a:p>
+        </p:txBody>
+      </p:sp>
       <p:pic>
         <p:nvPicPr>
-          <p:cNvPr id="22" name="Picture 21" descr="check_steel.png"/>
+          <p:cNvPr id="28" name="Picture 27" descr="check_white.png"/>
           <p:cNvPicPr>
             <a:picLocks noChangeAspect="1"/>
           </p:cNvPicPr>
@@ -12448,8 +12724,8 @@
         </p:blipFill>
         <p:spPr>
           <a:xfrm>
-            <a:off x="987552" y="5056632"/>
-            <a:ext cx="237744" cy="237744"/>
+            <a:off x="6523695" y="4521159"/>
+            <a:ext cx="266273" cy="266273"/>
           </a:xfrm>
           <a:prstGeom prst="rect">
             <a:avLst/>
@@ -12458,14 +12734,14 @@
       </p:pic>
       <p:sp>
         <p:nvSpPr>
-          <p:cNvPr id="23" name="TextBox 22"/>
+          <p:cNvPr id="29" name="TextBox 28"/>
           <p:cNvSpPr txBox="1"/>
           <p:nvPr/>
         </p:nvSpPr>
         <p:spPr>
           <a:xfrm>
-            <a:off x="1353312" y="4956048"/>
-            <a:ext cx="5029200" cy="438912"/>
+            <a:off x="7040880" y="4261104"/>
+            <a:ext cx="4206240" cy="786384"/>
           </a:xfrm>
           <a:prstGeom prst="rect">
             <a:avLst/>
@@ -12490,7 +12766,7 @@
               </a:spcAft>
             </a:pPr>
             <a:r>
-              <a:rPr sz="1200" b="0">
+              <a:rPr sz="1150" b="0">
                 <a:solidFill>
                   <a:srgbClr val="1A1A1A"/>
                 </a:solidFill>
@@ -12501,217 +12777,9 @@
           </a:p>
         </p:txBody>
       </p:sp>
-      <p:sp>
-        <p:nvSpPr>
-          <p:cNvPr id="24" name="Rounded Rectangle 23"/>
-          <p:cNvSpPr/>
-          <p:nvPr/>
-        </p:nvSpPr>
-        <p:spPr>
-          <a:xfrm>
-            <a:off x="6812280" y="2395728"/>
-            <a:ext cx="4538167" cy="2999232"/>
-          </a:xfrm>
-          <a:prstGeom prst="roundRect">
-            <a:avLst>
-              <a:gd name="adj" fmla="val 4000"/>
-            </a:avLst>
-          </a:prstGeom>
-          <a:solidFill>
-            <a:srgbClr val="FFFFFF"/>
-          </a:solidFill>
-          <a:ln w="15240">
-            <a:solidFill>
-              <a:srgbClr val="DDE1E6"/>
-            </a:solidFill>
-          </a:ln>
-          <a:effectLst/>
-        </p:spPr>
-        <p:style>
-          <a:lnRef idx="1">
-            <a:schemeClr val="accent1"/>
-          </a:lnRef>
-          <a:fillRef idx="3">
-            <a:schemeClr val="accent1"/>
-          </a:fillRef>
-          <a:effectRef idx="2">
-            <a:schemeClr val="accent1"/>
-          </a:effectRef>
-          <a:fontRef idx="minor">
-            <a:schemeClr val="lt1"/>
-          </a:fontRef>
-        </p:style>
-        <p:txBody>
-          <a:bodyPr rtlCol="0" anchor="ctr"/>
-          <a:lstStyle/>
-          <a:p>
-            <a:pPr algn="ctr"/>
-          </a:p>
-        </p:txBody>
-      </p:sp>
-      <p:sp>
-        <p:nvSpPr>
-          <p:cNvPr id="25" name="Rounded Rectangle 24"/>
-          <p:cNvSpPr/>
-          <p:nvPr/>
-        </p:nvSpPr>
-        <p:spPr>
-          <a:xfrm>
-            <a:off x="7013448" y="2596896"/>
-            <a:ext cx="1298448" cy="310896"/>
-          </a:xfrm>
-          <a:prstGeom prst="roundRect">
-            <a:avLst>
-              <a:gd name="adj" fmla="val 50000"/>
-            </a:avLst>
-          </a:prstGeom>
-          <a:solidFill>
-            <a:srgbClr val="FCECEC"/>
-          </a:solidFill>
-          <a:ln>
-            <a:noFill/>
-          </a:ln>
-          <a:effectLst/>
-        </p:spPr>
-        <p:style>
-          <a:lnRef idx="1">
-            <a:schemeClr val="accent1"/>
-          </a:lnRef>
-          <a:fillRef idx="3">
-            <a:schemeClr val="accent1"/>
-          </a:fillRef>
-          <a:effectRef idx="2">
-            <a:schemeClr val="accent1"/>
-          </a:effectRef>
-          <a:fontRef idx="minor">
-            <a:schemeClr val="lt1"/>
-          </a:fontRef>
-        </p:style>
-        <p:txBody>
-          <a:bodyPr rtlCol="0" anchor="ctr"/>
-          <a:lstStyle/>
-          <a:p>
-            <a:pPr algn="ctr"/>
-          </a:p>
-        </p:txBody>
-      </p:sp>
-      <p:sp>
-        <p:nvSpPr>
-          <p:cNvPr id="26" name="TextBox 25"/>
-          <p:cNvSpPr txBox="1"/>
-          <p:nvPr/>
-        </p:nvSpPr>
-        <p:spPr>
-          <a:xfrm>
-            <a:off x="7013448" y="2596896"/>
-            <a:ext cx="1298448" cy="310896"/>
-          </a:xfrm>
-          <a:prstGeom prst="rect">
-            <a:avLst/>
-          </a:prstGeom>
-          <a:noFill/>
-        </p:spPr>
-        <p:txBody>
-          <a:bodyPr wrap="none" anchor="ctr" lIns="0" rIns="0" tIns="0" bIns="0">
-            <a:spAutoFit/>
-          </a:bodyPr>
-          <a:lstStyle/>
-          <a:p>
-            <a:pPr algn="ctr">
-              <a:lnSpc>
-                <a:spcPct val="106000"/>
-              </a:lnSpc>
-              <a:spcBef>
-                <a:spcPts val="0"/>
-              </a:spcBef>
-              <a:spcAft>
-                <a:spcPts val="0"/>
-              </a:spcAft>
-            </a:pPr>
-            <a:r>
-              <a:rPr sz="850" b="1">
-                <a:solidFill>
-                  <a:srgbClr val="B80000"/>
-                </a:solidFill>
-                <a:latin typeface="Red Hat Display"/>
-              </a:rPr>
-              <a:t>MEDIA PASS</a:t>
-            </a:r>
-          </a:p>
-        </p:txBody>
-      </p:sp>
-      <p:pic>
-        <p:nvPicPr>
-          <p:cNvPr id="27" name="Picture 26" descr="eye_slate.png"/>
-          <p:cNvPicPr>
-            <a:picLocks noChangeAspect="1"/>
-          </p:cNvPicPr>
-          <p:nvPr/>
-        </p:nvPicPr>
-        <p:blipFill>
-          <a:blip r:embed="rId4"/>
-          <a:stretch>
-            <a:fillRect/>
-          </a:stretch>
-        </p:blipFill>
-        <p:spPr>
-          <a:xfrm>
-            <a:off x="8843619" y="3108960"/>
-            <a:ext cx="475488" cy="475488"/>
-          </a:xfrm>
-          <a:prstGeom prst="rect">
-            <a:avLst/>
-          </a:prstGeom>
-        </p:spPr>
-      </p:pic>
-      <p:sp>
-        <p:nvSpPr>
-          <p:cNvPr id="28" name="TextBox 27"/>
-          <p:cNvSpPr txBox="1"/>
-          <p:nvPr/>
-        </p:nvSpPr>
-        <p:spPr>
-          <a:xfrm>
-            <a:off x="7050024" y="3721608"/>
-            <a:ext cx="4062679" cy="1536192"/>
-          </a:xfrm>
-          <a:prstGeom prst="rect">
-            <a:avLst/>
-          </a:prstGeom>
-          <a:noFill/>
-        </p:spPr>
-        <p:txBody>
-          <a:bodyPr wrap="square" anchor="t" lIns="0" rIns="0" tIns="0" bIns="0">
-            <a:spAutoFit/>
-          </a:bodyPr>
-          <a:lstStyle/>
-          <a:p>
-            <a:pPr algn="l">
-              <a:lnSpc>
-                <a:spcPct val="120000"/>
-              </a:lnSpc>
-              <a:spcBef>
-                <a:spcPts val="0"/>
-              </a:spcBef>
-              <a:spcAft>
-                <a:spcPts val="0"/>
-              </a:spcAft>
-            </a:pPr>
-            <a:r>
-              <a:rPr sz="950" b="0">
-                <a:solidFill>
-                  <a:srgbClr val="8A9099"/>
-                </a:solidFill>
-                <a:latin typeface="Red Hat Text"/>
-              </a:rPr>
-              <a:t>A five-spoke hub — the red PipelineRun graph in the centre, arrows out to five labelled console cards: "SonarQube dashboard (S2068, file:line)", "Trivy TaskRun log + SBOM", "RHACS Violations (CVE + image)", "roxctl JUnit report", "ZAP WARN/FAIL + HTML report" — and a sixth card "Tekton Results: the red-then-green history."</a:t>
-            </a:r>
-          </a:p>
-        </p:txBody>
-      </p:sp>
       <p:cxnSp>
         <p:nvCxnSpPr>
-          <p:cNvPr id="29" name="Connector 28"/>
+          <p:cNvPr id="30" name="Connector 29"/>
           <p:cNvCxnSpPr/>
           <p:nvPr/>
         </p:nvCxnSpPr>
@@ -12747,7 +12815,7 @@
       </p:cxnSp>
       <p:sp>
         <p:nvSpPr>
-          <p:cNvPr id="30" name="TextBox 29"/>
+          <p:cNvPr id="31" name="TextBox 30"/>
           <p:cNvSpPr txBox="1"/>
           <p:nvPr/>
         </p:nvSpPr>
@@ -12792,7 +12860,7 @@
       </p:sp>
       <p:sp>
         <p:nvSpPr>
-          <p:cNvPr id="31" name="TextBox 30"/>
+          <p:cNvPr id="32" name="TextBox 31"/>
           <p:cNvSpPr txBox="1"/>
           <p:nvPr/>
         </p:nvSpPr>
@@ -13012,11 +13080,11 @@
         <p:spPr>
           <a:xfrm>
             <a:off x="841248" y="2395728"/>
-            <a:ext cx="5715000" cy="438912"/>
+            <a:ext cx="5138928" cy="786384"/>
           </a:xfrm>
           <a:prstGeom prst="roundRect">
             <a:avLst>
-              <a:gd name="adj" fmla="val 6000"/>
+              <a:gd name="adj" fmla="val 7000"/>
             </a:avLst>
           </a:prstGeom>
           <a:solidFill>
@@ -13051,9 +13119,55 @@
           </a:p>
         </p:txBody>
       </p:sp>
+      <p:sp>
+        <p:nvSpPr>
+          <p:cNvPr id="7" name="Rounded Rectangle 6"/>
+          <p:cNvSpPr/>
+          <p:nvPr/>
+        </p:nvSpPr>
+        <p:spPr>
+          <a:xfrm>
+            <a:off x="987552" y="2532888"/>
+            <a:ext cx="512064" cy="512064"/>
+          </a:xfrm>
+          <a:prstGeom prst="roundRect">
+            <a:avLst>
+              <a:gd name="adj" fmla="val 26000"/>
+            </a:avLst>
+          </a:prstGeom>
+          <a:solidFill>
+            <a:srgbClr val="EE0000"/>
+          </a:solidFill>
+          <a:ln>
+            <a:noFill/>
+          </a:ln>
+          <a:effectLst/>
+        </p:spPr>
+        <p:style>
+          <a:lnRef idx="1">
+            <a:schemeClr val="accent1"/>
+          </a:lnRef>
+          <a:fillRef idx="3">
+            <a:schemeClr val="accent1"/>
+          </a:fillRef>
+          <a:effectRef idx="2">
+            <a:schemeClr val="accent1"/>
+          </a:effectRef>
+          <a:fontRef idx="minor">
+            <a:schemeClr val="lt1"/>
+          </a:fontRef>
+        </p:style>
+        <p:txBody>
+          <a:bodyPr rtlCol="0" anchor="ctr"/>
+          <a:lstStyle/>
+          <a:p>
+            <a:pPr algn="ctr"/>
+          </a:p>
+        </p:txBody>
+      </p:sp>
       <p:pic>
         <p:nvPicPr>
-          <p:cNvPr id="7" name="Picture 6" descr="check_steel.png"/>
+          <p:cNvPr id="8" name="Picture 7" descr="check_white.png"/>
           <p:cNvPicPr>
             <a:picLocks noChangeAspect="1"/>
           </p:cNvPicPr>
@@ -13067,8 +13181,8 @@
         </p:blipFill>
         <p:spPr>
           <a:xfrm>
-            <a:off x="987552" y="2496312"/>
-            <a:ext cx="237744" cy="237744"/>
+            <a:off x="1110447" y="2655783"/>
+            <a:ext cx="266273" cy="266273"/>
           </a:xfrm>
           <a:prstGeom prst="rect">
             <a:avLst/>
@@ -13077,14 +13191,14 @@
       </p:pic>
       <p:sp>
         <p:nvSpPr>
-          <p:cNvPr id="8" name="TextBox 7"/>
+          <p:cNvPr id="9" name="TextBox 8"/>
           <p:cNvSpPr txBox="1"/>
           <p:nvPr/>
         </p:nvSpPr>
         <p:spPr>
           <a:xfrm>
-            <a:off x="1353312" y="2395728"/>
-            <a:ext cx="5029200" cy="438912"/>
+            <a:off x="1627632" y="2395728"/>
+            <a:ext cx="4206240" cy="786384"/>
           </a:xfrm>
           <a:prstGeom prst="rect">
             <a:avLst/>
@@ -13109,7 +13223,7 @@
               </a:spcAft>
             </a:pPr>
             <a:r>
-              <a:rPr sz="1200" b="0">
+              <a:rPr sz="1150" b="0">
                 <a:solidFill>
                   <a:srgbClr val="1A1A1A"/>
                 </a:solidFill>
@@ -13122,18 +13236,18 @@
       </p:sp>
       <p:sp>
         <p:nvSpPr>
-          <p:cNvPr id="9" name="Rounded Rectangle 8"/>
+          <p:cNvPr id="10" name="Rounded Rectangle 9"/>
           <p:cNvSpPr/>
           <p:nvPr/>
         </p:nvSpPr>
         <p:spPr>
           <a:xfrm>
-            <a:off x="841248" y="2907792"/>
-            <a:ext cx="5715000" cy="438912"/>
+            <a:off x="6254496" y="2395728"/>
+            <a:ext cx="5138928" cy="786384"/>
           </a:xfrm>
           <a:prstGeom prst="roundRect">
             <a:avLst>
-              <a:gd name="adj" fmla="val 6000"/>
+              <a:gd name="adj" fmla="val 7000"/>
             </a:avLst>
           </a:prstGeom>
           <a:solidFill>
@@ -13168,9 +13282,55 @@
           </a:p>
         </p:txBody>
       </p:sp>
+      <p:sp>
+        <p:nvSpPr>
+          <p:cNvPr id="11" name="Rounded Rectangle 10"/>
+          <p:cNvSpPr/>
+          <p:nvPr/>
+        </p:nvSpPr>
+        <p:spPr>
+          <a:xfrm>
+            <a:off x="6400800" y="2532888"/>
+            <a:ext cx="512064" cy="512064"/>
+          </a:xfrm>
+          <a:prstGeom prst="roundRect">
+            <a:avLst>
+              <a:gd name="adj" fmla="val 26000"/>
+            </a:avLst>
+          </a:prstGeom>
+          <a:solidFill>
+            <a:srgbClr val="EE0000"/>
+          </a:solidFill>
+          <a:ln>
+            <a:noFill/>
+          </a:ln>
+          <a:effectLst/>
+        </p:spPr>
+        <p:style>
+          <a:lnRef idx="1">
+            <a:schemeClr val="accent1"/>
+          </a:lnRef>
+          <a:fillRef idx="3">
+            <a:schemeClr val="accent1"/>
+          </a:fillRef>
+          <a:effectRef idx="2">
+            <a:schemeClr val="accent1"/>
+          </a:effectRef>
+          <a:fontRef idx="minor">
+            <a:schemeClr val="lt1"/>
+          </a:fontRef>
+        </p:style>
+        <p:txBody>
+          <a:bodyPr rtlCol="0" anchor="ctr"/>
+          <a:lstStyle/>
+          <a:p>
+            <a:pPr algn="ctr"/>
+          </a:p>
+        </p:txBody>
+      </p:sp>
       <p:pic>
         <p:nvPicPr>
-          <p:cNvPr id="10" name="Picture 9" descr="check_steel.png"/>
+          <p:cNvPr id="12" name="Picture 11" descr="check_white.png"/>
           <p:cNvPicPr>
             <a:picLocks noChangeAspect="1"/>
           </p:cNvPicPr>
@@ -13184,8 +13344,8 @@
         </p:blipFill>
         <p:spPr>
           <a:xfrm>
-            <a:off x="987552" y="3008376"/>
-            <a:ext cx="237744" cy="237744"/>
+            <a:off x="6523695" y="2655783"/>
+            <a:ext cx="266273" cy="266273"/>
           </a:xfrm>
           <a:prstGeom prst="rect">
             <a:avLst/>
@@ -13194,14 +13354,14 @@
       </p:pic>
       <p:sp>
         <p:nvSpPr>
-          <p:cNvPr id="11" name="TextBox 10"/>
+          <p:cNvPr id="13" name="TextBox 12"/>
           <p:cNvSpPr txBox="1"/>
           <p:nvPr/>
         </p:nvSpPr>
         <p:spPr>
           <a:xfrm>
-            <a:off x="1353312" y="2907792"/>
-            <a:ext cx="5029200" cy="438912"/>
+            <a:off x="7040880" y="2395728"/>
+            <a:ext cx="4206240" cy="786384"/>
           </a:xfrm>
           <a:prstGeom prst="rect">
             <a:avLst/>
@@ -13226,7 +13386,7 @@
               </a:spcAft>
             </a:pPr>
             <a:r>
-              <a:rPr sz="1200" b="0">
+              <a:rPr sz="1150" b="0">
                 <a:solidFill>
                   <a:srgbClr val="1A1A1A"/>
                 </a:solidFill>
@@ -13239,18 +13399,18 @@
       </p:sp>
       <p:sp>
         <p:nvSpPr>
-          <p:cNvPr id="12" name="Rounded Rectangle 11"/>
+          <p:cNvPr id="14" name="Rounded Rectangle 13"/>
           <p:cNvSpPr/>
           <p:nvPr/>
         </p:nvSpPr>
         <p:spPr>
           <a:xfrm>
-            <a:off x="841248" y="3419856"/>
-            <a:ext cx="5715000" cy="438912"/>
+            <a:off x="841248" y="3328416"/>
+            <a:ext cx="5138928" cy="786384"/>
           </a:xfrm>
           <a:prstGeom prst="roundRect">
             <a:avLst>
-              <a:gd name="adj" fmla="val 6000"/>
+              <a:gd name="adj" fmla="val 7000"/>
             </a:avLst>
           </a:prstGeom>
           <a:solidFill>
@@ -13285,9 +13445,55 @@
           </a:p>
         </p:txBody>
       </p:sp>
+      <p:sp>
+        <p:nvSpPr>
+          <p:cNvPr id="15" name="Rounded Rectangle 14"/>
+          <p:cNvSpPr/>
+          <p:nvPr/>
+        </p:nvSpPr>
+        <p:spPr>
+          <a:xfrm>
+            <a:off x="987552" y="3465576"/>
+            <a:ext cx="512064" cy="512064"/>
+          </a:xfrm>
+          <a:prstGeom prst="roundRect">
+            <a:avLst>
+              <a:gd name="adj" fmla="val 26000"/>
+            </a:avLst>
+          </a:prstGeom>
+          <a:solidFill>
+            <a:srgbClr val="EE0000"/>
+          </a:solidFill>
+          <a:ln>
+            <a:noFill/>
+          </a:ln>
+          <a:effectLst/>
+        </p:spPr>
+        <p:style>
+          <a:lnRef idx="1">
+            <a:schemeClr val="accent1"/>
+          </a:lnRef>
+          <a:fillRef idx="3">
+            <a:schemeClr val="accent1"/>
+          </a:fillRef>
+          <a:effectRef idx="2">
+            <a:schemeClr val="accent1"/>
+          </a:effectRef>
+          <a:fontRef idx="minor">
+            <a:schemeClr val="lt1"/>
+          </a:fontRef>
+        </p:style>
+        <p:txBody>
+          <a:bodyPr rtlCol="0" anchor="ctr"/>
+          <a:lstStyle/>
+          <a:p>
+            <a:pPr algn="ctr"/>
+          </a:p>
+        </p:txBody>
+      </p:sp>
       <p:pic>
         <p:nvPicPr>
-          <p:cNvPr id="13" name="Picture 12" descr="check_steel.png"/>
+          <p:cNvPr id="16" name="Picture 15" descr="check_white.png"/>
           <p:cNvPicPr>
             <a:picLocks noChangeAspect="1"/>
           </p:cNvPicPr>
@@ -13301,8 +13507,8 @@
         </p:blipFill>
         <p:spPr>
           <a:xfrm>
-            <a:off x="987552" y="3520440"/>
-            <a:ext cx="237744" cy="237744"/>
+            <a:off x="1110447" y="3588471"/>
+            <a:ext cx="266273" cy="266273"/>
           </a:xfrm>
           <a:prstGeom prst="rect">
             <a:avLst/>
@@ -13311,14 +13517,14 @@
       </p:pic>
       <p:sp>
         <p:nvSpPr>
-          <p:cNvPr id="14" name="TextBox 13"/>
+          <p:cNvPr id="17" name="TextBox 16"/>
           <p:cNvSpPr txBox="1"/>
           <p:nvPr/>
         </p:nvSpPr>
         <p:spPr>
           <a:xfrm>
-            <a:off x="1353312" y="3419856"/>
-            <a:ext cx="5029200" cy="438912"/>
+            <a:off x="1627632" y="3328416"/>
+            <a:ext cx="4206240" cy="786384"/>
           </a:xfrm>
           <a:prstGeom prst="rect">
             <a:avLst/>
@@ -13343,7 +13549,7 @@
               </a:spcAft>
             </a:pPr>
             <a:r>
-              <a:rPr sz="1200" b="0">
+              <a:rPr sz="1150" b="0">
                 <a:solidFill>
                   <a:srgbClr val="1A1A1A"/>
                 </a:solidFill>
@@ -13356,18 +13562,18 @@
       </p:sp>
       <p:sp>
         <p:nvSpPr>
-          <p:cNvPr id="15" name="Rounded Rectangle 14"/>
+          <p:cNvPr id="18" name="Rounded Rectangle 17"/>
           <p:cNvSpPr/>
           <p:nvPr/>
         </p:nvSpPr>
         <p:spPr>
           <a:xfrm>
-            <a:off x="841248" y="3931920"/>
-            <a:ext cx="5715000" cy="438912"/>
+            <a:off x="6254496" y="3328416"/>
+            <a:ext cx="5138928" cy="786384"/>
           </a:xfrm>
           <a:prstGeom prst="roundRect">
             <a:avLst>
-              <a:gd name="adj" fmla="val 6000"/>
+              <a:gd name="adj" fmla="val 7000"/>
             </a:avLst>
           </a:prstGeom>
           <a:solidFill>
@@ -13402,9 +13608,55 @@
           </a:p>
         </p:txBody>
       </p:sp>
+      <p:sp>
+        <p:nvSpPr>
+          <p:cNvPr id="19" name="Rounded Rectangle 18"/>
+          <p:cNvSpPr/>
+          <p:nvPr/>
+        </p:nvSpPr>
+        <p:spPr>
+          <a:xfrm>
+            <a:off x="6400800" y="3465576"/>
+            <a:ext cx="512064" cy="512064"/>
+          </a:xfrm>
+          <a:prstGeom prst="roundRect">
+            <a:avLst>
+              <a:gd name="adj" fmla="val 26000"/>
+            </a:avLst>
+          </a:prstGeom>
+          <a:solidFill>
+            <a:srgbClr val="EE0000"/>
+          </a:solidFill>
+          <a:ln>
+            <a:noFill/>
+          </a:ln>
+          <a:effectLst/>
+        </p:spPr>
+        <p:style>
+          <a:lnRef idx="1">
+            <a:schemeClr val="accent1"/>
+          </a:lnRef>
+          <a:fillRef idx="3">
+            <a:schemeClr val="accent1"/>
+          </a:fillRef>
+          <a:effectRef idx="2">
+            <a:schemeClr val="accent1"/>
+          </a:effectRef>
+          <a:fontRef idx="minor">
+            <a:schemeClr val="lt1"/>
+          </a:fontRef>
+        </p:style>
+        <p:txBody>
+          <a:bodyPr rtlCol="0" anchor="ctr"/>
+          <a:lstStyle/>
+          <a:p>
+            <a:pPr algn="ctr"/>
+          </a:p>
+        </p:txBody>
+      </p:sp>
       <p:pic>
         <p:nvPicPr>
-          <p:cNvPr id="16" name="Picture 15" descr="check_steel.png"/>
+          <p:cNvPr id="20" name="Picture 19" descr="check_white.png"/>
           <p:cNvPicPr>
             <a:picLocks noChangeAspect="1"/>
           </p:cNvPicPr>
@@ -13418,8 +13670,8 @@
         </p:blipFill>
         <p:spPr>
           <a:xfrm>
-            <a:off x="987552" y="4032504"/>
-            <a:ext cx="237744" cy="237744"/>
+            <a:off x="6523695" y="3588471"/>
+            <a:ext cx="266273" cy="266273"/>
           </a:xfrm>
           <a:prstGeom prst="rect">
             <a:avLst/>
@@ -13428,14 +13680,14 @@
       </p:pic>
       <p:sp>
         <p:nvSpPr>
-          <p:cNvPr id="17" name="TextBox 16"/>
+          <p:cNvPr id="21" name="TextBox 20"/>
           <p:cNvSpPr txBox="1"/>
           <p:nvPr/>
         </p:nvSpPr>
         <p:spPr>
           <a:xfrm>
-            <a:off x="1353312" y="3931920"/>
-            <a:ext cx="5029200" cy="438912"/>
+            <a:off x="7040880" y="3328416"/>
+            <a:ext cx="4206240" cy="786384"/>
           </a:xfrm>
           <a:prstGeom prst="rect">
             <a:avLst/>
@@ -13460,7 +13712,7 @@
               </a:spcAft>
             </a:pPr>
             <a:r>
-              <a:rPr sz="1200" b="0">
+              <a:rPr sz="1150" b="0">
                 <a:solidFill>
                   <a:srgbClr val="1A1A1A"/>
                 </a:solidFill>
@@ -13473,18 +13725,18 @@
       </p:sp>
       <p:sp>
         <p:nvSpPr>
-          <p:cNvPr id="18" name="Rounded Rectangle 17"/>
+          <p:cNvPr id="22" name="Rounded Rectangle 21"/>
           <p:cNvSpPr/>
           <p:nvPr/>
         </p:nvSpPr>
         <p:spPr>
           <a:xfrm>
-            <a:off x="841248" y="4443984"/>
-            <a:ext cx="5715000" cy="438912"/>
+            <a:off x="841248" y="4261104"/>
+            <a:ext cx="5138928" cy="786384"/>
           </a:xfrm>
           <a:prstGeom prst="roundRect">
             <a:avLst>
-              <a:gd name="adj" fmla="val 6000"/>
+              <a:gd name="adj" fmla="val 7000"/>
             </a:avLst>
           </a:prstGeom>
           <a:solidFill>
@@ -13519,9 +13771,55 @@
           </a:p>
         </p:txBody>
       </p:sp>
+      <p:sp>
+        <p:nvSpPr>
+          <p:cNvPr id="23" name="Rounded Rectangle 22"/>
+          <p:cNvSpPr/>
+          <p:nvPr/>
+        </p:nvSpPr>
+        <p:spPr>
+          <a:xfrm>
+            <a:off x="987552" y="4398264"/>
+            <a:ext cx="512064" cy="512064"/>
+          </a:xfrm>
+          <a:prstGeom prst="roundRect">
+            <a:avLst>
+              <a:gd name="adj" fmla="val 26000"/>
+            </a:avLst>
+          </a:prstGeom>
+          <a:solidFill>
+            <a:srgbClr val="EE0000"/>
+          </a:solidFill>
+          <a:ln>
+            <a:noFill/>
+          </a:ln>
+          <a:effectLst/>
+        </p:spPr>
+        <p:style>
+          <a:lnRef idx="1">
+            <a:schemeClr val="accent1"/>
+          </a:lnRef>
+          <a:fillRef idx="3">
+            <a:schemeClr val="accent1"/>
+          </a:fillRef>
+          <a:effectRef idx="2">
+            <a:schemeClr val="accent1"/>
+          </a:effectRef>
+          <a:fontRef idx="minor">
+            <a:schemeClr val="lt1"/>
+          </a:fontRef>
+        </p:style>
+        <p:txBody>
+          <a:bodyPr rtlCol="0" anchor="ctr"/>
+          <a:lstStyle/>
+          <a:p>
+            <a:pPr algn="ctr"/>
+          </a:p>
+        </p:txBody>
+      </p:sp>
       <p:pic>
         <p:nvPicPr>
-          <p:cNvPr id="19" name="Picture 18" descr="check_steel.png"/>
+          <p:cNvPr id="24" name="Picture 23" descr="check_white.png"/>
           <p:cNvPicPr>
             <a:picLocks noChangeAspect="1"/>
           </p:cNvPicPr>
@@ -13535,8 +13833,8 @@
         </p:blipFill>
         <p:spPr>
           <a:xfrm>
-            <a:off x="987552" y="4544568"/>
-            <a:ext cx="237744" cy="237744"/>
+            <a:off x="1110447" y="4521159"/>
+            <a:ext cx="266273" cy="266273"/>
           </a:xfrm>
           <a:prstGeom prst="rect">
             <a:avLst/>
@@ -13545,14 +13843,14 @@
       </p:pic>
       <p:sp>
         <p:nvSpPr>
-          <p:cNvPr id="20" name="TextBox 19"/>
+          <p:cNvPr id="25" name="TextBox 24"/>
           <p:cNvSpPr txBox="1"/>
           <p:nvPr/>
         </p:nvSpPr>
         <p:spPr>
           <a:xfrm>
-            <a:off x="1353312" y="4443984"/>
-            <a:ext cx="5029200" cy="438912"/>
+            <a:off x="1627632" y="4261104"/>
+            <a:ext cx="4206240" cy="786384"/>
           </a:xfrm>
           <a:prstGeom prst="rect">
             <a:avLst/>
@@ -13577,7 +13875,7 @@
               </a:spcAft>
             </a:pPr>
             <a:r>
-              <a:rPr sz="1200" b="0">
+              <a:rPr sz="1150" b="0">
                 <a:solidFill>
                   <a:srgbClr val="1A1A1A"/>
                 </a:solidFill>
@@ -13590,18 +13888,18 @@
       </p:sp>
       <p:sp>
         <p:nvSpPr>
-          <p:cNvPr id="21" name="Rounded Rectangle 20"/>
+          <p:cNvPr id="26" name="Rounded Rectangle 25"/>
           <p:cNvSpPr/>
           <p:nvPr/>
         </p:nvSpPr>
         <p:spPr>
           <a:xfrm>
-            <a:off x="841248" y="4956048"/>
-            <a:ext cx="5715000" cy="438912"/>
+            <a:off x="6254496" y="4261104"/>
+            <a:ext cx="5138928" cy="786384"/>
           </a:xfrm>
           <a:prstGeom prst="roundRect">
             <a:avLst>
-              <a:gd name="adj" fmla="val 6000"/>
+              <a:gd name="adj" fmla="val 7000"/>
             </a:avLst>
           </a:prstGeom>
           <a:solidFill>
@@ -13636,9 +13934,55 @@
           </a:p>
         </p:txBody>
       </p:sp>
+      <p:sp>
+        <p:nvSpPr>
+          <p:cNvPr id="27" name="Rounded Rectangle 26"/>
+          <p:cNvSpPr/>
+          <p:nvPr/>
+        </p:nvSpPr>
+        <p:spPr>
+          <a:xfrm>
+            <a:off x="6400800" y="4398264"/>
+            <a:ext cx="512064" cy="512064"/>
+          </a:xfrm>
+          <a:prstGeom prst="roundRect">
+            <a:avLst>
+              <a:gd name="adj" fmla="val 26000"/>
+            </a:avLst>
+          </a:prstGeom>
+          <a:solidFill>
+            <a:srgbClr val="EE0000"/>
+          </a:solidFill>
+          <a:ln>
+            <a:noFill/>
+          </a:ln>
+          <a:effectLst/>
+        </p:spPr>
+        <p:style>
+          <a:lnRef idx="1">
+            <a:schemeClr val="accent1"/>
+          </a:lnRef>
+          <a:fillRef idx="3">
+            <a:schemeClr val="accent1"/>
+          </a:fillRef>
+          <a:effectRef idx="2">
+            <a:schemeClr val="accent1"/>
+          </a:effectRef>
+          <a:fontRef idx="minor">
+            <a:schemeClr val="lt1"/>
+          </a:fontRef>
+        </p:style>
+        <p:txBody>
+          <a:bodyPr rtlCol="0" anchor="ctr"/>
+          <a:lstStyle/>
+          <a:p>
+            <a:pPr algn="ctr"/>
+          </a:p>
+        </p:txBody>
+      </p:sp>
       <p:pic>
         <p:nvPicPr>
-          <p:cNvPr id="22" name="Picture 21" descr="check_steel.png"/>
+          <p:cNvPr id="28" name="Picture 27" descr="check_white.png"/>
           <p:cNvPicPr>
             <a:picLocks noChangeAspect="1"/>
           </p:cNvPicPr>
@@ -13652,8 +13996,8 @@
         </p:blipFill>
         <p:spPr>
           <a:xfrm>
-            <a:off x="987552" y="5056632"/>
-            <a:ext cx="237744" cy="237744"/>
+            <a:off x="6523695" y="4521159"/>
+            <a:ext cx="266273" cy="266273"/>
           </a:xfrm>
           <a:prstGeom prst="rect">
             <a:avLst/>
@@ -13662,14 +14006,14 @@
       </p:pic>
       <p:sp>
         <p:nvSpPr>
-          <p:cNvPr id="23" name="TextBox 22"/>
+          <p:cNvPr id="29" name="TextBox 28"/>
           <p:cNvSpPr txBox="1"/>
           <p:nvPr/>
         </p:nvSpPr>
         <p:spPr>
           <a:xfrm>
-            <a:off x="1353312" y="4956048"/>
-            <a:ext cx="5029200" cy="438912"/>
+            <a:off x="7040880" y="4261104"/>
+            <a:ext cx="4206240" cy="786384"/>
           </a:xfrm>
           <a:prstGeom prst="rect">
             <a:avLst/>
@@ -13694,7 +14038,7 @@
               </a:spcAft>
             </a:pPr>
             <a:r>
-              <a:rPr sz="1200" b="0">
+              <a:rPr sz="1150" b="0">
                 <a:solidFill>
                   <a:srgbClr val="1A1A1A"/>
                 </a:solidFill>
@@ -13705,217 +14049,9 @@
           </a:p>
         </p:txBody>
       </p:sp>
-      <p:sp>
-        <p:nvSpPr>
-          <p:cNvPr id="24" name="Rounded Rectangle 23"/>
-          <p:cNvSpPr/>
-          <p:nvPr/>
-        </p:nvSpPr>
-        <p:spPr>
-          <a:xfrm>
-            <a:off x="6812280" y="2395728"/>
-            <a:ext cx="4538167" cy="2999232"/>
-          </a:xfrm>
-          <a:prstGeom prst="roundRect">
-            <a:avLst>
-              <a:gd name="adj" fmla="val 4000"/>
-            </a:avLst>
-          </a:prstGeom>
-          <a:solidFill>
-            <a:srgbClr val="FFFFFF"/>
-          </a:solidFill>
-          <a:ln w="15240">
-            <a:solidFill>
-              <a:srgbClr val="DDE1E6"/>
-            </a:solidFill>
-          </a:ln>
-          <a:effectLst/>
-        </p:spPr>
-        <p:style>
-          <a:lnRef idx="1">
-            <a:schemeClr val="accent1"/>
-          </a:lnRef>
-          <a:fillRef idx="3">
-            <a:schemeClr val="accent1"/>
-          </a:fillRef>
-          <a:effectRef idx="2">
-            <a:schemeClr val="accent1"/>
-          </a:effectRef>
-          <a:fontRef idx="minor">
-            <a:schemeClr val="lt1"/>
-          </a:fontRef>
-        </p:style>
-        <p:txBody>
-          <a:bodyPr rtlCol="0" anchor="ctr"/>
-          <a:lstStyle/>
-          <a:p>
-            <a:pPr algn="ctr"/>
-          </a:p>
-        </p:txBody>
-      </p:sp>
-      <p:sp>
-        <p:nvSpPr>
-          <p:cNvPr id="25" name="Rounded Rectangle 24"/>
-          <p:cNvSpPr/>
-          <p:nvPr/>
-        </p:nvSpPr>
-        <p:spPr>
-          <a:xfrm>
-            <a:off x="7013448" y="2596896"/>
-            <a:ext cx="1298448" cy="310896"/>
-          </a:xfrm>
-          <a:prstGeom prst="roundRect">
-            <a:avLst>
-              <a:gd name="adj" fmla="val 50000"/>
-            </a:avLst>
-          </a:prstGeom>
-          <a:solidFill>
-            <a:srgbClr val="FCECEC"/>
-          </a:solidFill>
-          <a:ln>
-            <a:noFill/>
-          </a:ln>
-          <a:effectLst/>
-        </p:spPr>
-        <p:style>
-          <a:lnRef idx="1">
-            <a:schemeClr val="accent1"/>
-          </a:lnRef>
-          <a:fillRef idx="3">
-            <a:schemeClr val="accent1"/>
-          </a:fillRef>
-          <a:effectRef idx="2">
-            <a:schemeClr val="accent1"/>
-          </a:effectRef>
-          <a:fontRef idx="minor">
-            <a:schemeClr val="lt1"/>
-          </a:fontRef>
-        </p:style>
-        <p:txBody>
-          <a:bodyPr rtlCol="0" anchor="ctr"/>
-          <a:lstStyle/>
-          <a:p>
-            <a:pPr algn="ctr"/>
-          </a:p>
-        </p:txBody>
-      </p:sp>
-      <p:sp>
-        <p:nvSpPr>
-          <p:cNvPr id="26" name="TextBox 25"/>
-          <p:cNvSpPr txBox="1"/>
-          <p:nvPr/>
-        </p:nvSpPr>
-        <p:spPr>
-          <a:xfrm>
-            <a:off x="7013448" y="2596896"/>
-            <a:ext cx="1298448" cy="310896"/>
-          </a:xfrm>
-          <a:prstGeom prst="rect">
-            <a:avLst/>
-          </a:prstGeom>
-          <a:noFill/>
-        </p:spPr>
-        <p:txBody>
-          <a:bodyPr wrap="none" anchor="ctr" lIns="0" rIns="0" tIns="0" bIns="0">
-            <a:spAutoFit/>
-          </a:bodyPr>
-          <a:lstStyle/>
-          <a:p>
-            <a:pPr algn="ctr">
-              <a:lnSpc>
-                <a:spcPct val="106000"/>
-              </a:lnSpc>
-              <a:spcBef>
-                <a:spcPts val="0"/>
-              </a:spcBef>
-              <a:spcAft>
-                <a:spcPts val="0"/>
-              </a:spcAft>
-            </a:pPr>
-            <a:r>
-              <a:rPr sz="850" b="1">
-                <a:solidFill>
-                  <a:srgbClr val="B80000"/>
-                </a:solidFill>
-                <a:latin typeface="Red Hat Display"/>
-              </a:rPr>
-              <a:t>MEDIA PASS</a:t>
-            </a:r>
-          </a:p>
-        </p:txBody>
-      </p:sp>
-      <p:pic>
-        <p:nvPicPr>
-          <p:cNvPr id="27" name="Picture 26" descr="eye_slate.png"/>
-          <p:cNvPicPr>
-            <a:picLocks noChangeAspect="1"/>
-          </p:cNvPicPr>
-          <p:nvPr/>
-        </p:nvPicPr>
-        <p:blipFill>
-          <a:blip r:embed="rId4"/>
-          <a:stretch>
-            <a:fillRect/>
-          </a:stretch>
-        </p:blipFill>
-        <p:spPr>
-          <a:xfrm>
-            <a:off x="8843619" y="3108960"/>
-            <a:ext cx="475488" cy="475488"/>
-          </a:xfrm>
-          <a:prstGeom prst="rect">
-            <a:avLst/>
-          </a:prstGeom>
-        </p:spPr>
-      </p:pic>
-      <p:sp>
-        <p:nvSpPr>
-          <p:cNvPr id="28" name="TextBox 27"/>
-          <p:cNvSpPr txBox="1"/>
-          <p:nvPr/>
-        </p:nvSpPr>
-        <p:spPr>
-          <a:xfrm>
-            <a:off x="7050024" y="3721608"/>
-            <a:ext cx="4062679" cy="1536192"/>
-          </a:xfrm>
-          <a:prstGeom prst="rect">
-            <a:avLst/>
-          </a:prstGeom>
-          <a:noFill/>
-        </p:spPr>
-        <p:txBody>
-          <a:bodyPr wrap="square" anchor="t" lIns="0" rIns="0" tIns="0" bIns="0">
-            <a:spAutoFit/>
-          </a:bodyPr>
-          <a:lstStyle/>
-          <a:p>
-            <a:pPr algn="l">
-              <a:lnSpc>
-                <a:spcPct val="120000"/>
-              </a:lnSpc>
-              <a:spcBef>
-                <a:spcPts val="0"/>
-              </a:spcBef>
-              <a:spcAft>
-                <a:spcPts val="0"/>
-              </a:spcAft>
-            </a:pPr>
-            <a:r>
-              <a:rPr sz="950" b="0">
-                <a:solidFill>
-                  <a:srgbClr val="8A9099"/>
-                </a:solidFill>
-                <a:latin typeface="Red Hat Text"/>
-              </a:rPr>
-              <a:t>Two rows for the same scanner. TOP "float" — `trivy:latest` with a tag that quietly repoints to a compromised build (red), pulled through a GitHub Action wrapper. BOTTOM "pin" — `trivy@sha256:…` locked to an immutable digest (green), run as a plain container. A small timeline chip in the corner: "Mar 2026 — Trivy Action compromised."</a:t>
-            </a:r>
-          </a:p>
-        </p:txBody>
-      </p:sp>
       <p:cxnSp>
         <p:nvCxnSpPr>
-          <p:cNvPr id="29" name="Connector 28"/>
+          <p:cNvPr id="30" name="Connector 29"/>
           <p:cNvCxnSpPr/>
           <p:nvPr/>
         </p:nvCxnSpPr>
@@ -13951,7 +14087,7 @@
       </p:cxnSp>
       <p:sp>
         <p:nvSpPr>
-          <p:cNvPr id="30" name="TextBox 29"/>
+          <p:cNvPr id="31" name="TextBox 30"/>
           <p:cNvSpPr txBox="1"/>
           <p:nvPr/>
         </p:nvSpPr>
@@ -13996,7 +14132,7 @@
       </p:sp>
       <p:sp>
         <p:nvSpPr>
-          <p:cNvPr id="31" name="TextBox 30"/>
+          <p:cNvPr id="32" name="TextBox 31"/>
           <p:cNvSpPr txBox="1"/>
           <p:nvPr/>
         </p:nvSpPr>
@@ -14261,7 +14397,7 @@
         <p:spPr>
           <a:xfrm>
             <a:off x="841248" y="2670048"/>
-            <a:ext cx="5715000" cy="438912"/>
+            <a:ext cx="4160520" cy="402336"/>
           </a:xfrm>
           <a:prstGeom prst="roundRect">
             <a:avLst>
@@ -14316,8 +14452,8 @@
         </p:blipFill>
         <p:spPr>
           <a:xfrm>
-            <a:off x="987552" y="2770632"/>
-            <a:ext cx="237744" cy="237744"/>
+            <a:off x="969264" y="2770632"/>
+            <a:ext cx="201168" cy="201168"/>
           </a:xfrm>
           <a:prstGeom prst="rect">
             <a:avLst/>
@@ -14332,8 +14468,8 @@
         </p:nvSpPr>
         <p:spPr>
           <a:xfrm>
-            <a:off x="1353312" y="2670048"/>
-            <a:ext cx="5029200" cy="438912"/>
+            <a:off x="1280160" y="2670048"/>
+            <a:ext cx="3593591" cy="402336"/>
           </a:xfrm>
           <a:prstGeom prst="rect">
             <a:avLst/>
@@ -14358,7 +14494,7 @@
               </a:spcAft>
             </a:pPr>
             <a:r>
-              <a:rPr sz="1200" b="0">
+              <a:rPr sz="1050" b="0">
                 <a:solidFill>
                   <a:srgbClr val="1A1A1A"/>
                 </a:solidFill>
@@ -14377,8 +14513,8 @@
         </p:nvSpPr>
         <p:spPr>
           <a:xfrm>
-            <a:off x="841248" y="3182112"/>
-            <a:ext cx="5715000" cy="438912"/>
+            <a:off x="841248" y="3145536"/>
+            <a:ext cx="4160520" cy="402336"/>
           </a:xfrm>
           <a:prstGeom prst="roundRect">
             <a:avLst>
@@ -14433,8 +14569,8 @@
         </p:blipFill>
         <p:spPr>
           <a:xfrm>
-            <a:off x="987552" y="3282696"/>
-            <a:ext cx="237744" cy="237744"/>
+            <a:off x="969264" y="3246120"/>
+            <a:ext cx="201168" cy="201168"/>
           </a:xfrm>
           <a:prstGeom prst="rect">
             <a:avLst/>
@@ -14449,8 +14585,8 @@
         </p:nvSpPr>
         <p:spPr>
           <a:xfrm>
-            <a:off x="1353312" y="3182112"/>
-            <a:ext cx="5029200" cy="438912"/>
+            <a:off x="1280160" y="3145536"/>
+            <a:ext cx="3593591" cy="402336"/>
           </a:xfrm>
           <a:prstGeom prst="rect">
             <a:avLst/>
@@ -14475,7 +14611,7 @@
               </a:spcAft>
             </a:pPr>
             <a:r>
-              <a:rPr sz="1200" b="0">
+              <a:rPr sz="1050" b="0">
                 <a:solidFill>
                   <a:srgbClr val="1A1A1A"/>
                 </a:solidFill>
@@ -14494,8 +14630,8 @@
         </p:nvSpPr>
         <p:spPr>
           <a:xfrm>
-            <a:off x="841248" y="3694176"/>
-            <a:ext cx="5715000" cy="438912"/>
+            <a:off x="841248" y="3621024"/>
+            <a:ext cx="4160520" cy="402336"/>
           </a:xfrm>
           <a:prstGeom prst="roundRect">
             <a:avLst>
@@ -14550,8 +14686,8 @@
         </p:blipFill>
         <p:spPr>
           <a:xfrm>
-            <a:off x="987552" y="3794760"/>
-            <a:ext cx="237744" cy="237744"/>
+            <a:off x="969264" y="3721607"/>
+            <a:ext cx="201168" cy="201168"/>
           </a:xfrm>
           <a:prstGeom prst="rect">
             <a:avLst/>
@@ -14566,8 +14702,8 @@
         </p:nvSpPr>
         <p:spPr>
           <a:xfrm>
-            <a:off x="1353312" y="3694176"/>
-            <a:ext cx="5029200" cy="438912"/>
+            <a:off x="1280160" y="3621024"/>
+            <a:ext cx="3593591" cy="402336"/>
           </a:xfrm>
           <a:prstGeom prst="rect">
             <a:avLst/>
@@ -14592,7 +14728,7 @@
               </a:spcAft>
             </a:pPr>
             <a:r>
-              <a:rPr sz="1200" b="0">
+              <a:rPr sz="1050" b="0">
                 <a:solidFill>
                   <a:srgbClr val="1A1A1A"/>
                 </a:solidFill>
@@ -14611,8 +14747,8 @@
         </p:nvSpPr>
         <p:spPr>
           <a:xfrm>
-            <a:off x="841248" y="4206240"/>
-            <a:ext cx="5715000" cy="438912"/>
+            <a:off x="841248" y="4096512"/>
+            <a:ext cx="4160520" cy="402336"/>
           </a:xfrm>
           <a:prstGeom prst="roundRect">
             <a:avLst>
@@ -14667,8 +14803,8 @@
         </p:blipFill>
         <p:spPr>
           <a:xfrm>
-            <a:off x="987552" y="4306824"/>
-            <a:ext cx="237744" cy="237744"/>
+            <a:off x="969264" y="4197096"/>
+            <a:ext cx="201168" cy="201168"/>
           </a:xfrm>
           <a:prstGeom prst="rect">
             <a:avLst/>
@@ -14683,8 +14819,8 @@
         </p:nvSpPr>
         <p:spPr>
           <a:xfrm>
-            <a:off x="1353312" y="4206240"/>
-            <a:ext cx="5029200" cy="438912"/>
+            <a:off x="1280160" y="4096512"/>
+            <a:ext cx="3593591" cy="402336"/>
           </a:xfrm>
           <a:prstGeom prst="rect">
             <a:avLst/>
@@ -14709,7 +14845,7 @@
               </a:spcAft>
             </a:pPr>
             <a:r>
-              <a:rPr sz="1200" b="0">
+              <a:rPr sz="1050" b="0">
                 <a:solidFill>
                   <a:srgbClr val="1A1A1A"/>
                 </a:solidFill>
@@ -14728,8 +14864,8 @@
         </p:nvSpPr>
         <p:spPr>
           <a:xfrm>
-            <a:off x="841248" y="4718304"/>
-            <a:ext cx="5715000" cy="438912"/>
+            <a:off x="841248" y="4572000"/>
+            <a:ext cx="4160520" cy="402336"/>
           </a:xfrm>
           <a:prstGeom prst="roundRect">
             <a:avLst>
@@ -14784,8 +14920,8 @@
         </p:blipFill>
         <p:spPr>
           <a:xfrm>
-            <a:off x="987552" y="4818888"/>
-            <a:ext cx="237744" cy="237744"/>
+            <a:off x="969264" y="4672583"/>
+            <a:ext cx="201168" cy="201168"/>
           </a:xfrm>
           <a:prstGeom prst="rect">
             <a:avLst/>
@@ -14800,8 +14936,8 @@
         </p:nvSpPr>
         <p:spPr>
           <a:xfrm>
-            <a:off x="1353312" y="4718304"/>
-            <a:ext cx="5029200" cy="438912"/>
+            <a:off x="1280160" y="4572000"/>
+            <a:ext cx="3593591" cy="402336"/>
           </a:xfrm>
           <a:prstGeom prst="rect">
             <a:avLst/>
@@ -14826,7 +14962,7 @@
               </a:spcAft>
             </a:pPr>
             <a:r>
-              <a:rPr sz="1200" b="0">
+              <a:rPr sz="1050" b="0">
                 <a:solidFill>
                   <a:srgbClr val="1A1A1A"/>
                 </a:solidFill>
@@ -14845,8 +14981,8 @@
         </p:nvSpPr>
         <p:spPr>
           <a:xfrm>
-            <a:off x="841248" y="5230368"/>
-            <a:ext cx="5715000" cy="438912"/>
+            <a:off x="841248" y="5047488"/>
+            <a:ext cx="4160520" cy="402336"/>
           </a:xfrm>
           <a:prstGeom prst="roundRect">
             <a:avLst>
@@ -14901,8 +15037,8 @@
         </p:blipFill>
         <p:spPr>
           <a:xfrm>
-            <a:off x="987552" y="5330952"/>
-            <a:ext cx="237744" cy="237744"/>
+            <a:off x="969264" y="5148071"/>
+            <a:ext cx="201168" cy="201168"/>
           </a:xfrm>
           <a:prstGeom prst="rect">
             <a:avLst/>
@@ -14917,8 +15053,8 @@
         </p:nvSpPr>
         <p:spPr>
           <a:xfrm>
-            <a:off x="1353312" y="5230368"/>
-            <a:ext cx="5029200" cy="438912"/>
+            <a:off x="1280160" y="5047488"/>
+            <a:ext cx="3593591" cy="402336"/>
           </a:xfrm>
           <a:prstGeom prst="rect">
             <a:avLst/>
@@ -14943,7 +15079,7 @@
               </a:spcAft>
             </a:pPr>
             <a:r>
-              <a:rPr sz="1200" b="0">
+              <a:rPr sz="1050" b="0">
                 <a:solidFill>
                   <a:srgbClr val="1A1A1A"/>
                 </a:solidFill>
@@ -14962,8 +15098,8 @@
         </p:nvSpPr>
         <p:spPr>
           <a:xfrm>
-            <a:off x="6812280" y="2670048"/>
-            <a:ext cx="4538167" cy="2999232"/>
+            <a:off x="5385816" y="3806634"/>
+            <a:ext cx="5964631" cy="579754"/>
           </a:xfrm>
           <a:prstGeom prst="roundRect">
             <a:avLst>
@@ -15002,100 +15138,9 @@
           </a:p>
         </p:txBody>
       </p:sp>
-      <p:sp>
-        <p:nvSpPr>
-          <p:cNvPr id="26" name="Rounded Rectangle 25"/>
-          <p:cNvSpPr/>
-          <p:nvPr/>
-        </p:nvSpPr>
-        <p:spPr>
-          <a:xfrm>
-            <a:off x="7013448" y="2871216"/>
-            <a:ext cx="1298448" cy="310896"/>
-          </a:xfrm>
-          <a:prstGeom prst="roundRect">
-            <a:avLst>
-              <a:gd name="adj" fmla="val 50000"/>
-            </a:avLst>
-          </a:prstGeom>
-          <a:solidFill>
-            <a:srgbClr val="FCECEC"/>
-          </a:solidFill>
-          <a:ln>
-            <a:noFill/>
-          </a:ln>
-          <a:effectLst/>
-        </p:spPr>
-        <p:style>
-          <a:lnRef idx="1">
-            <a:schemeClr val="accent1"/>
-          </a:lnRef>
-          <a:fillRef idx="3">
-            <a:schemeClr val="accent1"/>
-          </a:fillRef>
-          <a:effectRef idx="2">
-            <a:schemeClr val="accent1"/>
-          </a:effectRef>
-          <a:fontRef idx="minor">
-            <a:schemeClr val="lt1"/>
-          </a:fontRef>
-        </p:style>
-        <p:txBody>
-          <a:bodyPr rtlCol="0" anchor="ctr"/>
-          <a:lstStyle/>
-          <a:p>
-            <a:pPr algn="ctr"/>
-          </a:p>
-        </p:txBody>
-      </p:sp>
-      <p:sp>
-        <p:nvSpPr>
-          <p:cNvPr id="27" name="TextBox 26"/>
-          <p:cNvSpPr txBox="1"/>
-          <p:nvPr/>
-        </p:nvSpPr>
-        <p:spPr>
-          <a:xfrm>
-            <a:off x="7013448" y="2871216"/>
-            <a:ext cx="1298448" cy="310896"/>
-          </a:xfrm>
-          <a:prstGeom prst="rect">
-            <a:avLst/>
-          </a:prstGeom>
-          <a:noFill/>
-        </p:spPr>
-        <p:txBody>
-          <a:bodyPr wrap="none" anchor="ctr" lIns="0" rIns="0" tIns="0" bIns="0">
-            <a:spAutoFit/>
-          </a:bodyPr>
-          <a:lstStyle/>
-          <a:p>
-            <a:pPr algn="ctr">
-              <a:lnSpc>
-                <a:spcPct val="106000"/>
-              </a:lnSpc>
-              <a:spcBef>
-                <a:spcPts val="0"/>
-              </a:spcBef>
-              <a:spcAft>
-                <a:spcPts val="0"/>
-              </a:spcAft>
-            </a:pPr>
-            <a:r>
-              <a:rPr sz="850" b="1">
-                <a:solidFill>
-                  <a:srgbClr val="B80000"/>
-                </a:solidFill>
-                <a:latin typeface="Red Hat Display"/>
-              </a:rPr>
-              <a:t>MEDIA PASS</a:t>
-            </a:r>
-          </a:p>
-        </p:txBody>
-      </p:sp>
       <p:pic>
         <p:nvPicPr>
-          <p:cNvPr id="28" name="Picture 27" descr="eye_slate.png"/>
+          <p:cNvPr id="26" name="Picture 25" descr="02-red-to-green.png"/>
           <p:cNvPicPr>
             <a:picLocks noChangeAspect="1"/>
           </p:cNvPicPr>
@@ -15109,62 +15154,17 @@
         </p:blipFill>
         <p:spPr>
           <a:xfrm>
-            <a:off x="8843619" y="3383280"/>
-            <a:ext cx="475488" cy="475488"/>
+            <a:off x="5532120" y="3952938"/>
+            <a:ext cx="5672023" cy="287146"/>
           </a:xfrm>
           <a:prstGeom prst="rect">
             <a:avLst/>
           </a:prstGeom>
         </p:spPr>
       </p:pic>
-      <p:sp>
-        <p:nvSpPr>
-          <p:cNvPr id="29" name="TextBox 28"/>
-          <p:cNvSpPr txBox="1"/>
-          <p:nvPr/>
-        </p:nvSpPr>
-        <p:spPr>
-          <a:xfrm>
-            <a:off x="7050024" y="3995928"/>
-            <a:ext cx="4062679" cy="1536192"/>
-          </a:xfrm>
-          <a:prstGeom prst="rect">
-            <a:avLst/>
-          </a:prstGeom>
-          <a:noFill/>
-        </p:spPr>
-        <p:txBody>
-          <a:bodyPr wrap="square" anchor="t" lIns="0" rIns="0" tIns="0" bIns="0">
-            <a:spAutoFit/>
-          </a:bodyPr>
-          <a:lstStyle/>
-          <a:p>
-            <a:pPr algn="l">
-              <a:lnSpc>
-                <a:spcPct val="120000"/>
-              </a:lnSpc>
-              <a:spcBef>
-                <a:spcPts val="0"/>
-              </a:spcBef>
-              <a:spcAft>
-                <a:spcPts val="0"/>
-              </a:spcAft>
-            </a:pPr>
-            <a:r>
-              <a:rPr sz="950" b="0">
-                <a:solidFill>
-                  <a:srgbClr val="8A9099"/>
-                </a:solidFill>
-                <a:latin typeface="Red Hat Text"/>
-              </a:rPr>
-              <a:t>The wrap-up diagram app-security-testing-02-red-to-green.svg — the `seed-appsec` branch ("five flaws · every gate RED") flowing left to right through five fix steps ("externalize secret" · "drop vuln dep" · "stop baking log4shell" · "harden manifest" · "add headers") into a single green end state "every gate GREEN · scanned · signed · deployed."</a:t>
-            </a:r>
-          </a:p>
-        </p:txBody>
-      </p:sp>
       <p:cxnSp>
         <p:nvCxnSpPr>
-          <p:cNvPr id="30" name="Connector 29"/>
+          <p:cNvPr id="27" name="Connector 26"/>
           <p:cNvCxnSpPr/>
           <p:nvPr/>
         </p:nvCxnSpPr>
@@ -15200,7 +15200,7 @@
       </p:cxnSp>
       <p:sp>
         <p:nvSpPr>
-          <p:cNvPr id="31" name="TextBox 30"/>
+          <p:cNvPr id="28" name="TextBox 27"/>
           <p:cNvSpPr txBox="1"/>
           <p:nvPr/>
         </p:nvSpPr>
@@ -15245,7 +15245,7 @@
       </p:sp>
       <p:sp>
         <p:nvSpPr>
-          <p:cNvPr id="32" name="TextBox 31"/>
+          <p:cNvPr id="29" name="TextBox 28"/>
           <p:cNvSpPr txBox="1"/>
           <p:nvPr/>
         </p:nvSpPr>
